--- a/a/CFE collages long.pptx
+++ b/a/CFE collages long.pptx
@@ -7,6 +7,7 @@
   <p:sldIdLst>
     <p:sldId id="256" r:id="rId2"/>
     <p:sldId id="257" r:id="rId3"/>
+    <p:sldId id="258" r:id="rId4"/>
   </p:sldIdLst>
   <p:sldSz cx="27432000" cy="6858000"/>
   <p:notesSz cx="6858000" cy="9144000"/>
@@ -3105,7 +3106,7 @@
         <p:spPr>
           <a:xfrm>
             <a:off x="0" y="0"/>
-            <a:ext cx="19354800" cy="6705600"/>
+            <a:ext cx="19507200" cy="6705600"/>
           </a:xfrm>
           <a:prstGeom prst="homePlate">
             <a:avLst>
@@ -3175,7 +3176,7 @@
         </p:blipFill>
         <p:spPr bwMode="auto">
           <a:xfrm>
-            <a:off x="304799" y="201391"/>
+            <a:off x="152400" y="183099"/>
             <a:ext cx="4572000" cy="3048952"/>
           </a:xfrm>
           <a:prstGeom prst="rect">
@@ -3216,7 +3217,7 @@
         </p:blipFill>
         <p:spPr bwMode="auto">
           <a:xfrm>
-            <a:off x="5091534" y="3434080"/>
+            <a:off x="4939135" y="3415788"/>
             <a:ext cx="4550949" cy="3034914"/>
           </a:xfrm>
           <a:prstGeom prst="rect">
@@ -3257,7 +3258,7 @@
         </p:blipFill>
         <p:spPr bwMode="auto">
           <a:xfrm>
-            <a:off x="9811499" y="201390"/>
+            <a:off x="9659100" y="183098"/>
             <a:ext cx="4572000" cy="3048953"/>
           </a:xfrm>
           <a:prstGeom prst="rect">
@@ -3298,7 +3299,7 @@
         </p:blipFill>
         <p:spPr bwMode="auto">
           <a:xfrm>
-            <a:off x="5067150" y="201391"/>
+            <a:off x="4914751" y="183099"/>
             <a:ext cx="4575333" cy="3051175"/>
           </a:xfrm>
           <a:prstGeom prst="rect">
@@ -3339,7 +3340,7 @@
         </p:blipFill>
         <p:spPr bwMode="auto">
           <a:xfrm>
-            <a:off x="326135" y="3434080"/>
+            <a:off x="173736" y="3415788"/>
             <a:ext cx="4550664" cy="3034725"/>
           </a:xfrm>
           <a:prstGeom prst="rect">
@@ -3380,7 +3381,7 @@
         </p:blipFill>
         <p:spPr bwMode="auto">
           <a:xfrm>
-            <a:off x="14554200" y="3429000"/>
+            <a:off x="14401801" y="3410708"/>
             <a:ext cx="4572000" cy="3048953"/>
           </a:xfrm>
           <a:prstGeom prst="rect">
@@ -3421,7 +3422,7 @@
         </p:blipFill>
         <p:spPr bwMode="auto">
           <a:xfrm>
-            <a:off x="9811499" y="3429000"/>
+            <a:off x="9659100" y="3410708"/>
             <a:ext cx="4572000" cy="3048953"/>
           </a:xfrm>
           <a:prstGeom prst="rect">
@@ -3462,7 +3463,7 @@
         </p:blipFill>
         <p:spPr bwMode="auto">
           <a:xfrm>
-            <a:off x="14554200" y="197328"/>
+            <a:off x="14401801" y="179036"/>
             <a:ext cx="4572000" cy="3048953"/>
           </a:xfrm>
           <a:prstGeom prst="rect">
@@ -3898,6 +3899,420 @@
     <p:extLst>
       <p:ext uri="{BB962C8B-B14F-4D97-AF65-F5344CB8AC3E}">
         <p14:creationId xmlns:p14="http://schemas.microsoft.com/office/powerpoint/2010/main" val="460875230"/>
+      </p:ext>
+    </p:extLst>
+  </p:cSld>
+  <p:clrMapOvr>
+    <a:masterClrMapping/>
+  </p:clrMapOvr>
+</p:sld>
+</file>
+
+<file path=ppt/slides/slide3.xml><?xml version="1.0" encoding="utf-8"?>
+<p:sld xmlns:a="http://schemas.openxmlformats.org/drawingml/2006/main" xmlns:r="http://schemas.openxmlformats.org/officeDocument/2006/relationships" xmlns:p="http://schemas.openxmlformats.org/presentationml/2006/main">
+  <p:cSld>
+    <p:spTree>
+      <p:nvGrpSpPr>
+        <p:cNvPr id="1" name=""/>
+        <p:cNvGrpSpPr/>
+        <p:nvPr/>
+      </p:nvGrpSpPr>
+      <p:grpSpPr>
+        <a:xfrm>
+          <a:off x="0" y="0"/>
+          <a:ext cx="0" cy="0"/>
+          <a:chOff x="0" y="0"/>
+          <a:chExt cx="0" cy="0"/>
+        </a:xfrm>
+      </p:grpSpPr>
+      <p:sp>
+        <p:nvSpPr>
+          <p:cNvPr id="9" name="Пятиугольник 8"/>
+          <p:cNvSpPr/>
+          <p:nvPr/>
+        </p:nvSpPr>
+        <p:spPr>
+          <a:xfrm>
+            <a:off x="0" y="0"/>
+            <a:ext cx="18211800" cy="6553200"/>
+          </a:xfrm>
+          <a:prstGeom prst="homePlate">
+            <a:avLst>
+              <a:gd name="adj" fmla="val 0"/>
+            </a:avLst>
+          </a:prstGeom>
+          <a:gradFill>
+            <a:gsLst>
+              <a:gs pos="100000">
+                <a:srgbClr val="C8DFFA"/>
+              </a:gs>
+              <a:gs pos="100000">
+                <a:srgbClr val="2446C8"/>
+              </a:gs>
+            </a:gsLst>
+            <a:lin ang="0" scaled="0"/>
+          </a:gradFill>
+          <a:ln>
+            <a:noFill/>
+          </a:ln>
+        </p:spPr>
+        <p:style>
+          <a:lnRef idx="2">
+            <a:schemeClr val="accent1">
+              <a:shade val="50000"/>
+            </a:schemeClr>
+          </a:lnRef>
+          <a:fillRef idx="1">
+            <a:schemeClr val="accent1"/>
+          </a:fillRef>
+          <a:effectRef idx="0">
+            <a:schemeClr val="accent1"/>
+          </a:effectRef>
+          <a:fontRef idx="minor">
+            <a:schemeClr val="lt1"/>
+          </a:fontRef>
+        </p:style>
+        <p:txBody>
+          <a:bodyPr rtlCol="0" anchor="ctr"/>
+          <a:lstStyle/>
+          <a:p>
+            <a:pPr algn="ctr"/>
+            <a:endParaRPr lang="ru-RU"/>
+          </a:p>
+        </p:txBody>
+      </p:sp>
+      <p:pic>
+        <p:nvPicPr>
+          <p:cNvPr id="1026" name="Picture 2" descr="E:\112 CFE ARCHIVE AND DATA II\СЕРВЕР CFE БОЛЕЕ ПОЛНЫЙ\DELTACENTER_SERVER\G20\G20 YEA Summit Argentina 20-22 September 2018\Photos\Day 1\EY_G20_0093.jpg"/>
+          <p:cNvPicPr>
+            <a:picLocks noChangeAspect="1" noChangeArrowheads="1"/>
+          </p:cNvPicPr>
+          <p:nvPr/>
+        </p:nvPicPr>
+        <p:blipFill>
+          <a:blip r:embed="rId2" cstate="print">
+            <a:extLst>
+              <a:ext uri="{28A0092B-C50C-407E-A947-70E740481C1C}">
+                <a14:useLocalDpi xmlns:a14="http://schemas.microsoft.com/office/drawing/2010/main" val="0"/>
+              </a:ext>
+            </a:extLst>
+          </a:blip>
+          <a:srcRect/>
+          <a:stretch>
+            <a:fillRect/>
+          </a:stretch>
+        </p:blipFill>
+        <p:spPr bwMode="auto">
+          <a:xfrm>
+            <a:off x="385021" y="394030"/>
+            <a:ext cx="4181399" cy="2788470"/>
+          </a:xfrm>
+          <a:prstGeom prst="rect">
+            <a:avLst/>
+          </a:prstGeom>
+          <a:noFill/>
+          <a:extLst>
+            <a:ext uri="{909E8E84-426E-40DD-AFC4-6F175D3DCCD1}">
+              <a14:hiddenFill xmlns:a14="http://schemas.microsoft.com/office/drawing/2010/main">
+                <a:solidFill>
+                  <a:srgbClr val="FFFFFF"/>
+                </a:solidFill>
+              </a14:hiddenFill>
+            </a:ext>
+          </a:extLst>
+        </p:spPr>
+      </p:pic>
+      <p:pic>
+        <p:nvPicPr>
+          <p:cNvPr id="1027" name="Picture 3" descr="E:\112 CFE ARCHIVE AND DATA II\СЕРВЕР CFE БОЛЕЕ ПОЛНЫЙ\DELTACENTER_SERVER\G20\G20 YEA Summit Argentina 20-22 September 2018\Photos\Day 1\EY_G20_0022.jpg"/>
+          <p:cNvPicPr>
+            <a:picLocks noChangeAspect="1" noChangeArrowheads="1"/>
+          </p:cNvPicPr>
+          <p:nvPr/>
+        </p:nvPicPr>
+        <p:blipFill>
+          <a:blip r:embed="rId3" cstate="print">
+            <a:extLst>
+              <a:ext uri="{28A0092B-C50C-407E-A947-70E740481C1C}">
+                <a14:useLocalDpi xmlns:a14="http://schemas.microsoft.com/office/drawing/2010/main" val="0"/>
+              </a:ext>
+            </a:extLst>
+          </a:blip>
+          <a:srcRect/>
+          <a:stretch>
+            <a:fillRect/>
+          </a:stretch>
+        </p:blipFill>
+        <p:spPr bwMode="auto">
+          <a:xfrm>
+            <a:off x="4826952" y="3441857"/>
+            <a:ext cx="4167699" cy="2779334"/>
+          </a:xfrm>
+          <a:prstGeom prst="rect">
+            <a:avLst/>
+          </a:prstGeom>
+          <a:noFill/>
+          <a:extLst>
+            <a:ext uri="{909E8E84-426E-40DD-AFC4-6F175D3DCCD1}">
+              <a14:hiddenFill xmlns:a14="http://schemas.microsoft.com/office/drawing/2010/main">
+                <a:solidFill>
+                  <a:srgbClr val="FFFFFF"/>
+                </a:solidFill>
+              </a14:hiddenFill>
+            </a:ext>
+          </a:extLst>
+        </p:spPr>
+      </p:pic>
+      <p:pic>
+        <p:nvPicPr>
+          <p:cNvPr id="1028" name="Picture 4" descr="E:\112 CFE ARCHIVE AND DATA II\СЕРВЕР CFE БОЛЕЕ ПОЛНЫЙ\DELTACENTER_SERVER\G20\G20 YEA Summit Argentina 20-22 September 2018\Photos\Day 1\EY_G20_0101.jpg"/>
+          <p:cNvPicPr>
+            <a:picLocks noChangeAspect="1" noChangeArrowheads="1"/>
+          </p:cNvPicPr>
+          <p:nvPr/>
+        </p:nvPicPr>
+        <p:blipFill>
+          <a:blip r:embed="rId4" cstate="print">
+            <a:extLst>
+              <a:ext uri="{28A0092B-C50C-407E-A947-70E740481C1C}">
+                <a14:useLocalDpi xmlns:a14="http://schemas.microsoft.com/office/drawing/2010/main" val="0"/>
+              </a:ext>
+            </a:extLst>
+          </a:blip>
+          <a:srcRect/>
+          <a:stretch>
+            <a:fillRect/>
+          </a:stretch>
+        </p:blipFill>
+        <p:spPr bwMode="auto">
+          <a:xfrm>
+            <a:off x="9224221" y="396066"/>
+            <a:ext cx="4186977" cy="2792191"/>
+          </a:xfrm>
+          <a:prstGeom prst="rect">
+            <a:avLst/>
+          </a:prstGeom>
+          <a:noFill/>
+          <a:extLst>
+            <a:ext uri="{909E8E84-426E-40DD-AFC4-6F175D3DCCD1}">
+              <a14:hiddenFill xmlns:a14="http://schemas.microsoft.com/office/drawing/2010/main">
+                <a:solidFill>
+                  <a:srgbClr val="FFFFFF"/>
+                </a:solidFill>
+              </a14:hiddenFill>
+            </a:ext>
+          </a:extLst>
+        </p:spPr>
+      </p:pic>
+      <p:pic>
+        <p:nvPicPr>
+          <p:cNvPr id="1029" name="Picture 5" descr="E:\112 CFE ARCHIVE AND DATA II\СЕРВЕР CFE БОЛЕЕ ПОЛНЫЙ\DELTACENTER_SERVER\G20\G20 YEA Summit Argentina 20-22 September 2018\Photos\Day 1\EY_G20_0288.jpg"/>
+          <p:cNvPicPr>
+            <a:picLocks noChangeAspect="1" noChangeArrowheads="1"/>
+          </p:cNvPicPr>
+          <p:nvPr/>
+        </p:nvPicPr>
+        <p:blipFill>
+          <a:blip r:embed="rId5" cstate="print">
+            <a:extLst>
+              <a:ext uri="{28A0092B-C50C-407E-A947-70E740481C1C}">
+                <a14:useLocalDpi xmlns:a14="http://schemas.microsoft.com/office/drawing/2010/main" val="0"/>
+              </a:ext>
+            </a:extLst>
+          </a:blip>
+          <a:srcRect/>
+          <a:stretch>
+            <a:fillRect/>
+          </a:stretch>
+        </p:blipFill>
+        <p:spPr bwMode="auto">
+          <a:xfrm>
+            <a:off x="4804621" y="394031"/>
+            <a:ext cx="4190030" cy="2794226"/>
+          </a:xfrm>
+          <a:prstGeom prst="rect">
+            <a:avLst/>
+          </a:prstGeom>
+          <a:noFill/>
+          <a:extLst>
+            <a:ext uri="{909E8E84-426E-40DD-AFC4-6F175D3DCCD1}">
+              <a14:hiddenFill xmlns:a14="http://schemas.microsoft.com/office/drawing/2010/main">
+                <a:solidFill>
+                  <a:srgbClr val="FFFFFF"/>
+                </a:solidFill>
+              </a14:hiddenFill>
+            </a:ext>
+          </a:extLst>
+        </p:spPr>
+      </p:pic>
+      <p:pic>
+        <p:nvPicPr>
+          <p:cNvPr id="1030" name="Picture 6" descr="E:\112 CFE ARCHIVE AND DATA II\СЕРВЕР CFE БОЛЕЕ ПОЛНЫЙ\DELTACENTER_SERVER\G20\G20 YEA Summit Argentina 20-22 September 2018\Photos\Day 1\EY_G20_0553.jpg"/>
+          <p:cNvPicPr>
+            <a:picLocks noChangeAspect="1" noChangeArrowheads="1"/>
+          </p:cNvPicPr>
+          <p:nvPr/>
+        </p:nvPicPr>
+        <p:blipFill>
+          <a:blip r:embed="rId6" cstate="print">
+            <a:extLst>
+              <a:ext uri="{28A0092B-C50C-407E-A947-70E740481C1C}">
+                <a14:useLocalDpi xmlns:a14="http://schemas.microsoft.com/office/drawing/2010/main" val="0"/>
+              </a:ext>
+            </a:extLst>
+          </a:blip>
+          <a:srcRect/>
+          <a:stretch>
+            <a:fillRect/>
+          </a:stretch>
+        </p:blipFill>
+        <p:spPr bwMode="auto">
+          <a:xfrm>
+            <a:off x="406357" y="3442030"/>
+            <a:ext cx="4167438" cy="2779161"/>
+          </a:xfrm>
+          <a:prstGeom prst="rect">
+            <a:avLst/>
+          </a:prstGeom>
+          <a:noFill/>
+          <a:extLst>
+            <a:ext uri="{909E8E84-426E-40DD-AFC4-6F175D3DCCD1}">
+              <a14:hiddenFill xmlns:a14="http://schemas.microsoft.com/office/drawing/2010/main">
+                <a:solidFill>
+                  <a:srgbClr val="FFFFFF"/>
+                </a:solidFill>
+              </a14:hiddenFill>
+            </a:ext>
+          </a:extLst>
+        </p:spPr>
+      </p:pic>
+      <p:pic>
+        <p:nvPicPr>
+          <p:cNvPr id="1031" name="Picture 7" descr="E:\112 CFE ARCHIVE AND DATA II\СЕРВЕР CFE БОЛЕЕ ПОЛНЫЙ\DELTACENTER_SERVER\G20\G20 YEA Summit Argentina 20-22 September 2018\Photos\Day 2\EY_G20_0694.jpg"/>
+          <p:cNvPicPr>
+            <a:picLocks noChangeAspect="1" noChangeArrowheads="1"/>
+          </p:cNvPicPr>
+          <p:nvPr/>
+        </p:nvPicPr>
+        <p:blipFill>
+          <a:blip r:embed="rId7" cstate="print">
+            <a:extLst>
+              <a:ext uri="{28A0092B-C50C-407E-A947-70E740481C1C}">
+                <a14:useLocalDpi xmlns:a14="http://schemas.microsoft.com/office/drawing/2010/main" val="0"/>
+              </a:ext>
+            </a:extLst>
+          </a:blip>
+          <a:srcRect/>
+          <a:stretch>
+            <a:fillRect/>
+          </a:stretch>
+        </p:blipFill>
+        <p:spPr bwMode="auto">
+          <a:xfrm>
+            <a:off x="13643821" y="3442030"/>
+            <a:ext cx="4186977" cy="2792191"/>
+          </a:xfrm>
+          <a:prstGeom prst="rect">
+            <a:avLst/>
+          </a:prstGeom>
+          <a:noFill/>
+          <a:extLst>
+            <a:ext uri="{909E8E84-426E-40DD-AFC4-6F175D3DCCD1}">
+              <a14:hiddenFill xmlns:a14="http://schemas.microsoft.com/office/drawing/2010/main">
+                <a:solidFill>
+                  <a:srgbClr val="FFFFFF"/>
+                </a:solidFill>
+              </a14:hiddenFill>
+            </a:ext>
+          </a:extLst>
+        </p:spPr>
+      </p:pic>
+      <p:pic>
+        <p:nvPicPr>
+          <p:cNvPr id="1032" name="Picture 8" descr="E:\112 CFE ARCHIVE AND DATA II\СЕРВЕР CFE БОЛЕЕ ПОЛНЫЙ\DELTACENTER_SERVER\G20\G20 YEA Summit Argentina 20-22 September 2018\Photos\Day 2\EY_G20_0612.jpg"/>
+          <p:cNvPicPr>
+            <a:picLocks noChangeAspect="1" noChangeArrowheads="1"/>
+          </p:cNvPicPr>
+          <p:nvPr/>
+        </p:nvPicPr>
+        <p:blipFill>
+          <a:blip r:embed="rId8" cstate="print">
+            <a:extLst>
+              <a:ext uri="{28A0092B-C50C-407E-A947-70E740481C1C}">
+                <a14:useLocalDpi xmlns:a14="http://schemas.microsoft.com/office/drawing/2010/main" val="0"/>
+              </a:ext>
+            </a:extLst>
+          </a:blip>
+          <a:srcRect/>
+          <a:stretch>
+            <a:fillRect/>
+          </a:stretch>
+        </p:blipFill>
+        <p:spPr bwMode="auto">
+          <a:xfrm>
+            <a:off x="9224221" y="3429000"/>
+            <a:ext cx="4186977" cy="2792191"/>
+          </a:xfrm>
+          <a:prstGeom prst="rect">
+            <a:avLst/>
+          </a:prstGeom>
+          <a:noFill/>
+          <a:extLst>
+            <a:ext uri="{909E8E84-426E-40DD-AFC4-6F175D3DCCD1}">
+              <a14:hiddenFill xmlns:a14="http://schemas.microsoft.com/office/drawing/2010/main">
+                <a:solidFill>
+                  <a:srgbClr val="FFFFFF"/>
+                </a:solidFill>
+              </a14:hiddenFill>
+            </a:ext>
+          </a:extLst>
+        </p:spPr>
+      </p:pic>
+      <p:pic>
+        <p:nvPicPr>
+          <p:cNvPr id="1033" name="Picture 9" descr="E:\112 CFE ARCHIVE AND DATA II\СЕРВЕР CFE БОЛЕЕ ПОЛНЫЙ\DELTACENTER_SERVER\G20\G20 YEA Summit Argentina 20-22 September 2018\Photos\Day 2\EY_G20_0615.jpg"/>
+          <p:cNvPicPr>
+            <a:picLocks noChangeAspect="1" noChangeArrowheads="1"/>
+          </p:cNvPicPr>
+          <p:nvPr/>
+        </p:nvPicPr>
+        <p:blipFill>
+          <a:blip r:embed="rId9" cstate="print">
+            <a:extLst>
+              <a:ext uri="{28A0092B-C50C-407E-A947-70E740481C1C}">
+                <a14:useLocalDpi xmlns:a14="http://schemas.microsoft.com/office/drawing/2010/main" val="0"/>
+              </a:ext>
+            </a:extLst>
+          </a:blip>
+          <a:srcRect/>
+          <a:stretch>
+            <a:fillRect/>
+          </a:stretch>
+        </p:blipFill>
+        <p:spPr bwMode="auto">
+          <a:xfrm>
+            <a:off x="13643820" y="396066"/>
+            <a:ext cx="4186977" cy="2792191"/>
+          </a:xfrm>
+          <a:prstGeom prst="rect">
+            <a:avLst/>
+          </a:prstGeom>
+          <a:noFill/>
+          <a:extLst>
+            <a:ext uri="{909E8E84-426E-40DD-AFC4-6F175D3DCCD1}">
+              <a14:hiddenFill xmlns:a14="http://schemas.microsoft.com/office/drawing/2010/main">
+                <a:solidFill>
+                  <a:srgbClr val="FFFFFF"/>
+                </a:solidFill>
+              </a14:hiddenFill>
+            </a:ext>
+          </a:extLst>
+        </p:spPr>
+      </p:pic>
+    </p:spTree>
+    <p:extLst>
+      <p:ext uri="{BB962C8B-B14F-4D97-AF65-F5344CB8AC3E}">
+        <p14:creationId xmlns:p14="http://schemas.microsoft.com/office/powerpoint/2010/main" val="4055247616"/>
       </p:ext>
     </p:extLst>
   </p:cSld>

--- a/a/CFE collages long.pptx
+++ b/a/CFE collages long.pptx
@@ -5,9 +5,10 @@
     <p:sldMasterId id="2147483648" r:id="rId1"/>
   </p:sldMasterIdLst>
   <p:sldIdLst>
-    <p:sldId id="256" r:id="rId2"/>
-    <p:sldId id="257" r:id="rId3"/>
-    <p:sldId id="258" r:id="rId4"/>
+    <p:sldId id="258" r:id="rId2"/>
+    <p:sldId id="259" r:id="rId3"/>
+    <p:sldId id="256" r:id="rId4"/>
+    <p:sldId id="257" r:id="rId5"/>
   </p:sldIdLst>
   <p:sldSz cx="27432000" cy="6858000"/>
   <p:notesSz cx="6858000" cy="9144000"/>
@@ -3106,7 +3107,7 @@
         <p:spPr>
           <a:xfrm>
             <a:off x="0" y="0"/>
-            <a:ext cx="19507200" cy="6705600"/>
+            <a:ext cx="18211800" cy="6553200"/>
           </a:xfrm>
           <a:prstGeom prst="homePlate">
             <a:avLst>
@@ -3176,8 +3177,8 @@
         </p:blipFill>
         <p:spPr bwMode="auto">
           <a:xfrm>
-            <a:off x="152400" y="183099"/>
-            <a:ext cx="4572000" cy="3048952"/>
+            <a:off x="385021" y="394030"/>
+            <a:ext cx="4181399" cy="2788470"/>
           </a:xfrm>
           <a:prstGeom prst="rect">
             <a:avLst/>
@@ -3217,8 +3218,8 @@
         </p:blipFill>
         <p:spPr bwMode="auto">
           <a:xfrm>
-            <a:off x="4939135" y="3415788"/>
-            <a:ext cx="4550949" cy="3034914"/>
+            <a:off x="4826952" y="3441857"/>
+            <a:ext cx="4167699" cy="2779334"/>
           </a:xfrm>
           <a:prstGeom prst="rect">
             <a:avLst/>
@@ -3258,8 +3259,8 @@
         </p:blipFill>
         <p:spPr bwMode="auto">
           <a:xfrm>
-            <a:off x="9659100" y="183098"/>
-            <a:ext cx="4572000" cy="3048953"/>
+            <a:off x="9224221" y="396066"/>
+            <a:ext cx="4186977" cy="2792191"/>
           </a:xfrm>
           <a:prstGeom prst="rect">
             <a:avLst/>
@@ -3299,8 +3300,8 @@
         </p:blipFill>
         <p:spPr bwMode="auto">
           <a:xfrm>
-            <a:off x="4914751" y="183099"/>
-            <a:ext cx="4575333" cy="3051175"/>
+            <a:off x="4804621" y="394031"/>
+            <a:ext cx="4190030" cy="2794226"/>
           </a:xfrm>
           <a:prstGeom prst="rect">
             <a:avLst/>
@@ -3340,8 +3341,8 @@
         </p:blipFill>
         <p:spPr bwMode="auto">
           <a:xfrm>
-            <a:off x="173736" y="3415788"/>
-            <a:ext cx="4550664" cy="3034725"/>
+            <a:off x="406357" y="3442030"/>
+            <a:ext cx="4167438" cy="2779161"/>
           </a:xfrm>
           <a:prstGeom prst="rect">
             <a:avLst/>
@@ -3381,8 +3382,8 @@
         </p:blipFill>
         <p:spPr bwMode="auto">
           <a:xfrm>
-            <a:off x="14401801" y="3410708"/>
-            <a:ext cx="4572000" cy="3048953"/>
+            <a:off x="13643821" y="3442030"/>
+            <a:ext cx="4186977" cy="2792191"/>
           </a:xfrm>
           <a:prstGeom prst="rect">
             <a:avLst/>
@@ -3422,8 +3423,8 @@
         </p:blipFill>
         <p:spPr bwMode="auto">
           <a:xfrm>
-            <a:off x="9659100" y="3410708"/>
-            <a:ext cx="4572000" cy="3048953"/>
+            <a:off x="9224221" y="3429000"/>
+            <a:ext cx="4186977" cy="2792191"/>
           </a:xfrm>
           <a:prstGeom prst="rect">
             <a:avLst/>
@@ -3463,8 +3464,8 @@
         </p:blipFill>
         <p:spPr bwMode="auto">
           <a:xfrm>
-            <a:off x="14401801" y="179036"/>
-            <a:ext cx="4572000" cy="3048953"/>
+            <a:off x="13643820" y="396066"/>
+            <a:ext cx="4186977" cy="2792191"/>
           </a:xfrm>
           <a:prstGeom prst="rect">
             <a:avLst/>
@@ -3484,7 +3485,7 @@
     </p:spTree>
     <p:extLst>
       <p:ext uri="{BB962C8B-B14F-4D97-AF65-F5344CB8AC3E}">
-        <p14:creationId xmlns:p14="http://schemas.microsoft.com/office/powerpoint/2010/main" val="250044620"/>
+        <p14:creationId xmlns:p14="http://schemas.microsoft.com/office/powerpoint/2010/main" val="4055247616"/>
       </p:ext>
     </p:extLst>
   </p:cSld>
@@ -3511,71 +3512,15 @@
           <a:chExt cx="0" cy="0"/>
         </a:xfrm>
       </p:grpSpPr>
-      <p:sp>
-        <p:nvSpPr>
-          <p:cNvPr id="9" name="Пятиугольник 8"/>
-          <p:cNvSpPr/>
-          <p:nvPr/>
-        </p:nvSpPr>
-        <p:spPr>
-          <a:xfrm>
-            <a:off x="0" y="0"/>
-            <a:ext cx="27432000" cy="6858000"/>
-          </a:xfrm>
-          <a:prstGeom prst="homePlate">
-            <a:avLst>
-              <a:gd name="adj" fmla="val 0"/>
-            </a:avLst>
-          </a:prstGeom>
-          <a:gradFill>
-            <a:gsLst>
-              <a:gs pos="100000">
-                <a:srgbClr val="C8DFFA"/>
-              </a:gs>
-              <a:gs pos="100000">
-                <a:srgbClr val="2446C8"/>
-              </a:gs>
-            </a:gsLst>
-            <a:lin ang="0" scaled="0"/>
-          </a:gradFill>
-          <a:ln>
-            <a:noFill/>
-          </a:ln>
-        </p:spPr>
-        <p:style>
-          <a:lnRef idx="2">
-            <a:schemeClr val="accent1">
-              <a:shade val="50000"/>
-            </a:schemeClr>
-          </a:lnRef>
-          <a:fillRef idx="1">
-            <a:schemeClr val="accent1"/>
-          </a:fillRef>
-          <a:effectRef idx="0">
-            <a:schemeClr val="accent1"/>
-          </a:effectRef>
-          <a:fontRef idx="minor">
-            <a:schemeClr val="lt1"/>
-          </a:fontRef>
-        </p:style>
-        <p:txBody>
-          <a:bodyPr rtlCol="0" anchor="ctr"/>
-          <a:lstStyle/>
-          <a:p>
-            <a:pPr algn="ctr"/>
-            <a:endParaRPr lang="ru-RU"/>
-          </a:p>
-        </p:txBody>
-      </p:sp>
       <p:pic>
         <p:nvPicPr>
-          <p:cNvPr id="1026" name="Picture 2" descr="E:\112 CFE ARCHIVE AND DATA II\СЕРВЕР CFE БОЛЕЕ ПОЛНЫЙ\DELTACENTER_SERVER\G20\G20 YEA Summit Argentina 20-22 September 2018\Photos\Day 1\EY_G20_0093.jpg"/>
+          <p:cNvPr id="4" name="Picture 6" descr="E:\112 CFE ARCHIVE AND DATA II\СЕРВЕР CFE БОЛЕЕ ПОЛНЫЙ\DELTACENTER_SERVER\G20\G20 YEA Summit Argentina 20-22 September 2018\Photos\Day 1\EY_G20_0553.jpg"/>
           <p:cNvPicPr>
             <a:picLocks noChangeAspect="1" noChangeArrowheads="1"/>
           </p:cNvPicPr>
           <p:nvPr/>
         </p:nvPicPr>
-        <p:blipFill>
+        <p:blipFill rotWithShape="1">
           <a:blip r:embed="rId2" cstate="print">
             <a:extLst>
               <a:ext uri="{28A0092B-C50C-407E-A947-70E740481C1C}">
@@ -3583,15 +3528,13 @@
               </a:ext>
             </a:extLst>
           </a:blip>
-          <a:srcRect/>
-          <a:stretch>
-            <a:fillRect/>
-          </a:stretch>
+          <a:srcRect l="10971" r="24118"/>
+          <a:stretch/>
         </p:blipFill>
         <p:spPr bwMode="auto">
           <a:xfrm>
-            <a:off x="152400" y="152400"/>
-            <a:ext cx="4572000" cy="3048952"/>
+            <a:off x="863600" y="3442030"/>
+            <a:ext cx="2705100" cy="2779161"/>
           </a:xfrm>
           <a:prstGeom prst="rect">
             <a:avLst/>
@@ -3610,7 +3553,7 @@
       </p:pic>
       <p:pic>
         <p:nvPicPr>
-          <p:cNvPr id="1027" name="Picture 3" descr="E:\112 CFE ARCHIVE AND DATA II\СЕРВЕР CFE БОЛЕЕ ПОЛНЫЙ\DELTACENTER_SERVER\G20\G20 YEA Summit Argentina 20-22 September 2018\Photos\Day 1\EY_G20_0022.jpg"/>
+          <p:cNvPr id="1026" name="Picture 2" descr="C:\!DISK\116 WEBSITES AND DOMAINS\cfeglobal.org\assets\images\logo\cfe-long.png"/>
           <p:cNvPicPr>
             <a:picLocks noChangeAspect="1" noChangeArrowheads="1"/>
           </p:cNvPicPr>
@@ -3631,8 +3574,8 @@
         </p:blipFill>
         <p:spPr bwMode="auto">
           <a:xfrm>
-            <a:off x="4939135" y="3385089"/>
-            <a:ext cx="4550949" cy="3034914"/>
+            <a:off x="914400" y="5839909"/>
+            <a:ext cx="287381" cy="329184"/>
           </a:xfrm>
           <a:prstGeom prst="rect">
             <a:avLst/>
@@ -3649,256 +3592,64 @@
           </a:extLst>
         </p:spPr>
       </p:pic>
-      <p:pic>
-        <p:nvPicPr>
-          <p:cNvPr id="1028" name="Picture 4" descr="E:\112 CFE ARCHIVE AND DATA II\СЕРВЕР CFE БОЛЕЕ ПОЛНЫЙ\DELTACENTER_SERVER\G20\G20 YEA Summit Argentina 20-22 September 2018\Photos\Day 1\EY_G20_0101.jpg"/>
-          <p:cNvPicPr>
-            <a:picLocks noChangeAspect="1" noChangeArrowheads="1"/>
-          </p:cNvPicPr>
+      <p:sp>
+        <p:nvSpPr>
+          <p:cNvPr id="12" name="TextBox 11"/>
+          <p:cNvSpPr txBox="1"/>
           <p:nvPr/>
-        </p:nvPicPr>
-        <p:blipFill>
-          <a:blip r:embed="rId4" cstate="print">
-            <a:extLst>
-              <a:ext uri="{28A0092B-C50C-407E-A947-70E740481C1C}">
-                <a14:useLocalDpi xmlns:a14="http://schemas.microsoft.com/office/drawing/2010/main" val="0"/>
-              </a:ext>
-            </a:extLst>
-          </a:blip>
-          <a:srcRect/>
-          <a:stretch>
-            <a:fillRect/>
-          </a:stretch>
-        </p:blipFill>
-        <p:spPr bwMode="auto">
-          <a:xfrm>
-            <a:off x="9659100" y="152399"/>
-            <a:ext cx="4572000" cy="3048953"/>
+        </p:nvSpPr>
+        <p:spPr>
+          <a:xfrm>
+            <a:off x="1231899" y="5789058"/>
+            <a:ext cx="859081" cy="430887"/>
           </a:xfrm>
           <a:prstGeom prst="rect">
             <a:avLst/>
           </a:prstGeom>
           <a:noFill/>
-          <a:extLst>
-            <a:ext uri="{909E8E84-426E-40DD-AFC4-6F175D3DCCD1}">
-              <a14:hiddenFill xmlns:a14="http://schemas.microsoft.com/office/drawing/2010/main">
-                <a:solidFill>
-                  <a:srgbClr val="FFFFFF"/>
-                </a:solidFill>
-              </a14:hiddenFill>
-            </a:ext>
-          </a:extLst>
-        </p:spPr>
-      </p:pic>
-      <p:pic>
-        <p:nvPicPr>
-          <p:cNvPr id="1029" name="Picture 5" descr="E:\112 CFE ARCHIVE AND DATA II\СЕРВЕР CFE БОЛЕЕ ПОЛНЫЙ\DELTACENTER_SERVER\G20\G20 YEA Summit Argentina 20-22 September 2018\Photos\Day 1\EY_G20_0288.jpg"/>
-          <p:cNvPicPr>
-            <a:picLocks noChangeAspect="1" noChangeArrowheads="1"/>
-          </p:cNvPicPr>
-          <p:nvPr/>
-        </p:nvPicPr>
-        <p:blipFill>
-          <a:blip r:embed="rId5" cstate="print">
-            <a:extLst>
-              <a:ext uri="{28A0092B-C50C-407E-A947-70E740481C1C}">
-                <a14:useLocalDpi xmlns:a14="http://schemas.microsoft.com/office/drawing/2010/main" val="0"/>
-              </a:ext>
-            </a:extLst>
-          </a:blip>
-          <a:srcRect/>
-          <a:stretch>
-            <a:fillRect/>
-          </a:stretch>
-        </p:blipFill>
-        <p:spPr bwMode="auto">
-          <a:xfrm>
-            <a:off x="4914751" y="152400"/>
-            <a:ext cx="4575333" cy="3051175"/>
-          </a:xfrm>
-          <a:prstGeom prst="rect">
-            <a:avLst/>
-          </a:prstGeom>
-          <a:noFill/>
-          <a:extLst>
-            <a:ext uri="{909E8E84-426E-40DD-AFC4-6F175D3DCCD1}">
-              <a14:hiddenFill xmlns:a14="http://schemas.microsoft.com/office/drawing/2010/main">
-                <a:solidFill>
-                  <a:srgbClr val="FFFFFF"/>
-                </a:solidFill>
-              </a14:hiddenFill>
-            </a:ext>
-          </a:extLst>
-        </p:spPr>
-      </p:pic>
-      <p:pic>
-        <p:nvPicPr>
-          <p:cNvPr id="1030" name="Picture 6" descr="E:\112 CFE ARCHIVE AND DATA II\СЕРВЕР CFE БОЛЕЕ ПОЛНЫЙ\DELTACENTER_SERVER\G20\G20 YEA Summit Argentina 20-22 September 2018\Photos\Day 1\EY_G20_0553.jpg"/>
-          <p:cNvPicPr>
-            <a:picLocks noChangeAspect="1" noChangeArrowheads="1"/>
-          </p:cNvPicPr>
-          <p:nvPr/>
-        </p:nvPicPr>
-        <p:blipFill>
-          <a:blip r:embed="rId6" cstate="print">
-            <a:extLst>
-              <a:ext uri="{28A0092B-C50C-407E-A947-70E740481C1C}">
-                <a14:useLocalDpi xmlns:a14="http://schemas.microsoft.com/office/drawing/2010/main" val="0"/>
-              </a:ext>
-            </a:extLst>
-          </a:blip>
-          <a:srcRect/>
-          <a:stretch>
-            <a:fillRect/>
-          </a:stretch>
-        </p:blipFill>
-        <p:spPr bwMode="auto">
-          <a:xfrm>
-            <a:off x="173736" y="3385089"/>
-            <a:ext cx="4550664" cy="3034725"/>
-          </a:xfrm>
-          <a:prstGeom prst="rect">
-            <a:avLst/>
-          </a:prstGeom>
-          <a:noFill/>
-          <a:extLst>
-            <a:ext uri="{909E8E84-426E-40DD-AFC4-6F175D3DCCD1}">
-              <a14:hiddenFill xmlns:a14="http://schemas.microsoft.com/office/drawing/2010/main">
-                <a:solidFill>
-                  <a:srgbClr val="FFFFFF"/>
-                </a:solidFill>
-              </a14:hiddenFill>
-            </a:ext>
-          </a:extLst>
-        </p:spPr>
-      </p:pic>
-      <p:pic>
-        <p:nvPicPr>
-          <p:cNvPr id="1031" name="Picture 7" descr="E:\112 CFE ARCHIVE AND DATA II\СЕРВЕР CFE БОЛЕЕ ПОЛНЫЙ\DELTACENTER_SERVER\G20\G20 YEA Summit Argentina 20-22 September 2018\Photos\Day 2\EY_G20_0694.jpg"/>
-          <p:cNvPicPr>
-            <a:picLocks noChangeAspect="1" noChangeArrowheads="1"/>
-          </p:cNvPicPr>
-          <p:nvPr/>
-        </p:nvPicPr>
-        <p:blipFill>
-          <a:blip r:embed="rId7" cstate="print">
-            <a:extLst>
-              <a:ext uri="{28A0092B-C50C-407E-A947-70E740481C1C}">
-                <a14:useLocalDpi xmlns:a14="http://schemas.microsoft.com/office/drawing/2010/main" val="0"/>
-              </a:ext>
-            </a:extLst>
-          </a:blip>
-          <a:srcRect/>
-          <a:stretch>
-            <a:fillRect/>
-          </a:stretch>
-        </p:blipFill>
-        <p:spPr bwMode="auto">
-          <a:xfrm>
-            <a:off x="14401801" y="3380009"/>
-            <a:ext cx="4572000" cy="3048953"/>
-          </a:xfrm>
-          <a:prstGeom prst="rect">
-            <a:avLst/>
-          </a:prstGeom>
-          <a:noFill/>
-          <a:extLst>
-            <a:ext uri="{909E8E84-426E-40DD-AFC4-6F175D3DCCD1}">
-              <a14:hiddenFill xmlns:a14="http://schemas.microsoft.com/office/drawing/2010/main">
-                <a:solidFill>
-                  <a:srgbClr val="FFFFFF"/>
-                </a:solidFill>
-              </a14:hiddenFill>
-            </a:ext>
-          </a:extLst>
-        </p:spPr>
-      </p:pic>
-      <p:pic>
-        <p:nvPicPr>
-          <p:cNvPr id="1032" name="Picture 8" descr="E:\112 CFE ARCHIVE AND DATA II\СЕРВЕР CFE БОЛЕЕ ПОЛНЫЙ\DELTACENTER_SERVER\G20\G20 YEA Summit Argentina 20-22 September 2018\Photos\Day 2\EY_G20_0612.jpg"/>
-          <p:cNvPicPr>
-            <a:picLocks noChangeAspect="1" noChangeArrowheads="1"/>
-          </p:cNvPicPr>
-          <p:nvPr/>
-        </p:nvPicPr>
-        <p:blipFill>
-          <a:blip r:embed="rId8" cstate="print">
-            <a:extLst>
-              <a:ext uri="{28A0092B-C50C-407E-A947-70E740481C1C}">
-                <a14:useLocalDpi xmlns:a14="http://schemas.microsoft.com/office/drawing/2010/main" val="0"/>
-              </a:ext>
-            </a:extLst>
-          </a:blip>
-          <a:srcRect/>
-          <a:stretch>
-            <a:fillRect/>
-          </a:stretch>
-        </p:blipFill>
-        <p:spPr bwMode="auto">
-          <a:xfrm>
-            <a:off x="9659100" y="3380009"/>
-            <a:ext cx="4572000" cy="3048953"/>
-          </a:xfrm>
-          <a:prstGeom prst="rect">
-            <a:avLst/>
-          </a:prstGeom>
-          <a:noFill/>
-          <a:extLst>
-            <a:ext uri="{909E8E84-426E-40DD-AFC4-6F175D3DCCD1}">
-              <a14:hiddenFill xmlns:a14="http://schemas.microsoft.com/office/drawing/2010/main">
-                <a:solidFill>
-                  <a:srgbClr val="FFFFFF"/>
-                </a:solidFill>
-              </a14:hiddenFill>
-            </a:ext>
-          </a:extLst>
-        </p:spPr>
-      </p:pic>
-      <p:pic>
-        <p:nvPicPr>
-          <p:cNvPr id="1033" name="Picture 9" descr="E:\112 CFE ARCHIVE AND DATA II\СЕРВЕР CFE БОЛЕЕ ПОЛНЫЙ\DELTACENTER_SERVER\G20\G20 YEA Summit Argentina 20-22 September 2018\Photos\Day 2\EY_G20_0615.jpg"/>
-          <p:cNvPicPr>
-            <a:picLocks noChangeAspect="1" noChangeArrowheads="1"/>
-          </p:cNvPicPr>
-          <p:nvPr/>
-        </p:nvPicPr>
-        <p:blipFill>
-          <a:blip r:embed="rId9" cstate="print">
-            <a:extLst>
-              <a:ext uri="{28A0092B-C50C-407E-A947-70E740481C1C}">
-                <a14:useLocalDpi xmlns:a14="http://schemas.microsoft.com/office/drawing/2010/main" val="0"/>
-              </a:ext>
-            </a:extLst>
-          </a:blip>
-          <a:srcRect/>
-          <a:stretch>
-            <a:fillRect/>
-          </a:stretch>
-        </p:blipFill>
-        <p:spPr bwMode="auto">
-          <a:xfrm>
-            <a:off x="14401801" y="148337"/>
-            <a:ext cx="4572000" cy="3048953"/>
-          </a:xfrm>
-          <a:prstGeom prst="rect">
-            <a:avLst/>
-          </a:prstGeom>
-          <a:noFill/>
-          <a:extLst>
-            <a:ext uri="{909E8E84-426E-40DD-AFC4-6F175D3DCCD1}">
-              <a14:hiddenFill xmlns:a14="http://schemas.microsoft.com/office/drawing/2010/main">
-                <a:solidFill>
-                  <a:srgbClr val="FFFFFF"/>
-                </a:solidFill>
-              </a14:hiddenFill>
-            </a:ext>
-          </a:extLst>
-        </p:spPr>
-      </p:pic>
+        </p:spPr>
+        <p:txBody>
+          <a:bodyPr wrap="none" lIns="0" tIns="0" rIns="0" bIns="0" rtlCol="0">
+            <a:spAutoFit/>
+          </a:bodyPr>
+          <a:lstStyle/>
+          <a:p>
+            <a:r>
+              <a:rPr lang="en-US" sz="1400" dirty="0" smtClean="0">
+                <a:solidFill>
+                  <a:schemeClr val="bg1">
+                    <a:lumMod val="95000"/>
+                  </a:schemeClr>
+                </a:solidFill>
+              </a:rPr>
+              <a:t>STARTUP</a:t>
+            </a:r>
+          </a:p>
+          <a:p>
+            <a:r>
+              <a:rPr lang="en-US" sz="1400" dirty="0" smtClean="0">
+                <a:solidFill>
+                  <a:schemeClr val="bg1">
+                    <a:lumMod val="95000"/>
+                  </a:schemeClr>
+                </a:solidFill>
+              </a:rPr>
+              <a:t>PROGRAMS</a:t>
+            </a:r>
+            <a:endParaRPr lang="en-US" sz="1400" dirty="0" smtClean="0">
+              <a:solidFill>
+                <a:schemeClr val="bg1">
+                  <a:lumMod val="95000"/>
+                </a:schemeClr>
+              </a:solidFill>
+            </a:endParaRPr>
+          </a:p>
+        </p:txBody>
+      </p:sp>
     </p:spTree>
     <p:extLst>
       <p:ext uri="{BB962C8B-B14F-4D97-AF65-F5344CB8AC3E}">
-        <p14:creationId xmlns:p14="http://schemas.microsoft.com/office/powerpoint/2010/main" val="460875230"/>
+        <p14:creationId xmlns:p14="http://schemas.microsoft.com/office/powerpoint/2010/main" val="972216801"/>
       </p:ext>
     </p:extLst>
   </p:cSld>
@@ -3934,7 +3685,7 @@
         <p:spPr>
           <a:xfrm>
             <a:off x="0" y="0"/>
-            <a:ext cx="18211800" cy="6553200"/>
+            <a:ext cx="19507200" cy="6705600"/>
           </a:xfrm>
           <a:prstGeom prst="homePlate">
             <a:avLst>
@@ -4004,8 +3755,8 @@
         </p:blipFill>
         <p:spPr bwMode="auto">
           <a:xfrm>
-            <a:off x="385021" y="394030"/>
-            <a:ext cx="4181399" cy="2788470"/>
+            <a:off x="152400" y="183099"/>
+            <a:ext cx="4572000" cy="3048952"/>
           </a:xfrm>
           <a:prstGeom prst="rect">
             <a:avLst/>
@@ -4045,8 +3796,8 @@
         </p:blipFill>
         <p:spPr bwMode="auto">
           <a:xfrm>
-            <a:off x="4826952" y="3441857"/>
-            <a:ext cx="4167699" cy="2779334"/>
+            <a:off x="4939135" y="3415788"/>
+            <a:ext cx="4550949" cy="3034914"/>
           </a:xfrm>
           <a:prstGeom prst="rect">
             <a:avLst/>
@@ -4086,8 +3837,8 @@
         </p:blipFill>
         <p:spPr bwMode="auto">
           <a:xfrm>
-            <a:off x="9224221" y="396066"/>
-            <a:ext cx="4186977" cy="2792191"/>
+            <a:off x="9659100" y="183098"/>
+            <a:ext cx="4572000" cy="3048953"/>
           </a:xfrm>
           <a:prstGeom prst="rect">
             <a:avLst/>
@@ -4127,8 +3878,8 @@
         </p:blipFill>
         <p:spPr bwMode="auto">
           <a:xfrm>
-            <a:off x="4804621" y="394031"/>
-            <a:ext cx="4190030" cy="2794226"/>
+            <a:off x="4914751" y="183099"/>
+            <a:ext cx="4575333" cy="3051175"/>
           </a:xfrm>
           <a:prstGeom prst="rect">
             <a:avLst/>
@@ -4168,8 +3919,8 @@
         </p:blipFill>
         <p:spPr bwMode="auto">
           <a:xfrm>
-            <a:off x="406357" y="3442030"/>
-            <a:ext cx="4167438" cy="2779161"/>
+            <a:off x="173736" y="3415788"/>
+            <a:ext cx="4550664" cy="3034725"/>
           </a:xfrm>
           <a:prstGeom prst="rect">
             <a:avLst/>
@@ -4209,8 +3960,8 @@
         </p:blipFill>
         <p:spPr bwMode="auto">
           <a:xfrm>
-            <a:off x="13643821" y="3442030"/>
-            <a:ext cx="4186977" cy="2792191"/>
+            <a:off x="14401801" y="3410708"/>
+            <a:ext cx="4572000" cy="3048953"/>
           </a:xfrm>
           <a:prstGeom prst="rect">
             <a:avLst/>
@@ -4250,8 +4001,8 @@
         </p:blipFill>
         <p:spPr bwMode="auto">
           <a:xfrm>
-            <a:off x="9224221" y="3429000"/>
-            <a:ext cx="4186977" cy="2792191"/>
+            <a:off x="9659100" y="3410708"/>
+            <a:ext cx="4572000" cy="3048953"/>
           </a:xfrm>
           <a:prstGeom prst="rect">
             <a:avLst/>
@@ -4291,8 +4042,8 @@
         </p:blipFill>
         <p:spPr bwMode="auto">
           <a:xfrm>
-            <a:off x="13643820" y="396066"/>
-            <a:ext cx="4186977" cy="2792191"/>
+            <a:off x="14401801" y="179036"/>
+            <a:ext cx="4572000" cy="3048953"/>
           </a:xfrm>
           <a:prstGeom prst="rect">
             <a:avLst/>
@@ -4312,7 +4063,421 @@
     </p:spTree>
     <p:extLst>
       <p:ext uri="{BB962C8B-B14F-4D97-AF65-F5344CB8AC3E}">
-        <p14:creationId xmlns:p14="http://schemas.microsoft.com/office/powerpoint/2010/main" val="4055247616"/>
+        <p14:creationId xmlns:p14="http://schemas.microsoft.com/office/powerpoint/2010/main" val="250044620"/>
+      </p:ext>
+    </p:extLst>
+  </p:cSld>
+  <p:clrMapOvr>
+    <a:masterClrMapping/>
+  </p:clrMapOvr>
+</p:sld>
+</file>
+
+<file path=ppt/slides/slide4.xml><?xml version="1.0" encoding="utf-8"?>
+<p:sld xmlns:a="http://schemas.openxmlformats.org/drawingml/2006/main" xmlns:r="http://schemas.openxmlformats.org/officeDocument/2006/relationships" xmlns:p="http://schemas.openxmlformats.org/presentationml/2006/main">
+  <p:cSld>
+    <p:spTree>
+      <p:nvGrpSpPr>
+        <p:cNvPr id="1" name=""/>
+        <p:cNvGrpSpPr/>
+        <p:nvPr/>
+      </p:nvGrpSpPr>
+      <p:grpSpPr>
+        <a:xfrm>
+          <a:off x="0" y="0"/>
+          <a:ext cx="0" cy="0"/>
+          <a:chOff x="0" y="0"/>
+          <a:chExt cx="0" cy="0"/>
+        </a:xfrm>
+      </p:grpSpPr>
+      <p:sp>
+        <p:nvSpPr>
+          <p:cNvPr id="9" name="Пятиугольник 8"/>
+          <p:cNvSpPr/>
+          <p:nvPr/>
+        </p:nvSpPr>
+        <p:spPr>
+          <a:xfrm>
+            <a:off x="0" y="0"/>
+            <a:ext cx="27432000" cy="6858000"/>
+          </a:xfrm>
+          <a:prstGeom prst="homePlate">
+            <a:avLst>
+              <a:gd name="adj" fmla="val 0"/>
+            </a:avLst>
+          </a:prstGeom>
+          <a:gradFill>
+            <a:gsLst>
+              <a:gs pos="100000">
+                <a:srgbClr val="C8DFFA"/>
+              </a:gs>
+              <a:gs pos="100000">
+                <a:srgbClr val="2446C8"/>
+              </a:gs>
+            </a:gsLst>
+            <a:lin ang="0" scaled="0"/>
+          </a:gradFill>
+          <a:ln>
+            <a:noFill/>
+          </a:ln>
+        </p:spPr>
+        <p:style>
+          <a:lnRef idx="2">
+            <a:schemeClr val="accent1">
+              <a:shade val="50000"/>
+            </a:schemeClr>
+          </a:lnRef>
+          <a:fillRef idx="1">
+            <a:schemeClr val="accent1"/>
+          </a:fillRef>
+          <a:effectRef idx="0">
+            <a:schemeClr val="accent1"/>
+          </a:effectRef>
+          <a:fontRef idx="minor">
+            <a:schemeClr val="lt1"/>
+          </a:fontRef>
+        </p:style>
+        <p:txBody>
+          <a:bodyPr rtlCol="0" anchor="ctr"/>
+          <a:lstStyle/>
+          <a:p>
+            <a:pPr algn="ctr"/>
+            <a:endParaRPr lang="ru-RU"/>
+          </a:p>
+        </p:txBody>
+      </p:sp>
+      <p:pic>
+        <p:nvPicPr>
+          <p:cNvPr id="1026" name="Picture 2" descr="E:\112 CFE ARCHIVE AND DATA II\СЕРВЕР CFE БОЛЕЕ ПОЛНЫЙ\DELTACENTER_SERVER\G20\G20 YEA Summit Argentina 20-22 September 2018\Photos\Day 1\EY_G20_0093.jpg"/>
+          <p:cNvPicPr>
+            <a:picLocks noChangeAspect="1" noChangeArrowheads="1"/>
+          </p:cNvPicPr>
+          <p:nvPr/>
+        </p:nvPicPr>
+        <p:blipFill>
+          <a:blip r:embed="rId2" cstate="print">
+            <a:extLst>
+              <a:ext uri="{28A0092B-C50C-407E-A947-70E740481C1C}">
+                <a14:useLocalDpi xmlns:a14="http://schemas.microsoft.com/office/drawing/2010/main" val="0"/>
+              </a:ext>
+            </a:extLst>
+          </a:blip>
+          <a:srcRect/>
+          <a:stretch>
+            <a:fillRect/>
+          </a:stretch>
+        </p:blipFill>
+        <p:spPr bwMode="auto">
+          <a:xfrm>
+            <a:off x="152400" y="152400"/>
+            <a:ext cx="4572000" cy="3048952"/>
+          </a:xfrm>
+          <a:prstGeom prst="rect">
+            <a:avLst/>
+          </a:prstGeom>
+          <a:noFill/>
+          <a:extLst>
+            <a:ext uri="{909E8E84-426E-40DD-AFC4-6F175D3DCCD1}">
+              <a14:hiddenFill xmlns:a14="http://schemas.microsoft.com/office/drawing/2010/main">
+                <a:solidFill>
+                  <a:srgbClr val="FFFFFF"/>
+                </a:solidFill>
+              </a14:hiddenFill>
+            </a:ext>
+          </a:extLst>
+        </p:spPr>
+      </p:pic>
+      <p:pic>
+        <p:nvPicPr>
+          <p:cNvPr id="1027" name="Picture 3" descr="E:\112 CFE ARCHIVE AND DATA II\СЕРВЕР CFE БОЛЕЕ ПОЛНЫЙ\DELTACENTER_SERVER\G20\G20 YEA Summit Argentina 20-22 September 2018\Photos\Day 1\EY_G20_0022.jpg"/>
+          <p:cNvPicPr>
+            <a:picLocks noChangeAspect="1" noChangeArrowheads="1"/>
+          </p:cNvPicPr>
+          <p:nvPr/>
+        </p:nvPicPr>
+        <p:blipFill>
+          <a:blip r:embed="rId3" cstate="print">
+            <a:extLst>
+              <a:ext uri="{28A0092B-C50C-407E-A947-70E740481C1C}">
+                <a14:useLocalDpi xmlns:a14="http://schemas.microsoft.com/office/drawing/2010/main" val="0"/>
+              </a:ext>
+            </a:extLst>
+          </a:blip>
+          <a:srcRect/>
+          <a:stretch>
+            <a:fillRect/>
+          </a:stretch>
+        </p:blipFill>
+        <p:spPr bwMode="auto">
+          <a:xfrm>
+            <a:off x="4939135" y="3385089"/>
+            <a:ext cx="4550949" cy="3034914"/>
+          </a:xfrm>
+          <a:prstGeom prst="rect">
+            <a:avLst/>
+          </a:prstGeom>
+          <a:noFill/>
+          <a:extLst>
+            <a:ext uri="{909E8E84-426E-40DD-AFC4-6F175D3DCCD1}">
+              <a14:hiddenFill xmlns:a14="http://schemas.microsoft.com/office/drawing/2010/main">
+                <a:solidFill>
+                  <a:srgbClr val="FFFFFF"/>
+                </a:solidFill>
+              </a14:hiddenFill>
+            </a:ext>
+          </a:extLst>
+        </p:spPr>
+      </p:pic>
+      <p:pic>
+        <p:nvPicPr>
+          <p:cNvPr id="1028" name="Picture 4" descr="E:\112 CFE ARCHIVE AND DATA II\СЕРВЕР CFE БОЛЕЕ ПОЛНЫЙ\DELTACENTER_SERVER\G20\G20 YEA Summit Argentina 20-22 September 2018\Photos\Day 1\EY_G20_0101.jpg"/>
+          <p:cNvPicPr>
+            <a:picLocks noChangeAspect="1" noChangeArrowheads="1"/>
+          </p:cNvPicPr>
+          <p:nvPr/>
+        </p:nvPicPr>
+        <p:blipFill>
+          <a:blip r:embed="rId4" cstate="print">
+            <a:extLst>
+              <a:ext uri="{28A0092B-C50C-407E-A947-70E740481C1C}">
+                <a14:useLocalDpi xmlns:a14="http://schemas.microsoft.com/office/drawing/2010/main" val="0"/>
+              </a:ext>
+            </a:extLst>
+          </a:blip>
+          <a:srcRect/>
+          <a:stretch>
+            <a:fillRect/>
+          </a:stretch>
+        </p:blipFill>
+        <p:spPr bwMode="auto">
+          <a:xfrm>
+            <a:off x="9659100" y="152399"/>
+            <a:ext cx="4572000" cy="3048953"/>
+          </a:xfrm>
+          <a:prstGeom prst="rect">
+            <a:avLst/>
+          </a:prstGeom>
+          <a:noFill/>
+          <a:extLst>
+            <a:ext uri="{909E8E84-426E-40DD-AFC4-6F175D3DCCD1}">
+              <a14:hiddenFill xmlns:a14="http://schemas.microsoft.com/office/drawing/2010/main">
+                <a:solidFill>
+                  <a:srgbClr val="FFFFFF"/>
+                </a:solidFill>
+              </a14:hiddenFill>
+            </a:ext>
+          </a:extLst>
+        </p:spPr>
+      </p:pic>
+      <p:pic>
+        <p:nvPicPr>
+          <p:cNvPr id="1029" name="Picture 5" descr="E:\112 CFE ARCHIVE AND DATA II\СЕРВЕР CFE БОЛЕЕ ПОЛНЫЙ\DELTACENTER_SERVER\G20\G20 YEA Summit Argentina 20-22 September 2018\Photos\Day 1\EY_G20_0288.jpg"/>
+          <p:cNvPicPr>
+            <a:picLocks noChangeAspect="1" noChangeArrowheads="1"/>
+          </p:cNvPicPr>
+          <p:nvPr/>
+        </p:nvPicPr>
+        <p:blipFill>
+          <a:blip r:embed="rId5" cstate="print">
+            <a:extLst>
+              <a:ext uri="{28A0092B-C50C-407E-A947-70E740481C1C}">
+                <a14:useLocalDpi xmlns:a14="http://schemas.microsoft.com/office/drawing/2010/main" val="0"/>
+              </a:ext>
+            </a:extLst>
+          </a:blip>
+          <a:srcRect/>
+          <a:stretch>
+            <a:fillRect/>
+          </a:stretch>
+        </p:blipFill>
+        <p:spPr bwMode="auto">
+          <a:xfrm>
+            <a:off x="4914751" y="152400"/>
+            <a:ext cx="4575333" cy="3051175"/>
+          </a:xfrm>
+          <a:prstGeom prst="rect">
+            <a:avLst/>
+          </a:prstGeom>
+          <a:noFill/>
+          <a:extLst>
+            <a:ext uri="{909E8E84-426E-40DD-AFC4-6F175D3DCCD1}">
+              <a14:hiddenFill xmlns:a14="http://schemas.microsoft.com/office/drawing/2010/main">
+                <a:solidFill>
+                  <a:srgbClr val="FFFFFF"/>
+                </a:solidFill>
+              </a14:hiddenFill>
+            </a:ext>
+          </a:extLst>
+        </p:spPr>
+      </p:pic>
+      <p:pic>
+        <p:nvPicPr>
+          <p:cNvPr id="1030" name="Picture 6" descr="E:\112 CFE ARCHIVE AND DATA II\СЕРВЕР CFE БОЛЕЕ ПОЛНЫЙ\DELTACENTER_SERVER\G20\G20 YEA Summit Argentina 20-22 September 2018\Photos\Day 1\EY_G20_0553.jpg"/>
+          <p:cNvPicPr>
+            <a:picLocks noChangeAspect="1" noChangeArrowheads="1"/>
+          </p:cNvPicPr>
+          <p:nvPr/>
+        </p:nvPicPr>
+        <p:blipFill>
+          <a:blip r:embed="rId6" cstate="print">
+            <a:extLst>
+              <a:ext uri="{28A0092B-C50C-407E-A947-70E740481C1C}">
+                <a14:useLocalDpi xmlns:a14="http://schemas.microsoft.com/office/drawing/2010/main" val="0"/>
+              </a:ext>
+            </a:extLst>
+          </a:blip>
+          <a:srcRect/>
+          <a:stretch>
+            <a:fillRect/>
+          </a:stretch>
+        </p:blipFill>
+        <p:spPr bwMode="auto">
+          <a:xfrm>
+            <a:off x="173736" y="3385089"/>
+            <a:ext cx="4550664" cy="3034725"/>
+          </a:xfrm>
+          <a:prstGeom prst="rect">
+            <a:avLst/>
+          </a:prstGeom>
+          <a:noFill/>
+          <a:extLst>
+            <a:ext uri="{909E8E84-426E-40DD-AFC4-6F175D3DCCD1}">
+              <a14:hiddenFill xmlns:a14="http://schemas.microsoft.com/office/drawing/2010/main">
+                <a:solidFill>
+                  <a:srgbClr val="FFFFFF"/>
+                </a:solidFill>
+              </a14:hiddenFill>
+            </a:ext>
+          </a:extLst>
+        </p:spPr>
+      </p:pic>
+      <p:pic>
+        <p:nvPicPr>
+          <p:cNvPr id="1031" name="Picture 7" descr="E:\112 CFE ARCHIVE AND DATA II\СЕРВЕР CFE БОЛЕЕ ПОЛНЫЙ\DELTACENTER_SERVER\G20\G20 YEA Summit Argentina 20-22 September 2018\Photos\Day 2\EY_G20_0694.jpg"/>
+          <p:cNvPicPr>
+            <a:picLocks noChangeAspect="1" noChangeArrowheads="1"/>
+          </p:cNvPicPr>
+          <p:nvPr/>
+        </p:nvPicPr>
+        <p:blipFill>
+          <a:blip r:embed="rId7" cstate="print">
+            <a:extLst>
+              <a:ext uri="{28A0092B-C50C-407E-A947-70E740481C1C}">
+                <a14:useLocalDpi xmlns:a14="http://schemas.microsoft.com/office/drawing/2010/main" val="0"/>
+              </a:ext>
+            </a:extLst>
+          </a:blip>
+          <a:srcRect/>
+          <a:stretch>
+            <a:fillRect/>
+          </a:stretch>
+        </p:blipFill>
+        <p:spPr bwMode="auto">
+          <a:xfrm>
+            <a:off x="14401801" y="3380009"/>
+            <a:ext cx="4572000" cy="3048953"/>
+          </a:xfrm>
+          <a:prstGeom prst="rect">
+            <a:avLst/>
+          </a:prstGeom>
+          <a:noFill/>
+          <a:extLst>
+            <a:ext uri="{909E8E84-426E-40DD-AFC4-6F175D3DCCD1}">
+              <a14:hiddenFill xmlns:a14="http://schemas.microsoft.com/office/drawing/2010/main">
+                <a:solidFill>
+                  <a:srgbClr val="FFFFFF"/>
+                </a:solidFill>
+              </a14:hiddenFill>
+            </a:ext>
+          </a:extLst>
+        </p:spPr>
+      </p:pic>
+      <p:pic>
+        <p:nvPicPr>
+          <p:cNvPr id="1032" name="Picture 8" descr="E:\112 CFE ARCHIVE AND DATA II\СЕРВЕР CFE БОЛЕЕ ПОЛНЫЙ\DELTACENTER_SERVER\G20\G20 YEA Summit Argentina 20-22 September 2018\Photos\Day 2\EY_G20_0612.jpg"/>
+          <p:cNvPicPr>
+            <a:picLocks noChangeAspect="1" noChangeArrowheads="1"/>
+          </p:cNvPicPr>
+          <p:nvPr/>
+        </p:nvPicPr>
+        <p:blipFill>
+          <a:blip r:embed="rId8" cstate="print">
+            <a:extLst>
+              <a:ext uri="{28A0092B-C50C-407E-A947-70E740481C1C}">
+                <a14:useLocalDpi xmlns:a14="http://schemas.microsoft.com/office/drawing/2010/main" val="0"/>
+              </a:ext>
+            </a:extLst>
+          </a:blip>
+          <a:srcRect/>
+          <a:stretch>
+            <a:fillRect/>
+          </a:stretch>
+        </p:blipFill>
+        <p:spPr bwMode="auto">
+          <a:xfrm>
+            <a:off x="9659100" y="3380009"/>
+            <a:ext cx="4572000" cy="3048953"/>
+          </a:xfrm>
+          <a:prstGeom prst="rect">
+            <a:avLst/>
+          </a:prstGeom>
+          <a:noFill/>
+          <a:extLst>
+            <a:ext uri="{909E8E84-426E-40DD-AFC4-6F175D3DCCD1}">
+              <a14:hiddenFill xmlns:a14="http://schemas.microsoft.com/office/drawing/2010/main">
+                <a:solidFill>
+                  <a:srgbClr val="FFFFFF"/>
+                </a:solidFill>
+              </a14:hiddenFill>
+            </a:ext>
+          </a:extLst>
+        </p:spPr>
+      </p:pic>
+      <p:pic>
+        <p:nvPicPr>
+          <p:cNvPr id="1033" name="Picture 9" descr="E:\112 CFE ARCHIVE AND DATA II\СЕРВЕР CFE БОЛЕЕ ПОЛНЫЙ\DELTACENTER_SERVER\G20\G20 YEA Summit Argentina 20-22 September 2018\Photos\Day 2\EY_G20_0615.jpg"/>
+          <p:cNvPicPr>
+            <a:picLocks noChangeAspect="1" noChangeArrowheads="1"/>
+          </p:cNvPicPr>
+          <p:nvPr/>
+        </p:nvPicPr>
+        <p:blipFill>
+          <a:blip r:embed="rId9" cstate="print">
+            <a:extLst>
+              <a:ext uri="{28A0092B-C50C-407E-A947-70E740481C1C}">
+                <a14:useLocalDpi xmlns:a14="http://schemas.microsoft.com/office/drawing/2010/main" val="0"/>
+              </a:ext>
+            </a:extLst>
+          </a:blip>
+          <a:srcRect/>
+          <a:stretch>
+            <a:fillRect/>
+          </a:stretch>
+        </p:blipFill>
+        <p:spPr bwMode="auto">
+          <a:xfrm>
+            <a:off x="14401801" y="148337"/>
+            <a:ext cx="4572000" cy="3048953"/>
+          </a:xfrm>
+          <a:prstGeom prst="rect">
+            <a:avLst/>
+          </a:prstGeom>
+          <a:noFill/>
+          <a:extLst>
+            <a:ext uri="{909E8E84-426E-40DD-AFC4-6F175D3DCCD1}">
+              <a14:hiddenFill xmlns:a14="http://schemas.microsoft.com/office/drawing/2010/main">
+                <a:solidFill>
+                  <a:srgbClr val="FFFFFF"/>
+                </a:solidFill>
+              </a14:hiddenFill>
+            </a:ext>
+          </a:extLst>
+        </p:spPr>
+      </p:pic>
+    </p:spTree>
+    <p:extLst>
+      <p:ext uri="{BB962C8B-B14F-4D97-AF65-F5344CB8AC3E}">
+        <p14:creationId xmlns:p14="http://schemas.microsoft.com/office/powerpoint/2010/main" val="460875230"/>
       </p:ext>
     </p:extLst>
   </p:cSld>

--- a/a/CFE collages long.pptx
+++ b/a/CFE collages long.pptx
@@ -3514,7 +3514,7 @@
       </p:grpSpPr>
       <p:pic>
         <p:nvPicPr>
-          <p:cNvPr id="4" name="Picture 6" descr="E:\112 CFE ARCHIVE AND DATA II\СЕРВЕР CFE БОЛЕЕ ПОЛНЫЙ\DELTACENTER_SERVER\G20\G20 YEA Summit Argentina 20-22 September 2018\Photos\Day 1\EY_G20_0553.jpg"/>
+          <p:cNvPr id="8" name="Picture 2" descr="E:\112 CFE ARCHIVE AND DATA II\СЕРВЕР CFE БОЛЕЕ ПОЛНЫЙ\DELTACENTER_SERVER\G20\G20 YEA Summit Argentina 20-22 September 2018\Photos\Day 1\EY_G20_0093.jpg"/>
           <p:cNvPicPr>
             <a:picLocks noChangeAspect="1" noChangeArrowheads="1"/>
           </p:cNvPicPr>
@@ -3528,13 +3528,13 @@
               </a:ext>
             </a:extLst>
           </a:blip>
-          <a:srcRect l="10971" r="24118"/>
+          <a:srcRect l="33931" t="-1210" r="6978" b="8848"/>
           <a:stretch/>
         </p:blipFill>
         <p:spPr bwMode="auto">
           <a:xfrm>
-            <a:off x="863600" y="3442030"/>
-            <a:ext cx="2705100" cy="2779161"/>
+            <a:off x="3831567" y="3412392"/>
+            <a:ext cx="2701669" cy="2816058"/>
           </a:xfrm>
           <a:prstGeom prst="rect">
             <a:avLst/>
@@ -3551,6 +3551,141 @@
           </a:extLst>
         </p:spPr>
       </p:pic>
+      <p:sp>
+        <p:nvSpPr>
+          <p:cNvPr id="10" name="Прямоугольник 9"/>
+          <p:cNvSpPr/>
+          <p:nvPr/>
+        </p:nvSpPr>
+        <p:spPr>
+          <a:xfrm>
+            <a:off x="3831567" y="5753407"/>
+            <a:ext cx="2624667" cy="467784"/>
+          </a:xfrm>
+          <a:prstGeom prst="rect">
+            <a:avLst/>
+          </a:prstGeom>
+          <a:solidFill>
+            <a:srgbClr val="5C4033">
+              <a:alpha val="70000"/>
+            </a:srgbClr>
+          </a:solidFill>
+          <a:ln>
+            <a:noFill/>
+          </a:ln>
+        </p:spPr>
+        <p:style>
+          <a:lnRef idx="2">
+            <a:schemeClr val="accent1">
+              <a:shade val="50000"/>
+            </a:schemeClr>
+          </a:lnRef>
+          <a:fillRef idx="1">
+            <a:schemeClr val="accent1"/>
+          </a:fillRef>
+          <a:effectRef idx="0">
+            <a:schemeClr val="accent1"/>
+          </a:effectRef>
+          <a:fontRef idx="minor">
+            <a:schemeClr val="lt1"/>
+          </a:fontRef>
+        </p:style>
+        <p:txBody>
+          <a:bodyPr rtlCol="0" anchor="ctr"/>
+          <a:lstStyle/>
+          <a:p>
+            <a:pPr algn="ctr"/>
+            <a:endParaRPr lang="ru-RU"/>
+          </a:p>
+        </p:txBody>
+      </p:sp>
+      <p:pic>
+        <p:nvPicPr>
+          <p:cNvPr id="4" name="Picture 6" descr="E:\112 CFE ARCHIVE AND DATA II\СЕРВЕР CFE БОЛЕЕ ПОЛНЫЙ\DELTACENTER_SERVER\G20\G20 YEA Summit Argentina 20-22 September 2018\Photos\Day 1\EY_G20_0553.jpg"/>
+          <p:cNvPicPr>
+            <a:picLocks noChangeAspect="1" noChangeArrowheads="1"/>
+          </p:cNvPicPr>
+          <p:nvPr/>
+        </p:nvPicPr>
+        <p:blipFill rotWithShape="1">
+          <a:blip r:embed="rId3" cstate="print">
+            <a:extLst>
+              <a:ext uri="{28A0092B-C50C-407E-A947-70E740481C1C}">
+                <a14:useLocalDpi xmlns:a14="http://schemas.microsoft.com/office/drawing/2010/main" val="0"/>
+              </a:ext>
+            </a:extLst>
+          </a:blip>
+          <a:srcRect l="10971" r="26048"/>
+          <a:stretch/>
+        </p:blipFill>
+        <p:spPr bwMode="auto">
+          <a:xfrm>
+            <a:off x="863600" y="3442030"/>
+            <a:ext cx="2624667" cy="2779161"/>
+          </a:xfrm>
+          <a:prstGeom prst="rect">
+            <a:avLst/>
+          </a:prstGeom>
+          <a:noFill/>
+          <a:extLst>
+            <a:ext uri="{909E8E84-426E-40DD-AFC4-6F175D3DCCD1}">
+              <a14:hiddenFill xmlns:a14="http://schemas.microsoft.com/office/drawing/2010/main">
+                <a:solidFill>
+                  <a:srgbClr val="FFFFFF"/>
+                </a:solidFill>
+              </a14:hiddenFill>
+            </a:ext>
+          </a:extLst>
+        </p:spPr>
+      </p:pic>
+      <p:sp>
+        <p:nvSpPr>
+          <p:cNvPr id="2" name="Прямоугольник 1"/>
+          <p:cNvSpPr/>
+          <p:nvPr/>
+        </p:nvSpPr>
+        <p:spPr>
+          <a:xfrm>
+            <a:off x="863600" y="5738207"/>
+            <a:ext cx="2624667" cy="467784"/>
+          </a:xfrm>
+          <a:prstGeom prst="rect">
+            <a:avLst/>
+          </a:prstGeom>
+          <a:solidFill>
+            <a:srgbClr val="5C4033">
+              <a:alpha val="70000"/>
+            </a:srgbClr>
+          </a:solidFill>
+          <a:ln>
+            <a:noFill/>
+          </a:ln>
+        </p:spPr>
+        <p:style>
+          <a:lnRef idx="2">
+            <a:schemeClr val="accent1">
+              <a:shade val="50000"/>
+            </a:schemeClr>
+          </a:lnRef>
+          <a:fillRef idx="1">
+            <a:schemeClr val="accent1"/>
+          </a:fillRef>
+          <a:effectRef idx="0">
+            <a:schemeClr val="accent1"/>
+          </a:effectRef>
+          <a:fontRef idx="minor">
+            <a:schemeClr val="lt1"/>
+          </a:fontRef>
+        </p:style>
+        <p:txBody>
+          <a:bodyPr rtlCol="0" anchor="ctr"/>
+          <a:lstStyle/>
+          <a:p>
+            <a:pPr algn="ctr"/>
+            <a:endParaRPr lang="ru-RU"/>
+          </a:p>
+        </p:txBody>
+      </p:sp>
       <p:pic>
         <p:nvPicPr>
           <p:cNvPr id="1026" name="Picture 2" descr="C:\!DISK\116 WEBSITES AND DOMAINS\cfeglobal.org\assets\images\logo\cfe-long.png"/>
@@ -3560,7 +3695,7 @@
           <p:nvPr/>
         </p:nvPicPr>
         <p:blipFill>
-          <a:blip r:embed="rId3" cstate="print">
+          <a:blip r:embed="rId4" cstate="print">
             <a:extLst>
               <a:ext uri="{28A0092B-C50C-407E-A947-70E740481C1C}">
                 <a14:useLocalDpi xmlns:a14="http://schemas.microsoft.com/office/drawing/2010/main" val="0"/>
@@ -3574,7 +3709,7 @@
         </p:blipFill>
         <p:spPr bwMode="auto">
           <a:xfrm>
-            <a:off x="914400" y="5839909"/>
+            <a:off x="961149" y="5789058"/>
             <a:ext cx="287381" cy="329184"/>
           </a:xfrm>
           <a:prstGeom prst="rect">
@@ -3600,7 +3735,7 @@
         </p:nvSpPr>
         <p:spPr>
           <a:xfrm>
-            <a:off x="1231899" y="5789058"/>
+            <a:off x="1278648" y="5738207"/>
             <a:ext cx="859081" cy="430887"/>
           </a:xfrm>
           <a:prstGeom prst="rect">
@@ -3635,6 +3770,82 @@
                 </a:solidFill>
               </a:rPr>
               <a:t>PROGRAMS</a:t>
+            </a:r>
+          </a:p>
+        </p:txBody>
+      </p:sp>
+      <p:pic>
+        <p:nvPicPr>
+          <p:cNvPr id="6" name="Picture 2" descr="C:\!DISK\116 WEBSITES AND DOMAINS\cfeglobal.org\assets\images\logo\cfe-long.png"/>
+          <p:cNvPicPr>
+            <a:picLocks noChangeAspect="1" noChangeArrowheads="1"/>
+          </p:cNvPicPr>
+          <p:nvPr/>
+        </p:nvPicPr>
+        <p:blipFill>
+          <a:blip r:embed="rId4" cstate="print">
+            <a:extLst>
+              <a:ext uri="{28A0092B-C50C-407E-A947-70E740481C1C}">
+                <a14:useLocalDpi xmlns:a14="http://schemas.microsoft.com/office/drawing/2010/main" val="0"/>
+              </a:ext>
+            </a:extLst>
+          </a:blip>
+          <a:srcRect/>
+          <a:stretch>
+            <a:fillRect/>
+          </a:stretch>
+        </p:blipFill>
+        <p:spPr bwMode="auto">
+          <a:xfrm>
+            <a:off x="3907549" y="5825955"/>
+            <a:ext cx="287381" cy="329184"/>
+          </a:xfrm>
+          <a:prstGeom prst="rect">
+            <a:avLst/>
+          </a:prstGeom>
+          <a:noFill/>
+          <a:extLst>
+            <a:ext uri="{909E8E84-426E-40DD-AFC4-6F175D3DCCD1}">
+              <a14:hiddenFill xmlns:a14="http://schemas.microsoft.com/office/drawing/2010/main">
+                <a:solidFill>
+                  <a:srgbClr val="FFFFFF"/>
+                </a:solidFill>
+              </a14:hiddenFill>
+            </a:ext>
+          </a:extLst>
+        </p:spPr>
+      </p:pic>
+      <p:sp>
+        <p:nvSpPr>
+          <p:cNvPr id="7" name="TextBox 6"/>
+          <p:cNvSpPr txBox="1"/>
+          <p:nvPr/>
+        </p:nvSpPr>
+        <p:spPr>
+          <a:xfrm>
+            <a:off x="4225048" y="5775104"/>
+            <a:ext cx="1101905" cy="430887"/>
+          </a:xfrm>
+          <a:prstGeom prst="rect">
+            <a:avLst/>
+          </a:prstGeom>
+          <a:noFill/>
+        </p:spPr>
+        <p:txBody>
+          <a:bodyPr wrap="none" lIns="0" tIns="0" rIns="0" bIns="0" rtlCol="0">
+            <a:spAutoFit/>
+          </a:bodyPr>
+          <a:lstStyle/>
+          <a:p>
+            <a:r>
+              <a:rPr lang="en-US" sz="1400" dirty="0" smtClean="0">
+                <a:solidFill>
+                  <a:schemeClr val="bg1">
+                    <a:lumMod val="95000"/>
+                  </a:schemeClr>
+                </a:solidFill>
+              </a:rPr>
+              <a:t>ACCELERATION</a:t>
             </a:r>
             <a:endParaRPr lang="en-US" sz="1400" dirty="0" smtClean="0">
               <a:solidFill>
@@ -3643,6 +3854,18 @@
                 </a:schemeClr>
               </a:solidFill>
             </a:endParaRPr>
+          </a:p>
+          <a:p>
+            <a:r>
+              <a:rPr lang="en-US" sz="1400" dirty="0" smtClean="0">
+                <a:solidFill>
+                  <a:schemeClr val="bg1">
+                    <a:lumMod val="95000"/>
+                  </a:schemeClr>
+                </a:solidFill>
+              </a:rPr>
+              <a:t>PROGRAMS</a:t>
+            </a:r>
           </a:p>
         </p:txBody>
       </p:sp>

--- a/a/CFE collages long.pptx
+++ b/a/CFE collages long.pptx
@@ -3846,6 +3846,181 @@
                 </a:solidFill>
               </a:rPr>
               <a:t>ACCELERATION</a:t>
+            </a:r>
+          </a:p>
+          <a:p>
+            <a:r>
+              <a:rPr lang="en-US" sz="1400" dirty="0" smtClean="0">
+                <a:solidFill>
+                  <a:schemeClr val="bg1">
+                    <a:lumMod val="95000"/>
+                  </a:schemeClr>
+                </a:solidFill>
+              </a:rPr>
+              <a:t>PROGRAMS</a:t>
+            </a:r>
+          </a:p>
+        </p:txBody>
+      </p:sp>
+      <p:pic>
+        <p:nvPicPr>
+          <p:cNvPr id="11" name="Picture 8" descr="E:\112 CFE ARCHIVE AND DATA II\СЕРВЕР CFE БОЛЕЕ ПОЛНЫЙ\DELTACENTER_SERVER\G20\G20 YEA Summit Argentina 20-22 September 2018\Photos\Day 2\EY_G20_0612.jpg"/>
+          <p:cNvPicPr>
+            <a:picLocks noChangeAspect="1" noChangeArrowheads="1"/>
+          </p:cNvPicPr>
+          <p:nvPr/>
+        </p:nvPicPr>
+        <p:blipFill rotWithShape="1">
+          <a:blip r:embed="rId5" cstate="print">
+            <a:extLst>
+              <a:ext uri="{28A0092B-C50C-407E-A947-70E740481C1C}">
+                <a14:useLocalDpi xmlns:a14="http://schemas.microsoft.com/office/drawing/2010/main" val="0"/>
+              </a:ext>
+            </a:extLst>
+          </a:blip>
+          <a:srcRect l="25228" r="15780"/>
+          <a:stretch/>
+        </p:blipFill>
+        <p:spPr bwMode="auto">
+          <a:xfrm>
+            <a:off x="6858000" y="3442030"/>
+            <a:ext cx="2469991" cy="2792191"/>
+          </a:xfrm>
+          <a:prstGeom prst="rect">
+            <a:avLst/>
+          </a:prstGeom>
+          <a:noFill/>
+          <a:extLst>
+            <a:ext uri="{909E8E84-426E-40DD-AFC4-6F175D3DCCD1}">
+              <a14:hiddenFill xmlns:a14="http://schemas.microsoft.com/office/drawing/2010/main">
+                <a:solidFill>
+                  <a:srgbClr val="FFFFFF"/>
+                </a:solidFill>
+              </a14:hiddenFill>
+            </a:ext>
+          </a:extLst>
+        </p:spPr>
+      </p:pic>
+      <p:sp>
+        <p:nvSpPr>
+          <p:cNvPr id="13" name="Прямоугольник 12"/>
+          <p:cNvSpPr/>
+          <p:nvPr/>
+        </p:nvSpPr>
+        <p:spPr>
+          <a:xfrm>
+            <a:off x="6857558" y="5761319"/>
+            <a:ext cx="2470434" cy="467784"/>
+          </a:xfrm>
+          <a:prstGeom prst="rect">
+            <a:avLst/>
+          </a:prstGeom>
+          <a:solidFill>
+            <a:srgbClr val="5C4033">
+              <a:alpha val="70000"/>
+            </a:srgbClr>
+          </a:solidFill>
+          <a:ln>
+            <a:noFill/>
+          </a:ln>
+        </p:spPr>
+        <p:style>
+          <a:lnRef idx="2">
+            <a:schemeClr val="accent1">
+              <a:shade val="50000"/>
+            </a:schemeClr>
+          </a:lnRef>
+          <a:fillRef idx="1">
+            <a:schemeClr val="accent1"/>
+          </a:fillRef>
+          <a:effectRef idx="0">
+            <a:schemeClr val="accent1"/>
+          </a:effectRef>
+          <a:fontRef idx="minor">
+            <a:schemeClr val="lt1"/>
+          </a:fontRef>
+        </p:style>
+        <p:txBody>
+          <a:bodyPr rtlCol="0" anchor="ctr"/>
+          <a:lstStyle/>
+          <a:p>
+            <a:pPr algn="ctr"/>
+            <a:endParaRPr lang="ru-RU"/>
+          </a:p>
+        </p:txBody>
+      </p:sp>
+      <p:pic>
+        <p:nvPicPr>
+          <p:cNvPr id="14" name="Picture 2" descr="C:\!DISK\116 WEBSITES AND DOMAINS\cfeglobal.org\assets\images\logo\cfe-long.png"/>
+          <p:cNvPicPr>
+            <a:picLocks noChangeAspect="1" noChangeArrowheads="1"/>
+          </p:cNvPicPr>
+          <p:nvPr/>
+        </p:nvPicPr>
+        <p:blipFill>
+          <a:blip r:embed="rId4" cstate="print">
+            <a:extLst>
+              <a:ext uri="{28A0092B-C50C-407E-A947-70E740481C1C}">
+                <a14:useLocalDpi xmlns:a14="http://schemas.microsoft.com/office/drawing/2010/main" val="0"/>
+              </a:ext>
+            </a:extLst>
+          </a:blip>
+          <a:srcRect/>
+          <a:stretch>
+            <a:fillRect/>
+          </a:stretch>
+        </p:blipFill>
+        <p:spPr bwMode="auto">
+          <a:xfrm>
+            <a:off x="6933539" y="5833867"/>
+            <a:ext cx="287381" cy="329184"/>
+          </a:xfrm>
+          <a:prstGeom prst="rect">
+            <a:avLst/>
+          </a:prstGeom>
+          <a:noFill/>
+          <a:extLst>
+            <a:ext uri="{909E8E84-426E-40DD-AFC4-6F175D3DCCD1}">
+              <a14:hiddenFill xmlns:a14="http://schemas.microsoft.com/office/drawing/2010/main">
+                <a:solidFill>
+                  <a:srgbClr val="FFFFFF"/>
+                </a:solidFill>
+              </a14:hiddenFill>
+            </a:ext>
+          </a:extLst>
+        </p:spPr>
+      </p:pic>
+      <p:sp>
+        <p:nvSpPr>
+          <p:cNvPr id="15" name="TextBox 14"/>
+          <p:cNvSpPr txBox="1"/>
+          <p:nvPr/>
+        </p:nvSpPr>
+        <p:spPr>
+          <a:xfrm>
+            <a:off x="7251038" y="5783016"/>
+            <a:ext cx="931089" cy="430887"/>
+          </a:xfrm>
+          <a:prstGeom prst="rect">
+            <a:avLst/>
+          </a:prstGeom>
+          <a:noFill/>
+        </p:spPr>
+        <p:txBody>
+          <a:bodyPr wrap="none" lIns="0" tIns="0" rIns="0" bIns="0" rtlCol="0">
+            <a:spAutoFit/>
+          </a:bodyPr>
+          <a:lstStyle/>
+          <a:p>
+            <a:r>
+              <a:rPr lang="en-US" sz="1400" dirty="0" smtClean="0">
+                <a:solidFill>
+                  <a:schemeClr val="bg1">
+                    <a:lumMod val="95000"/>
+                  </a:schemeClr>
+                </a:solidFill>
+              </a:rPr>
+              <a:t>MENTORING</a:t>
             </a:r>
             <a:endParaRPr lang="en-US" sz="1400" dirty="0" smtClean="0">
               <a:solidFill>

--- a/a/CFE collages long.pptx
+++ b/a/CFE collages long.pptx
@@ -3601,13 +3601,13 @@
       </p:sp>
       <p:pic>
         <p:nvPicPr>
-          <p:cNvPr id="4" name="Picture 6" descr="E:\112 CFE ARCHIVE AND DATA II\СЕРВЕР CFE БОЛЕЕ ПОЛНЫЙ\DELTACENTER_SERVER\G20\G20 YEA Summit Argentina 20-22 September 2018\Photos\Day 1\EY_G20_0553.jpg"/>
+          <p:cNvPr id="6" name="Picture 2" descr="C:\!DISK\116 WEBSITES AND DOMAINS\cfeglobal.org\assets\images\logo\cfe-long.png"/>
           <p:cNvPicPr>
             <a:picLocks noChangeAspect="1" noChangeArrowheads="1"/>
           </p:cNvPicPr>
           <p:nvPr/>
         </p:nvPicPr>
-        <p:blipFill rotWithShape="1">
+        <p:blipFill>
           <a:blip r:embed="rId3" cstate="print">
             <a:extLst>
               <a:ext uri="{28A0092B-C50C-407E-A947-70E740481C1C}">
@@ -3615,13 +3615,15 @@
               </a:ext>
             </a:extLst>
           </a:blip>
-          <a:srcRect l="10971" r="26048"/>
-          <a:stretch/>
+          <a:srcRect/>
+          <a:stretch>
+            <a:fillRect/>
+          </a:stretch>
         </p:blipFill>
         <p:spPr bwMode="auto">
           <a:xfrm>
-            <a:off x="863600" y="3442030"/>
-            <a:ext cx="2624667" cy="2779161"/>
+            <a:off x="3907549" y="5825955"/>
+            <a:ext cx="287381" cy="329184"/>
           </a:xfrm>
           <a:prstGeom prst="rect">
             <a:avLst/>
@@ -3640,14 +3642,100 @@
       </p:pic>
       <p:sp>
         <p:nvSpPr>
-          <p:cNvPr id="2" name="Прямоугольник 1"/>
+          <p:cNvPr id="7" name="TextBox 6"/>
+          <p:cNvSpPr txBox="1"/>
+          <p:nvPr/>
+        </p:nvSpPr>
+        <p:spPr>
+          <a:xfrm>
+            <a:off x="4225048" y="5775104"/>
+            <a:ext cx="1101905" cy="430887"/>
+          </a:xfrm>
+          <a:prstGeom prst="rect">
+            <a:avLst/>
+          </a:prstGeom>
+          <a:noFill/>
+        </p:spPr>
+        <p:txBody>
+          <a:bodyPr wrap="none" lIns="0" tIns="0" rIns="0" bIns="0" rtlCol="0">
+            <a:spAutoFit/>
+          </a:bodyPr>
+          <a:lstStyle/>
+          <a:p>
+            <a:r>
+              <a:rPr lang="en-US" sz="1400" dirty="0" smtClean="0">
+                <a:solidFill>
+                  <a:schemeClr val="bg1">
+                    <a:lumMod val="95000"/>
+                  </a:schemeClr>
+                </a:solidFill>
+              </a:rPr>
+              <a:t>ACCELERATION</a:t>
+            </a:r>
+          </a:p>
+          <a:p>
+            <a:r>
+              <a:rPr lang="en-US" sz="1400" dirty="0" smtClean="0">
+                <a:solidFill>
+                  <a:schemeClr val="bg1">
+                    <a:lumMod val="95000"/>
+                  </a:schemeClr>
+                </a:solidFill>
+              </a:rPr>
+              <a:t>PROGRAMS</a:t>
+            </a:r>
+          </a:p>
+        </p:txBody>
+      </p:sp>
+      <p:pic>
+        <p:nvPicPr>
+          <p:cNvPr id="11" name="Picture 8" descr="E:\112 CFE ARCHIVE AND DATA II\СЕРВЕР CFE БОЛЕЕ ПОЛНЫЙ\DELTACENTER_SERVER\G20\G20 YEA Summit Argentina 20-22 September 2018\Photos\Day 2\EY_G20_0612.jpg"/>
+          <p:cNvPicPr>
+            <a:picLocks noChangeAspect="1" noChangeArrowheads="1"/>
+          </p:cNvPicPr>
+          <p:nvPr/>
+        </p:nvPicPr>
+        <p:blipFill rotWithShape="1">
+          <a:blip r:embed="rId4" cstate="print">
+            <a:extLst>
+              <a:ext uri="{28A0092B-C50C-407E-A947-70E740481C1C}">
+                <a14:useLocalDpi xmlns:a14="http://schemas.microsoft.com/office/drawing/2010/main" val="0"/>
+              </a:ext>
+            </a:extLst>
+          </a:blip>
+          <a:srcRect l="25228" r="15780"/>
+          <a:stretch/>
+        </p:blipFill>
+        <p:spPr bwMode="auto">
+          <a:xfrm>
+            <a:off x="6858000" y="3442030"/>
+            <a:ext cx="2469991" cy="2792191"/>
+          </a:xfrm>
+          <a:prstGeom prst="rect">
+            <a:avLst/>
+          </a:prstGeom>
+          <a:noFill/>
+          <a:extLst>
+            <a:ext uri="{909E8E84-426E-40DD-AFC4-6F175D3DCCD1}">
+              <a14:hiddenFill xmlns:a14="http://schemas.microsoft.com/office/drawing/2010/main">
+                <a:solidFill>
+                  <a:srgbClr val="FFFFFF"/>
+                </a:solidFill>
+              </a14:hiddenFill>
+            </a:ext>
+          </a:extLst>
+        </p:spPr>
+      </p:pic>
+      <p:sp>
+        <p:nvSpPr>
+          <p:cNvPr id="13" name="Прямоугольник 12"/>
           <p:cNvSpPr/>
           <p:nvPr/>
         </p:nvSpPr>
         <p:spPr>
           <a:xfrm>
-            <a:off x="863600" y="5738207"/>
-            <a:ext cx="2624667" cy="467784"/>
+            <a:off x="6857557" y="5566880"/>
+            <a:ext cx="2470434" cy="467784"/>
           </a:xfrm>
           <a:prstGeom prst="rect">
             <a:avLst/>
@@ -3688,14 +3776,14 @@
       </p:sp>
       <p:pic>
         <p:nvPicPr>
-          <p:cNvPr id="1026" name="Picture 2" descr="C:\!DISK\116 WEBSITES AND DOMAINS\cfeglobal.org\assets\images\logo\cfe-long.png"/>
+          <p:cNvPr id="14" name="Picture 2" descr="C:\!DISK\116 WEBSITES AND DOMAINS\cfeglobal.org\assets\images\logo\cfe-long.png"/>
           <p:cNvPicPr>
             <a:picLocks noChangeAspect="1" noChangeArrowheads="1"/>
           </p:cNvPicPr>
           <p:nvPr/>
         </p:nvPicPr>
         <p:blipFill>
-          <a:blip r:embed="rId4" cstate="print">
+          <a:blip r:embed="rId3" cstate="print">
             <a:extLst>
               <a:ext uri="{28A0092B-C50C-407E-A947-70E740481C1C}">
                 <a14:useLocalDpi xmlns:a14="http://schemas.microsoft.com/office/drawing/2010/main" val="0"/>
@@ -3709,7 +3797,7 @@
         </p:blipFill>
         <p:spPr bwMode="auto">
           <a:xfrm>
-            <a:off x="961149" y="5789058"/>
+            <a:off x="6933538" y="5639428"/>
             <a:ext cx="287381" cy="329184"/>
           </a:xfrm>
           <a:prstGeom prst="rect">
@@ -3729,14 +3817,14 @@
       </p:pic>
       <p:sp>
         <p:nvSpPr>
-          <p:cNvPr id="12" name="TextBox 11"/>
+          <p:cNvPr id="15" name="TextBox 14"/>
           <p:cNvSpPr txBox="1"/>
           <p:nvPr/>
         </p:nvSpPr>
         <p:spPr>
           <a:xfrm>
-            <a:off x="1278648" y="5738207"/>
-            <a:ext cx="859081" cy="430887"/>
+            <a:off x="7251037" y="5588577"/>
+            <a:ext cx="931089" cy="430887"/>
           </a:xfrm>
           <a:prstGeom prst="rect">
             <a:avLst/>
@@ -3757,7 +3845,7 @@
                   </a:schemeClr>
                 </a:solidFill>
               </a:rPr>
-              <a:t>STARTUP</a:t>
+              <a:t>MENTORING</a:t>
             </a:r>
           </a:p>
           <a:p>
@@ -3776,95 +3864,7 @@
       </p:sp>
       <p:pic>
         <p:nvPicPr>
-          <p:cNvPr id="6" name="Picture 2" descr="C:\!DISK\116 WEBSITES AND DOMAINS\cfeglobal.org\assets\images\logo\cfe-long.png"/>
-          <p:cNvPicPr>
-            <a:picLocks noChangeAspect="1" noChangeArrowheads="1"/>
-          </p:cNvPicPr>
-          <p:nvPr/>
-        </p:nvPicPr>
-        <p:blipFill>
-          <a:blip r:embed="rId4" cstate="print">
-            <a:extLst>
-              <a:ext uri="{28A0092B-C50C-407E-A947-70E740481C1C}">
-                <a14:useLocalDpi xmlns:a14="http://schemas.microsoft.com/office/drawing/2010/main" val="0"/>
-              </a:ext>
-            </a:extLst>
-          </a:blip>
-          <a:srcRect/>
-          <a:stretch>
-            <a:fillRect/>
-          </a:stretch>
-        </p:blipFill>
-        <p:spPr bwMode="auto">
-          <a:xfrm>
-            <a:off x="3907549" y="5825955"/>
-            <a:ext cx="287381" cy="329184"/>
-          </a:xfrm>
-          <a:prstGeom prst="rect">
-            <a:avLst/>
-          </a:prstGeom>
-          <a:noFill/>
-          <a:extLst>
-            <a:ext uri="{909E8E84-426E-40DD-AFC4-6F175D3DCCD1}">
-              <a14:hiddenFill xmlns:a14="http://schemas.microsoft.com/office/drawing/2010/main">
-                <a:solidFill>
-                  <a:srgbClr val="FFFFFF"/>
-                </a:solidFill>
-              </a14:hiddenFill>
-            </a:ext>
-          </a:extLst>
-        </p:spPr>
-      </p:pic>
-      <p:sp>
-        <p:nvSpPr>
-          <p:cNvPr id="7" name="TextBox 6"/>
-          <p:cNvSpPr txBox="1"/>
-          <p:nvPr/>
-        </p:nvSpPr>
-        <p:spPr>
-          <a:xfrm>
-            <a:off x="4225048" y="5775104"/>
-            <a:ext cx="1101905" cy="430887"/>
-          </a:xfrm>
-          <a:prstGeom prst="rect">
-            <a:avLst/>
-          </a:prstGeom>
-          <a:noFill/>
-        </p:spPr>
-        <p:txBody>
-          <a:bodyPr wrap="none" lIns="0" tIns="0" rIns="0" bIns="0" rtlCol="0">
-            <a:spAutoFit/>
-          </a:bodyPr>
-          <a:lstStyle/>
-          <a:p>
-            <a:r>
-              <a:rPr lang="en-US" sz="1400" dirty="0" smtClean="0">
-                <a:solidFill>
-                  <a:schemeClr val="bg1">
-                    <a:lumMod val="95000"/>
-                  </a:schemeClr>
-                </a:solidFill>
-              </a:rPr>
-              <a:t>ACCELERATION</a:t>
-            </a:r>
-          </a:p>
-          <a:p>
-            <a:r>
-              <a:rPr lang="en-US" sz="1400" dirty="0" smtClean="0">
-                <a:solidFill>
-                  <a:schemeClr val="bg1">
-                    <a:lumMod val="95000"/>
-                  </a:schemeClr>
-                </a:solidFill>
-              </a:rPr>
-              <a:t>PROGRAMS</a:t>
-            </a:r>
-          </a:p>
-        </p:txBody>
-      </p:sp>
-      <p:pic>
-        <p:nvPicPr>
-          <p:cNvPr id="11" name="Picture 8" descr="E:\112 CFE ARCHIVE AND DATA II\СЕРВЕР CFE БОЛЕЕ ПОЛНЫЙ\DELTACENTER_SERVER\G20\G20 YEA Summit Argentina 20-22 September 2018\Photos\Day 2\EY_G20_0612.jpg"/>
+          <p:cNvPr id="16" name="Picture 5" descr="E:\112 CFE ARCHIVE AND DATA II\СЕРВЕР CFE БОЛЕЕ ПОЛНЫЙ\DELTACENTER_SERVER\G20\G20 YEA Summit Argentina 20-22 September 2018\Photos\Day 1\EY_G20_0288.jpg"/>
           <p:cNvPicPr>
             <a:picLocks noChangeAspect="1" noChangeArrowheads="1"/>
           </p:cNvPicPr>
@@ -3878,13 +3878,13 @@
               </a:ext>
             </a:extLst>
           </a:blip>
-          <a:srcRect l="25228" r="15780"/>
+          <a:srcRect l="23147" r="17894"/>
           <a:stretch/>
         </p:blipFill>
         <p:spPr bwMode="auto">
           <a:xfrm>
-            <a:off x="6858000" y="3442030"/>
-            <a:ext cx="2469991" cy="2792191"/>
+            <a:off x="1017833" y="3477607"/>
+            <a:ext cx="2470434" cy="2794226"/>
           </a:xfrm>
           <a:prstGeom prst="rect">
             <a:avLst/>
@@ -3901,16 +3901,55 @@
           </a:extLst>
         </p:spPr>
       </p:pic>
-      <p:sp>
-        <p:nvSpPr>
-          <p:cNvPr id="13" name="Прямоугольник 12"/>
+      <p:pic>
+        <p:nvPicPr>
+          <p:cNvPr id="17" name="Picture 2" descr="E:\112 CFE ARCHIVE AND DATA II\СЕРВЕР CFE БОЛЕЕ ПОЛНЫЙ\DELTACENTER_SERVER\G20\G20 YEA Summit Argentina 20-22 September 2018\Photos\Day 1\EY_G20_0093.jpg"/>
+          <p:cNvPicPr>
+            <a:picLocks noChangeAspect="1" noChangeArrowheads="1"/>
+          </p:cNvPicPr>
+          <p:nvPr/>
+        </p:nvPicPr>
+        <p:blipFill rotWithShape="1">
+          <a:blip r:embed="rId2" cstate="print">
+            <a:extLst>
+              <a:ext uri="{28A0092B-C50C-407E-A947-70E740481C1C}">
+                <a14:useLocalDpi xmlns:a14="http://schemas.microsoft.com/office/drawing/2010/main" val="0"/>
+              </a:ext>
+            </a:extLst>
+          </a:blip>
+          <a:srcRect l="33931" t="-1210" r="6978" b="8848"/>
+          <a:stretch/>
+        </p:blipFill>
+        <p:spPr bwMode="auto">
+          <a:xfrm>
+            <a:off x="3831566" y="275162"/>
+            <a:ext cx="2701669" cy="2816058"/>
+          </a:xfrm>
+          <a:prstGeom prst="rect">
+            <a:avLst/>
+          </a:prstGeom>
+          <a:noFill/>
+          <a:extLst>
+            <a:ext uri="{909E8E84-426E-40DD-AFC4-6F175D3DCCD1}">
+              <a14:hiddenFill xmlns:a14="http://schemas.microsoft.com/office/drawing/2010/main">
+                <a:solidFill>
+                  <a:srgbClr val="FFFFFF"/>
+                </a:solidFill>
+              </a14:hiddenFill>
+            </a:ext>
+          </a:extLst>
+        </p:spPr>
+      </p:pic>
+      <p:sp>
+        <p:nvSpPr>
+          <p:cNvPr id="18" name="Прямоугольник 17"/>
           <p:cNvSpPr/>
           <p:nvPr/>
         </p:nvSpPr>
         <p:spPr>
           <a:xfrm>
-            <a:off x="6857558" y="5761319"/>
-            <a:ext cx="2470434" cy="467784"/>
+            <a:off x="3831566" y="2616177"/>
+            <a:ext cx="2624667" cy="467784"/>
           </a:xfrm>
           <a:prstGeom prst="rect">
             <a:avLst/>
@@ -3951,14 +3990,101 @@
       </p:sp>
       <p:pic>
         <p:nvPicPr>
-          <p:cNvPr id="14" name="Picture 2" descr="C:\!DISK\116 WEBSITES AND DOMAINS\cfeglobal.org\assets\images\logo\cfe-long.png"/>
+          <p:cNvPr id="19" name="Picture 6" descr="E:\112 CFE ARCHIVE AND DATA II\СЕРВЕР CFE БОЛЕЕ ПОЛНЫЙ\DELTACENTER_SERVER\G20\G20 YEA Summit Argentina 20-22 September 2018\Photos\Day 1\EY_G20_0553.jpg"/>
+          <p:cNvPicPr>
+            <a:picLocks noChangeAspect="1" noChangeArrowheads="1"/>
+          </p:cNvPicPr>
+          <p:nvPr/>
+        </p:nvPicPr>
+        <p:blipFill rotWithShape="1">
+          <a:blip r:embed="rId6" cstate="print">
+            <a:extLst>
+              <a:ext uri="{28A0092B-C50C-407E-A947-70E740481C1C}">
+                <a14:useLocalDpi xmlns:a14="http://schemas.microsoft.com/office/drawing/2010/main" val="0"/>
+              </a:ext>
+            </a:extLst>
+          </a:blip>
+          <a:srcRect l="10971" r="26048"/>
+          <a:stretch/>
+        </p:blipFill>
+        <p:spPr bwMode="auto">
+          <a:xfrm>
+            <a:off x="863599" y="304800"/>
+            <a:ext cx="2624667" cy="2779161"/>
+          </a:xfrm>
+          <a:prstGeom prst="rect">
+            <a:avLst/>
+          </a:prstGeom>
+          <a:noFill/>
+          <a:extLst>
+            <a:ext uri="{909E8E84-426E-40DD-AFC4-6F175D3DCCD1}">
+              <a14:hiddenFill xmlns:a14="http://schemas.microsoft.com/office/drawing/2010/main">
+                <a:solidFill>
+                  <a:srgbClr val="FFFFFF"/>
+                </a:solidFill>
+              </a14:hiddenFill>
+            </a:ext>
+          </a:extLst>
+        </p:spPr>
+      </p:pic>
+      <p:sp>
+        <p:nvSpPr>
+          <p:cNvPr id="20" name="Прямоугольник 19"/>
+          <p:cNvSpPr/>
+          <p:nvPr/>
+        </p:nvSpPr>
+        <p:spPr>
+          <a:xfrm>
+            <a:off x="863599" y="2600977"/>
+            <a:ext cx="2624667" cy="467784"/>
+          </a:xfrm>
+          <a:prstGeom prst="rect">
+            <a:avLst/>
+          </a:prstGeom>
+          <a:solidFill>
+            <a:srgbClr val="5C4033">
+              <a:alpha val="70000"/>
+            </a:srgbClr>
+          </a:solidFill>
+          <a:ln>
+            <a:noFill/>
+          </a:ln>
+        </p:spPr>
+        <p:style>
+          <a:lnRef idx="2">
+            <a:schemeClr val="accent1">
+              <a:shade val="50000"/>
+            </a:schemeClr>
+          </a:lnRef>
+          <a:fillRef idx="1">
+            <a:schemeClr val="accent1"/>
+          </a:fillRef>
+          <a:effectRef idx="0">
+            <a:schemeClr val="accent1"/>
+          </a:effectRef>
+          <a:fontRef idx="minor">
+            <a:schemeClr val="lt1"/>
+          </a:fontRef>
+        </p:style>
+        <p:txBody>
+          <a:bodyPr rtlCol="0" anchor="ctr"/>
+          <a:lstStyle/>
+          <a:p>
+            <a:pPr algn="ctr"/>
+            <a:endParaRPr lang="ru-RU"/>
+          </a:p>
+        </p:txBody>
+      </p:sp>
+      <p:pic>
+        <p:nvPicPr>
+          <p:cNvPr id="21" name="Picture 2" descr="C:\!DISK\116 WEBSITES AND DOMAINS\cfeglobal.org\assets\images\logo\cfe-long.png"/>
           <p:cNvPicPr>
             <a:picLocks noChangeAspect="1" noChangeArrowheads="1"/>
           </p:cNvPicPr>
           <p:nvPr/>
         </p:nvPicPr>
         <p:blipFill>
-          <a:blip r:embed="rId4" cstate="print">
+          <a:blip r:embed="rId3" cstate="print">
             <a:extLst>
               <a:ext uri="{28A0092B-C50C-407E-A947-70E740481C1C}">
                 <a14:useLocalDpi xmlns:a14="http://schemas.microsoft.com/office/drawing/2010/main" val="0"/>
@@ -3972,7 +4098,7 @@
         </p:blipFill>
         <p:spPr bwMode="auto">
           <a:xfrm>
-            <a:off x="6933539" y="5833867"/>
+            <a:off x="961148" y="2651828"/>
             <a:ext cx="287381" cy="329184"/>
           </a:xfrm>
           <a:prstGeom prst="rect">
@@ -3992,14 +4118,14 @@
       </p:pic>
       <p:sp>
         <p:nvSpPr>
-          <p:cNvPr id="15" name="TextBox 14"/>
+          <p:cNvPr id="22" name="TextBox 21"/>
           <p:cNvSpPr txBox="1"/>
           <p:nvPr/>
         </p:nvSpPr>
         <p:spPr>
           <a:xfrm>
-            <a:off x="7251038" y="5783016"/>
-            <a:ext cx="931089" cy="430887"/>
+            <a:off x="1278647" y="2600977"/>
+            <a:ext cx="859081" cy="430887"/>
           </a:xfrm>
           <a:prstGeom prst="rect">
             <a:avLst/>
@@ -4020,7 +4146,406 @@
                   </a:schemeClr>
                 </a:solidFill>
               </a:rPr>
+              <a:t>STARTUP</a:t>
+            </a:r>
+          </a:p>
+          <a:p>
+            <a:r>
+              <a:rPr lang="en-US" sz="1400" dirty="0" smtClean="0">
+                <a:solidFill>
+                  <a:schemeClr val="bg1">
+                    <a:lumMod val="95000"/>
+                  </a:schemeClr>
+                </a:solidFill>
+              </a:rPr>
+              <a:t>PROGRAMS</a:t>
+            </a:r>
+          </a:p>
+        </p:txBody>
+      </p:sp>
+      <p:pic>
+        <p:nvPicPr>
+          <p:cNvPr id="23" name="Picture 2" descr="C:\!DISK\116 WEBSITES AND DOMAINS\cfeglobal.org\assets\images\logo\cfe-long.png"/>
+          <p:cNvPicPr>
+            <a:picLocks noChangeAspect="1" noChangeArrowheads="1"/>
+          </p:cNvPicPr>
+          <p:nvPr/>
+        </p:nvPicPr>
+        <p:blipFill>
+          <a:blip r:embed="rId3" cstate="print">
+            <a:extLst>
+              <a:ext uri="{28A0092B-C50C-407E-A947-70E740481C1C}">
+                <a14:useLocalDpi xmlns:a14="http://schemas.microsoft.com/office/drawing/2010/main" val="0"/>
+              </a:ext>
+            </a:extLst>
+          </a:blip>
+          <a:srcRect/>
+          <a:stretch>
+            <a:fillRect/>
+          </a:stretch>
+        </p:blipFill>
+        <p:spPr bwMode="auto">
+          <a:xfrm>
+            <a:off x="3907548" y="2688725"/>
+            <a:ext cx="287381" cy="329184"/>
+          </a:xfrm>
+          <a:prstGeom prst="rect">
+            <a:avLst/>
+          </a:prstGeom>
+          <a:noFill/>
+          <a:extLst>
+            <a:ext uri="{909E8E84-426E-40DD-AFC4-6F175D3DCCD1}">
+              <a14:hiddenFill xmlns:a14="http://schemas.microsoft.com/office/drawing/2010/main">
+                <a:solidFill>
+                  <a:srgbClr val="FFFFFF"/>
+                </a:solidFill>
+              </a14:hiddenFill>
+            </a:ext>
+          </a:extLst>
+        </p:spPr>
+      </p:pic>
+      <p:sp>
+        <p:nvSpPr>
+          <p:cNvPr id="24" name="TextBox 23"/>
+          <p:cNvSpPr txBox="1"/>
+          <p:nvPr/>
+        </p:nvSpPr>
+        <p:spPr>
+          <a:xfrm>
+            <a:off x="4225047" y="2637874"/>
+            <a:ext cx="1101905" cy="430887"/>
+          </a:xfrm>
+          <a:prstGeom prst="rect">
+            <a:avLst/>
+          </a:prstGeom>
+          <a:noFill/>
+        </p:spPr>
+        <p:txBody>
+          <a:bodyPr wrap="none" lIns="0" tIns="0" rIns="0" bIns="0" rtlCol="0">
+            <a:spAutoFit/>
+          </a:bodyPr>
+          <a:lstStyle/>
+          <a:p>
+            <a:r>
+              <a:rPr lang="en-US" sz="1400" dirty="0" smtClean="0">
+                <a:solidFill>
+                  <a:schemeClr val="bg1">
+                    <a:lumMod val="95000"/>
+                  </a:schemeClr>
+                </a:solidFill>
+              </a:rPr>
+              <a:t>ACCELERATION</a:t>
+            </a:r>
+          </a:p>
+          <a:p>
+            <a:r>
+              <a:rPr lang="en-US" sz="1400" dirty="0" smtClean="0">
+                <a:solidFill>
+                  <a:schemeClr val="bg1">
+                    <a:lumMod val="95000"/>
+                  </a:schemeClr>
+                </a:solidFill>
+              </a:rPr>
+              <a:t>PROGRAMS</a:t>
+            </a:r>
+          </a:p>
+        </p:txBody>
+      </p:sp>
+      <p:pic>
+        <p:nvPicPr>
+          <p:cNvPr id="25" name="Picture 8" descr="E:\112 CFE ARCHIVE AND DATA II\СЕРВЕР CFE БОЛЕЕ ПОЛНЫЙ\DELTACENTER_SERVER\G20\G20 YEA Summit Argentina 20-22 September 2018\Photos\Day 2\EY_G20_0612.jpg"/>
+          <p:cNvPicPr>
+            <a:picLocks noChangeAspect="1" noChangeArrowheads="1"/>
+          </p:cNvPicPr>
+          <p:nvPr/>
+        </p:nvPicPr>
+        <p:blipFill rotWithShape="1">
+          <a:blip r:embed="rId4" cstate="print">
+            <a:extLst>
+              <a:ext uri="{28A0092B-C50C-407E-A947-70E740481C1C}">
+                <a14:useLocalDpi xmlns:a14="http://schemas.microsoft.com/office/drawing/2010/main" val="0"/>
+              </a:ext>
+            </a:extLst>
+          </a:blip>
+          <a:srcRect l="25228" r="15780"/>
+          <a:stretch/>
+        </p:blipFill>
+        <p:spPr bwMode="auto">
+          <a:xfrm>
+            <a:off x="6857999" y="304800"/>
+            <a:ext cx="2469991" cy="2792191"/>
+          </a:xfrm>
+          <a:prstGeom prst="rect">
+            <a:avLst/>
+          </a:prstGeom>
+          <a:noFill/>
+          <a:extLst>
+            <a:ext uri="{909E8E84-426E-40DD-AFC4-6F175D3DCCD1}">
+              <a14:hiddenFill xmlns:a14="http://schemas.microsoft.com/office/drawing/2010/main">
+                <a:solidFill>
+                  <a:srgbClr val="FFFFFF"/>
+                </a:solidFill>
+              </a14:hiddenFill>
+            </a:ext>
+          </a:extLst>
+        </p:spPr>
+      </p:pic>
+      <p:sp>
+        <p:nvSpPr>
+          <p:cNvPr id="26" name="Прямоугольник 25"/>
+          <p:cNvSpPr/>
+          <p:nvPr/>
+        </p:nvSpPr>
+        <p:spPr>
+          <a:xfrm>
+            <a:off x="6857556" y="2429650"/>
+            <a:ext cx="2470434" cy="467784"/>
+          </a:xfrm>
+          <a:prstGeom prst="rect">
+            <a:avLst/>
+          </a:prstGeom>
+          <a:solidFill>
+            <a:srgbClr val="5C4033">
+              <a:alpha val="70000"/>
+            </a:srgbClr>
+          </a:solidFill>
+          <a:ln>
+            <a:noFill/>
+          </a:ln>
+        </p:spPr>
+        <p:style>
+          <a:lnRef idx="2">
+            <a:schemeClr val="accent1">
+              <a:shade val="50000"/>
+            </a:schemeClr>
+          </a:lnRef>
+          <a:fillRef idx="1">
+            <a:schemeClr val="accent1"/>
+          </a:fillRef>
+          <a:effectRef idx="0">
+            <a:schemeClr val="accent1"/>
+          </a:effectRef>
+          <a:fontRef idx="minor">
+            <a:schemeClr val="lt1"/>
+          </a:fontRef>
+        </p:style>
+        <p:txBody>
+          <a:bodyPr rtlCol="0" anchor="ctr"/>
+          <a:lstStyle/>
+          <a:p>
+            <a:pPr algn="ctr"/>
+            <a:endParaRPr lang="ru-RU"/>
+          </a:p>
+        </p:txBody>
+      </p:sp>
+      <p:pic>
+        <p:nvPicPr>
+          <p:cNvPr id="27" name="Picture 2" descr="C:\!DISK\116 WEBSITES AND DOMAINS\cfeglobal.org\assets\images\logo\cfe-long.png"/>
+          <p:cNvPicPr>
+            <a:picLocks noChangeAspect="1" noChangeArrowheads="1"/>
+          </p:cNvPicPr>
+          <p:nvPr/>
+        </p:nvPicPr>
+        <p:blipFill>
+          <a:blip r:embed="rId3" cstate="print">
+            <a:extLst>
+              <a:ext uri="{28A0092B-C50C-407E-A947-70E740481C1C}">
+                <a14:useLocalDpi xmlns:a14="http://schemas.microsoft.com/office/drawing/2010/main" val="0"/>
+              </a:ext>
+            </a:extLst>
+          </a:blip>
+          <a:srcRect/>
+          <a:stretch>
+            <a:fillRect/>
+          </a:stretch>
+        </p:blipFill>
+        <p:spPr bwMode="auto">
+          <a:xfrm>
+            <a:off x="6933537" y="2502198"/>
+            <a:ext cx="287381" cy="329184"/>
+          </a:xfrm>
+          <a:prstGeom prst="rect">
+            <a:avLst/>
+          </a:prstGeom>
+          <a:noFill/>
+          <a:extLst>
+            <a:ext uri="{909E8E84-426E-40DD-AFC4-6F175D3DCCD1}">
+              <a14:hiddenFill xmlns:a14="http://schemas.microsoft.com/office/drawing/2010/main">
+                <a:solidFill>
+                  <a:srgbClr val="FFFFFF"/>
+                </a:solidFill>
+              </a14:hiddenFill>
+            </a:ext>
+          </a:extLst>
+        </p:spPr>
+      </p:pic>
+      <p:sp>
+        <p:nvSpPr>
+          <p:cNvPr id="28" name="TextBox 27"/>
+          <p:cNvSpPr txBox="1"/>
+          <p:nvPr/>
+        </p:nvSpPr>
+        <p:spPr>
+          <a:xfrm>
+            <a:off x="7251036" y="2451347"/>
+            <a:ext cx="931089" cy="430887"/>
+          </a:xfrm>
+          <a:prstGeom prst="rect">
+            <a:avLst/>
+          </a:prstGeom>
+          <a:noFill/>
+        </p:spPr>
+        <p:txBody>
+          <a:bodyPr wrap="none" lIns="0" tIns="0" rIns="0" bIns="0" rtlCol="0">
+            <a:spAutoFit/>
+          </a:bodyPr>
+          <a:lstStyle/>
+          <a:p>
+            <a:r>
+              <a:rPr lang="en-US" sz="1400" dirty="0" smtClean="0">
+                <a:solidFill>
+                  <a:schemeClr val="bg1">
+                    <a:lumMod val="95000"/>
+                  </a:schemeClr>
+                </a:solidFill>
+              </a:rPr>
               <a:t>MENTORING</a:t>
+            </a:r>
+          </a:p>
+          <a:p>
+            <a:r>
+              <a:rPr lang="en-US" sz="1400" dirty="0" smtClean="0">
+                <a:solidFill>
+                  <a:schemeClr val="bg1">
+                    <a:lumMod val="95000"/>
+                  </a:schemeClr>
+                </a:solidFill>
+              </a:rPr>
+              <a:t>PROGRAMS</a:t>
+            </a:r>
+          </a:p>
+        </p:txBody>
+      </p:sp>
+      <p:sp>
+        <p:nvSpPr>
+          <p:cNvPr id="29" name="Прямоугольник 28"/>
+          <p:cNvSpPr/>
+          <p:nvPr/>
+        </p:nvSpPr>
+        <p:spPr>
+          <a:xfrm>
+            <a:off x="1013095" y="5607325"/>
+            <a:ext cx="2470434" cy="467784"/>
+          </a:xfrm>
+          <a:prstGeom prst="rect">
+            <a:avLst/>
+          </a:prstGeom>
+          <a:solidFill>
+            <a:srgbClr val="5C4033">
+              <a:alpha val="70000"/>
+            </a:srgbClr>
+          </a:solidFill>
+          <a:ln>
+            <a:noFill/>
+          </a:ln>
+        </p:spPr>
+        <p:style>
+          <a:lnRef idx="2">
+            <a:schemeClr val="accent1">
+              <a:shade val="50000"/>
+            </a:schemeClr>
+          </a:lnRef>
+          <a:fillRef idx="1">
+            <a:schemeClr val="accent1"/>
+          </a:fillRef>
+          <a:effectRef idx="0">
+            <a:schemeClr val="accent1"/>
+          </a:effectRef>
+          <a:fontRef idx="minor">
+            <a:schemeClr val="lt1"/>
+          </a:fontRef>
+        </p:style>
+        <p:txBody>
+          <a:bodyPr rtlCol="0" anchor="ctr"/>
+          <a:lstStyle/>
+          <a:p>
+            <a:pPr algn="ctr"/>
+            <a:endParaRPr lang="ru-RU"/>
+          </a:p>
+        </p:txBody>
+      </p:sp>
+      <p:pic>
+        <p:nvPicPr>
+          <p:cNvPr id="30" name="Picture 2" descr="C:\!DISK\116 WEBSITES AND DOMAINS\cfeglobal.org\assets\images\logo\cfe-long.png"/>
+          <p:cNvPicPr>
+            <a:picLocks noChangeAspect="1" noChangeArrowheads="1"/>
+          </p:cNvPicPr>
+          <p:nvPr/>
+        </p:nvPicPr>
+        <p:blipFill>
+          <a:blip r:embed="rId3" cstate="print">
+            <a:extLst>
+              <a:ext uri="{28A0092B-C50C-407E-A947-70E740481C1C}">
+                <a14:useLocalDpi xmlns:a14="http://schemas.microsoft.com/office/drawing/2010/main" val="0"/>
+              </a:ext>
+            </a:extLst>
+          </a:blip>
+          <a:srcRect/>
+          <a:stretch>
+            <a:fillRect/>
+          </a:stretch>
+        </p:blipFill>
+        <p:spPr bwMode="auto">
+          <a:xfrm>
+            <a:off x="1089076" y="5695073"/>
+            <a:ext cx="287381" cy="329184"/>
+          </a:xfrm>
+          <a:prstGeom prst="rect">
+            <a:avLst/>
+          </a:prstGeom>
+          <a:noFill/>
+          <a:extLst>
+            <a:ext uri="{909E8E84-426E-40DD-AFC4-6F175D3DCCD1}">
+              <a14:hiddenFill xmlns:a14="http://schemas.microsoft.com/office/drawing/2010/main">
+                <a:solidFill>
+                  <a:srgbClr val="FFFFFF"/>
+                </a:solidFill>
+              </a14:hiddenFill>
+            </a:ext>
+          </a:extLst>
+        </p:spPr>
+      </p:pic>
+      <p:sp>
+        <p:nvSpPr>
+          <p:cNvPr id="31" name="TextBox 30"/>
+          <p:cNvSpPr txBox="1"/>
+          <p:nvPr/>
+        </p:nvSpPr>
+        <p:spPr>
+          <a:xfrm>
+            <a:off x="1406575" y="5644222"/>
+            <a:ext cx="859081" cy="430887"/>
+          </a:xfrm>
+          <a:prstGeom prst="rect">
+            <a:avLst/>
+          </a:prstGeom>
+          <a:noFill/>
+        </p:spPr>
+        <p:txBody>
+          <a:bodyPr wrap="none" lIns="0" tIns="0" rIns="0" bIns="0" rtlCol="0">
+            <a:spAutoFit/>
+          </a:bodyPr>
+          <a:lstStyle/>
+          <a:p>
+            <a:r>
+              <a:rPr lang="en-US" sz="1400" dirty="0" smtClean="0">
+                <a:solidFill>
+                  <a:schemeClr val="bg1">
+                    <a:lumMod val="95000"/>
+                  </a:schemeClr>
+                </a:solidFill>
+              </a:rPr>
+              <a:t>SCALEUP</a:t>
             </a:r>
             <a:endParaRPr lang="en-US" sz="1400" dirty="0" smtClean="0">
               <a:solidFill>
@@ -4044,6 +4569,36 @@
           </a:p>
         </p:txBody>
       </p:sp>
+      <p:cxnSp>
+        <p:nvCxnSpPr>
+          <p:cNvPr id="5" name="Прямая соединительная линия 4"/>
+          <p:cNvCxnSpPr/>
+          <p:nvPr/>
+        </p:nvCxnSpPr>
+        <p:spPr>
+          <a:xfrm flipV="1">
+            <a:off x="724701" y="5550252"/>
+            <a:ext cx="8915400" cy="57073"/>
+          </a:xfrm>
+          <a:prstGeom prst="line">
+            <a:avLst/>
+          </a:prstGeom>
+        </p:spPr>
+        <p:style>
+          <a:lnRef idx="1">
+            <a:schemeClr val="accent1"/>
+          </a:lnRef>
+          <a:fillRef idx="0">
+            <a:schemeClr val="accent1"/>
+          </a:fillRef>
+          <a:effectRef idx="0">
+            <a:schemeClr val="accent1"/>
+          </a:effectRef>
+          <a:fontRef idx="minor">
+            <a:schemeClr val="tx1"/>
+          </a:fontRef>
+        </p:style>
+      </p:cxnSp>
     </p:spTree>
     <p:extLst>
       <p:ext uri="{BB962C8B-B14F-4D97-AF65-F5344CB8AC3E}">

--- a/a/CFE collages long.pptx
+++ b/a/CFE collages long.pptx
@@ -3514,7 +3514,7 @@
       </p:grpSpPr>
       <p:pic>
         <p:nvPicPr>
-          <p:cNvPr id="8" name="Picture 2" descr="E:\112 CFE ARCHIVE AND DATA II\СЕРВЕР CFE БОЛЕЕ ПОЛНЫЙ\DELTACENTER_SERVER\G20\G20 YEA Summit Argentina 20-22 September 2018\Photos\Day 1\EY_G20_0093.jpg"/>
+          <p:cNvPr id="33" name="Picture 3" descr="E:\112 CFE ARCHIVE AND DATA II\СЕРВЕР CFE БОЛЕЕ ПОЛНЫЙ\DELTACENTER_SERVER\G20\G20 YEA Summit Argentina 20-22 September 2018\Photos\Day 1\EY_G20_0022.jpg"/>
           <p:cNvPicPr>
             <a:picLocks noChangeAspect="1" noChangeArrowheads="1"/>
           </p:cNvPicPr>
@@ -3528,13 +3528,13 @@
               </a:ext>
             </a:extLst>
           </a:blip>
-          <a:srcRect l="33931" t="-1210" r="6978" b="8848"/>
+          <a:srcRect l="27607" t="14624" r="25704" b="5716"/>
           <a:stretch/>
         </p:blipFill>
         <p:spPr bwMode="auto">
           <a:xfrm>
-            <a:off x="3831567" y="3412392"/>
-            <a:ext cx="2701669" cy="2816058"/>
+            <a:off x="6718530" y="3410817"/>
+            <a:ext cx="2469991" cy="2810374"/>
           </a:xfrm>
           <a:prstGeom prst="rect">
             <a:avLst/>
@@ -3551,16 +3551,55 @@
           </a:extLst>
         </p:spPr>
       </p:pic>
-      <p:sp>
-        <p:nvSpPr>
-          <p:cNvPr id="10" name="Прямоугольник 9"/>
+      <p:pic>
+        <p:nvPicPr>
+          <p:cNvPr id="25" name="Picture 8" descr="E:\112 CFE ARCHIVE AND DATA II\СЕРВЕР CFE БОЛЕЕ ПОЛНЫЙ\DELTACENTER_SERVER\G20\G20 YEA Summit Argentina 20-22 September 2018\Photos\Day 2\EY_G20_0612.jpg"/>
+          <p:cNvPicPr>
+            <a:picLocks noChangeAspect="1" noChangeArrowheads="1"/>
+          </p:cNvPicPr>
+          <p:nvPr/>
+        </p:nvPicPr>
+        <p:blipFill rotWithShape="1">
+          <a:blip r:embed="rId3" cstate="print">
+            <a:extLst>
+              <a:ext uri="{28A0092B-C50C-407E-A947-70E740481C1C}">
+                <a14:useLocalDpi xmlns:a14="http://schemas.microsoft.com/office/drawing/2010/main" val="0"/>
+              </a:ext>
+            </a:extLst>
+          </a:blip>
+          <a:srcRect l="25228" r="15780"/>
+          <a:stretch/>
+        </p:blipFill>
+        <p:spPr bwMode="auto">
+          <a:xfrm>
+            <a:off x="6718530" y="304800"/>
+            <a:ext cx="2469991" cy="2792191"/>
+          </a:xfrm>
+          <a:prstGeom prst="rect">
+            <a:avLst/>
+          </a:prstGeom>
+          <a:noFill/>
+          <a:extLst>
+            <a:ext uri="{909E8E84-426E-40DD-AFC4-6F175D3DCCD1}">
+              <a14:hiddenFill xmlns:a14="http://schemas.microsoft.com/office/drawing/2010/main">
+                <a:solidFill>
+                  <a:srgbClr val="FFFFFF"/>
+                </a:solidFill>
+              </a14:hiddenFill>
+            </a:ext>
+          </a:extLst>
+        </p:spPr>
+      </p:pic>
+      <p:sp>
+        <p:nvSpPr>
+          <p:cNvPr id="13" name="Прямоугольник 12"/>
           <p:cNvSpPr/>
           <p:nvPr/>
         </p:nvSpPr>
         <p:spPr>
           <a:xfrm>
-            <a:off x="3831567" y="5753407"/>
-            <a:ext cx="2624667" cy="467784"/>
+            <a:off x="6718530" y="5559621"/>
+            <a:ext cx="2470434" cy="467784"/>
           </a:xfrm>
           <a:prstGeom prst="rect">
             <a:avLst/>
@@ -3601,14 +3640,14 @@
       </p:sp>
       <p:pic>
         <p:nvPicPr>
-          <p:cNvPr id="6" name="Picture 2" descr="C:\!DISK\116 WEBSITES AND DOMAINS\cfeglobal.org\assets\images\logo\cfe-long.png"/>
+          <p:cNvPr id="14" name="Picture 2" descr="C:\!DISK\116 WEBSITES AND DOMAINS\cfeglobal.org\assets\images\logo\cfe-long.png"/>
           <p:cNvPicPr>
             <a:picLocks noChangeAspect="1" noChangeArrowheads="1"/>
           </p:cNvPicPr>
           <p:nvPr/>
         </p:nvPicPr>
         <p:blipFill>
-          <a:blip r:embed="rId3" cstate="print">
+          <a:blip r:embed="rId4" cstate="print">
             <a:extLst>
               <a:ext uri="{28A0092B-C50C-407E-A947-70E740481C1C}">
                 <a14:useLocalDpi xmlns:a14="http://schemas.microsoft.com/office/drawing/2010/main" val="0"/>
@@ -3622,7 +3661,7 @@
         </p:blipFill>
         <p:spPr bwMode="auto">
           <a:xfrm>
-            <a:off x="3907549" y="5825955"/>
+            <a:off x="6794511" y="5632169"/>
             <a:ext cx="287381" cy="329184"/>
           </a:xfrm>
           <a:prstGeom prst="rect">
@@ -3642,14 +3681,14 @@
       </p:pic>
       <p:sp>
         <p:nvSpPr>
-          <p:cNvPr id="7" name="TextBox 6"/>
+          <p:cNvPr id="15" name="TextBox 14"/>
           <p:cNvSpPr txBox="1"/>
           <p:nvPr/>
         </p:nvSpPr>
         <p:spPr>
           <a:xfrm>
-            <a:off x="4225048" y="5775104"/>
-            <a:ext cx="1101905" cy="430887"/>
+            <a:off x="7112010" y="5581318"/>
+            <a:ext cx="876715" cy="430887"/>
           </a:xfrm>
           <a:prstGeom prst="rect">
             <a:avLst/>
@@ -3670,183 +3709,15 @@
                   </a:schemeClr>
                 </a:solidFill>
               </a:rPr>
-              <a:t>ACCELERATION</a:t>
-            </a:r>
-          </a:p>
-          <a:p>
-            <a:r>
-              <a:rPr lang="en-US" sz="1400" dirty="0" smtClean="0">
-                <a:solidFill>
-                  <a:schemeClr val="bg1">
-                    <a:lumMod val="95000"/>
-                  </a:schemeClr>
-                </a:solidFill>
-              </a:rPr>
-              <a:t>PROGRAMS</a:t>
-            </a:r>
-          </a:p>
-        </p:txBody>
-      </p:sp>
-      <p:pic>
-        <p:nvPicPr>
-          <p:cNvPr id="11" name="Picture 8" descr="E:\112 CFE ARCHIVE AND DATA II\СЕРВЕР CFE БОЛЕЕ ПОЛНЫЙ\DELTACENTER_SERVER\G20\G20 YEA Summit Argentina 20-22 September 2018\Photos\Day 2\EY_G20_0612.jpg"/>
-          <p:cNvPicPr>
-            <a:picLocks noChangeAspect="1" noChangeArrowheads="1"/>
-          </p:cNvPicPr>
-          <p:nvPr/>
-        </p:nvPicPr>
-        <p:blipFill rotWithShape="1">
-          <a:blip r:embed="rId4" cstate="print">
-            <a:extLst>
-              <a:ext uri="{28A0092B-C50C-407E-A947-70E740481C1C}">
-                <a14:useLocalDpi xmlns:a14="http://schemas.microsoft.com/office/drawing/2010/main" val="0"/>
-              </a:ext>
-            </a:extLst>
-          </a:blip>
-          <a:srcRect l="25228" r="15780"/>
-          <a:stretch/>
-        </p:blipFill>
-        <p:spPr bwMode="auto">
-          <a:xfrm>
-            <a:off x="6858000" y="3442030"/>
-            <a:ext cx="2469991" cy="2792191"/>
-          </a:xfrm>
-          <a:prstGeom prst="rect">
-            <a:avLst/>
-          </a:prstGeom>
-          <a:noFill/>
-          <a:extLst>
-            <a:ext uri="{909E8E84-426E-40DD-AFC4-6F175D3DCCD1}">
-              <a14:hiddenFill xmlns:a14="http://schemas.microsoft.com/office/drawing/2010/main">
-                <a:solidFill>
-                  <a:srgbClr val="FFFFFF"/>
-                </a:solidFill>
-              </a14:hiddenFill>
-            </a:ext>
-          </a:extLst>
-        </p:spPr>
-      </p:pic>
-      <p:sp>
-        <p:nvSpPr>
-          <p:cNvPr id="13" name="Прямоугольник 12"/>
-          <p:cNvSpPr/>
-          <p:nvPr/>
-        </p:nvSpPr>
-        <p:spPr>
-          <a:xfrm>
-            <a:off x="6857557" y="5566880"/>
-            <a:ext cx="2470434" cy="467784"/>
-          </a:xfrm>
-          <a:prstGeom prst="rect">
-            <a:avLst/>
-          </a:prstGeom>
-          <a:solidFill>
-            <a:srgbClr val="5C4033">
-              <a:alpha val="70000"/>
-            </a:srgbClr>
-          </a:solidFill>
-          <a:ln>
-            <a:noFill/>
-          </a:ln>
-        </p:spPr>
-        <p:style>
-          <a:lnRef idx="2">
-            <a:schemeClr val="accent1">
-              <a:shade val="50000"/>
-            </a:schemeClr>
-          </a:lnRef>
-          <a:fillRef idx="1">
-            <a:schemeClr val="accent1"/>
-          </a:fillRef>
-          <a:effectRef idx="0">
-            <a:schemeClr val="accent1"/>
-          </a:effectRef>
-          <a:fontRef idx="minor">
-            <a:schemeClr val="lt1"/>
-          </a:fontRef>
-        </p:style>
-        <p:txBody>
-          <a:bodyPr rtlCol="0" anchor="ctr"/>
-          <a:lstStyle/>
-          <a:p>
-            <a:pPr algn="ctr"/>
-            <a:endParaRPr lang="ru-RU"/>
-          </a:p>
-        </p:txBody>
-      </p:sp>
-      <p:pic>
-        <p:nvPicPr>
-          <p:cNvPr id="14" name="Picture 2" descr="C:\!DISK\116 WEBSITES AND DOMAINS\cfeglobal.org\assets\images\logo\cfe-long.png"/>
-          <p:cNvPicPr>
-            <a:picLocks noChangeAspect="1" noChangeArrowheads="1"/>
-          </p:cNvPicPr>
-          <p:nvPr/>
-        </p:nvPicPr>
-        <p:blipFill>
-          <a:blip r:embed="rId3" cstate="print">
-            <a:extLst>
-              <a:ext uri="{28A0092B-C50C-407E-A947-70E740481C1C}">
-                <a14:useLocalDpi xmlns:a14="http://schemas.microsoft.com/office/drawing/2010/main" val="0"/>
-              </a:ext>
-            </a:extLst>
-          </a:blip>
-          <a:srcRect/>
-          <a:stretch>
-            <a:fillRect/>
-          </a:stretch>
-        </p:blipFill>
-        <p:spPr bwMode="auto">
-          <a:xfrm>
-            <a:off x="6933538" y="5639428"/>
-            <a:ext cx="287381" cy="329184"/>
-          </a:xfrm>
-          <a:prstGeom prst="rect">
-            <a:avLst/>
-          </a:prstGeom>
-          <a:noFill/>
-          <a:extLst>
-            <a:ext uri="{909E8E84-426E-40DD-AFC4-6F175D3DCCD1}">
-              <a14:hiddenFill xmlns:a14="http://schemas.microsoft.com/office/drawing/2010/main">
-                <a:solidFill>
-                  <a:srgbClr val="FFFFFF"/>
-                </a:solidFill>
-              </a14:hiddenFill>
-            </a:ext>
-          </a:extLst>
-        </p:spPr>
-      </p:pic>
-      <p:sp>
-        <p:nvSpPr>
-          <p:cNvPr id="15" name="TextBox 14"/>
-          <p:cNvSpPr txBox="1"/>
-          <p:nvPr/>
-        </p:nvSpPr>
-        <p:spPr>
-          <a:xfrm>
-            <a:off x="7251037" y="5588577"/>
-            <a:ext cx="931089" cy="430887"/>
-          </a:xfrm>
-          <a:prstGeom prst="rect">
-            <a:avLst/>
-          </a:prstGeom>
-          <a:noFill/>
-        </p:spPr>
-        <p:txBody>
-          <a:bodyPr wrap="none" lIns="0" tIns="0" rIns="0" bIns="0" rtlCol="0">
-            <a:spAutoFit/>
-          </a:bodyPr>
-          <a:lstStyle/>
-          <a:p>
-            <a:r>
-              <a:rPr lang="en-US" sz="1400" dirty="0" smtClean="0">
-                <a:solidFill>
-                  <a:schemeClr val="bg1">
-                    <a:lumMod val="95000"/>
-                  </a:schemeClr>
-                </a:solidFill>
-              </a:rPr>
-              <a:t>MENTORING</a:t>
-            </a:r>
+              <a:t>ECOSYSTEM</a:t>
+            </a:r>
+            <a:endParaRPr lang="en-US" sz="1400" dirty="0" smtClean="0">
+              <a:solidFill>
+                <a:schemeClr val="bg1">
+                  <a:lumMod val="95000"/>
+                </a:schemeClr>
+              </a:solidFill>
+            </a:endParaRPr>
           </a:p>
           <a:p>
             <a:r>
@@ -3883,7 +3754,7 @@
         </p:blipFill>
         <p:spPr bwMode="auto">
           <a:xfrm>
-            <a:off x="1017833" y="3477607"/>
+            <a:off x="1001792" y="3443311"/>
             <a:ext cx="2470434" cy="2794226"/>
           </a:xfrm>
           <a:prstGeom prst="rect">
@@ -3910,20 +3781,20 @@
           <p:nvPr/>
         </p:nvPicPr>
         <p:blipFill rotWithShape="1">
-          <a:blip r:embed="rId2" cstate="print">
+          <a:blip r:embed="rId6" cstate="print">
             <a:extLst>
               <a:ext uri="{28A0092B-C50C-407E-A947-70E740481C1C}">
                 <a14:useLocalDpi xmlns:a14="http://schemas.microsoft.com/office/drawing/2010/main" val="0"/>
               </a:ext>
             </a:extLst>
           </a:blip>
-          <a:srcRect l="33931" t="-1210" r="6978" b="8848"/>
+          <a:srcRect l="33931" t="-238" r="12036" b="8848"/>
           <a:stretch/>
         </p:blipFill>
         <p:spPr bwMode="auto">
           <a:xfrm>
-            <a:off x="3831566" y="275162"/>
-            <a:ext cx="2701669" cy="2816058"/>
+            <a:off x="3831567" y="297541"/>
+            <a:ext cx="2470435" cy="2786420"/>
           </a:xfrm>
           <a:prstGeom prst="rect">
             <a:avLst/>
@@ -3948,8 +3819,8 @@
         </p:nvSpPr>
         <p:spPr>
           <a:xfrm>
-            <a:off x="3831566" y="2616177"/>
-            <a:ext cx="2624667" cy="467784"/>
+            <a:off x="3831567" y="2458316"/>
+            <a:ext cx="2470436" cy="467784"/>
           </a:xfrm>
           <a:prstGeom prst="rect">
             <a:avLst/>
@@ -3997,20 +3868,20 @@
           <p:nvPr/>
         </p:nvPicPr>
         <p:blipFill rotWithShape="1">
-          <a:blip r:embed="rId6" cstate="print">
+          <a:blip r:embed="rId7" cstate="print">
             <a:extLst>
               <a:ext uri="{28A0092B-C50C-407E-A947-70E740481C1C}">
                 <a14:useLocalDpi xmlns:a14="http://schemas.microsoft.com/office/drawing/2010/main" val="0"/>
               </a:ext>
             </a:extLst>
           </a:blip>
-          <a:srcRect l="10971" r="26048"/>
+          <a:srcRect l="14559" r="26048"/>
           <a:stretch/>
         </p:blipFill>
         <p:spPr bwMode="auto">
           <a:xfrm>
-            <a:off x="863599" y="304800"/>
-            <a:ext cx="2624667" cy="2779161"/>
+            <a:off x="1013095" y="304800"/>
+            <a:ext cx="2475171" cy="2779161"/>
           </a:xfrm>
           <a:prstGeom prst="rect">
             <a:avLst/>
@@ -4035,8 +3906,8 @@
         </p:nvSpPr>
         <p:spPr>
           <a:xfrm>
-            <a:off x="863599" y="2600977"/>
-            <a:ext cx="2624667" cy="467784"/>
+            <a:off x="1013096" y="2460862"/>
+            <a:ext cx="2470434" cy="467784"/>
           </a:xfrm>
           <a:prstGeom prst="rect">
             <a:avLst/>
@@ -4084,7 +3955,7 @@
           <p:nvPr/>
         </p:nvPicPr>
         <p:blipFill>
-          <a:blip r:embed="rId3" cstate="print">
+          <a:blip r:embed="rId4" cstate="print">
             <a:extLst>
               <a:ext uri="{28A0092B-C50C-407E-A947-70E740481C1C}">
                 <a14:useLocalDpi xmlns:a14="http://schemas.microsoft.com/office/drawing/2010/main" val="0"/>
@@ -4098,7 +3969,7 @@
         </p:blipFill>
         <p:spPr bwMode="auto">
           <a:xfrm>
-            <a:off x="961148" y="2651828"/>
+            <a:off x="1110644" y="2511713"/>
             <a:ext cx="287381" cy="329184"/>
           </a:xfrm>
           <a:prstGeom prst="rect">
@@ -4124,7 +3995,7 @@
         </p:nvSpPr>
         <p:spPr>
           <a:xfrm>
-            <a:off x="1278647" y="2600977"/>
+            <a:off x="1428143" y="2460862"/>
             <a:ext cx="859081" cy="430887"/>
           </a:xfrm>
           <a:prstGeom prst="rect">
@@ -4172,7 +4043,7 @@
           <p:nvPr/>
         </p:nvPicPr>
         <p:blipFill>
-          <a:blip r:embed="rId3" cstate="print">
+          <a:blip r:embed="rId4" cstate="print">
             <a:extLst>
               <a:ext uri="{28A0092B-C50C-407E-A947-70E740481C1C}">
                 <a14:useLocalDpi xmlns:a14="http://schemas.microsoft.com/office/drawing/2010/main" val="0"/>
@@ -4186,7 +4057,7 @@
         </p:blipFill>
         <p:spPr bwMode="auto">
           <a:xfrm>
-            <a:off x="3907548" y="2688725"/>
+            <a:off x="3907548" y="2530864"/>
             <a:ext cx="287381" cy="329184"/>
           </a:xfrm>
           <a:prstGeom prst="rect">
@@ -4212,7 +4083,7 @@
         </p:nvSpPr>
         <p:spPr>
           <a:xfrm>
-            <a:off x="4225047" y="2637874"/>
+            <a:off x="4225047" y="2480013"/>
             <a:ext cx="1101905" cy="430887"/>
           </a:xfrm>
           <a:prstGeom prst="rect">
@@ -4251,45 +4122,6 @@
           </a:p>
         </p:txBody>
       </p:sp>
-      <p:pic>
-        <p:nvPicPr>
-          <p:cNvPr id="25" name="Picture 8" descr="E:\112 CFE ARCHIVE AND DATA II\СЕРВЕР CFE БОЛЕЕ ПОЛНЫЙ\DELTACENTER_SERVER\G20\G20 YEA Summit Argentina 20-22 September 2018\Photos\Day 2\EY_G20_0612.jpg"/>
-          <p:cNvPicPr>
-            <a:picLocks noChangeAspect="1" noChangeArrowheads="1"/>
-          </p:cNvPicPr>
-          <p:nvPr/>
-        </p:nvPicPr>
-        <p:blipFill rotWithShape="1">
-          <a:blip r:embed="rId4" cstate="print">
-            <a:extLst>
-              <a:ext uri="{28A0092B-C50C-407E-A947-70E740481C1C}">
-                <a14:useLocalDpi xmlns:a14="http://schemas.microsoft.com/office/drawing/2010/main" val="0"/>
-              </a:ext>
-            </a:extLst>
-          </a:blip>
-          <a:srcRect l="25228" r="15780"/>
-          <a:stretch/>
-        </p:blipFill>
-        <p:spPr bwMode="auto">
-          <a:xfrm>
-            <a:off x="6857999" y="304800"/>
-            <a:ext cx="2469991" cy="2792191"/>
-          </a:xfrm>
-          <a:prstGeom prst="rect">
-            <a:avLst/>
-          </a:prstGeom>
-          <a:noFill/>
-          <a:extLst>
-            <a:ext uri="{909E8E84-426E-40DD-AFC4-6F175D3DCCD1}">
-              <a14:hiddenFill xmlns:a14="http://schemas.microsoft.com/office/drawing/2010/main">
-                <a:solidFill>
-                  <a:srgbClr val="FFFFFF"/>
-                </a:solidFill>
-              </a14:hiddenFill>
-            </a:ext>
-          </a:extLst>
-        </p:spPr>
-      </p:pic>
       <p:sp>
         <p:nvSpPr>
           <p:cNvPr id="26" name="Прямоугольник 25"/>
@@ -4298,7 +4130,7 @@
         </p:nvSpPr>
         <p:spPr>
           <a:xfrm>
-            <a:off x="6857556" y="2429650"/>
+            <a:off x="6718087" y="2429650"/>
             <a:ext cx="2470434" cy="467784"/>
           </a:xfrm>
           <a:prstGeom prst="rect">
@@ -4347,7 +4179,7 @@
           <p:nvPr/>
         </p:nvPicPr>
         <p:blipFill>
-          <a:blip r:embed="rId3" cstate="print">
+          <a:blip r:embed="rId4" cstate="print">
             <a:extLst>
               <a:ext uri="{28A0092B-C50C-407E-A947-70E740481C1C}">
                 <a14:useLocalDpi xmlns:a14="http://schemas.microsoft.com/office/drawing/2010/main" val="0"/>
@@ -4361,7 +4193,7 @@
         </p:blipFill>
         <p:spPr bwMode="auto">
           <a:xfrm>
-            <a:off x="6933537" y="2502198"/>
+            <a:off x="6794068" y="2502198"/>
             <a:ext cx="287381" cy="329184"/>
           </a:xfrm>
           <a:prstGeom prst="rect">
@@ -4387,7 +4219,7 @@
         </p:nvSpPr>
         <p:spPr>
           <a:xfrm>
-            <a:off x="7251036" y="2451347"/>
+            <a:off x="7111567" y="2451347"/>
             <a:ext cx="931089" cy="430887"/>
           </a:xfrm>
           <a:prstGeom prst="rect">
@@ -4434,7 +4266,7 @@
         </p:nvSpPr>
         <p:spPr>
           <a:xfrm>
-            <a:off x="1013095" y="5607325"/>
+            <a:off x="1001792" y="5607325"/>
             <a:ext cx="2470434" cy="467784"/>
           </a:xfrm>
           <a:prstGeom prst="rect">
@@ -4483,7 +4315,7 @@
           <p:nvPr/>
         </p:nvPicPr>
         <p:blipFill>
-          <a:blip r:embed="rId3" cstate="print">
+          <a:blip r:embed="rId4" cstate="print">
             <a:extLst>
               <a:ext uri="{28A0092B-C50C-407E-A947-70E740481C1C}">
                 <a14:useLocalDpi xmlns:a14="http://schemas.microsoft.com/office/drawing/2010/main" val="0"/>
@@ -4497,7 +4329,7 @@
         </p:blipFill>
         <p:spPr bwMode="auto">
           <a:xfrm>
-            <a:off x="1089076" y="5695073"/>
+            <a:off x="1077773" y="5695073"/>
             <a:ext cx="287381" cy="329184"/>
           </a:xfrm>
           <a:prstGeom prst="rect">
@@ -4523,7 +4355,7 @@
         </p:nvSpPr>
         <p:spPr>
           <a:xfrm>
-            <a:off x="1406575" y="5644222"/>
+            <a:off x="1395272" y="5644222"/>
             <a:ext cx="859081" cy="430887"/>
           </a:xfrm>
           <a:prstGeom prst="rect">
@@ -4547,13 +4379,6 @@
               </a:rPr>
               <a:t>SCALEUP</a:t>
             </a:r>
-            <a:endParaRPr lang="en-US" sz="1400" dirty="0" smtClean="0">
-              <a:solidFill>
-                <a:schemeClr val="bg1">
-                  <a:lumMod val="95000"/>
-                </a:schemeClr>
-              </a:solidFill>
-            </a:endParaRPr>
           </a:p>
           <a:p>
             <a:r>
@@ -4599,6 +4424,218 @@
           </a:fontRef>
         </p:style>
       </p:cxnSp>
+      <p:cxnSp>
+        <p:nvCxnSpPr>
+          <p:cNvPr id="32" name="Прямая соединительная линия 31"/>
+          <p:cNvCxnSpPr/>
+          <p:nvPr/>
+        </p:nvCxnSpPr>
+        <p:spPr>
+          <a:xfrm flipV="1">
+            <a:off x="533400" y="2422810"/>
+            <a:ext cx="8915400" cy="57073"/>
+          </a:xfrm>
+          <a:prstGeom prst="line">
+            <a:avLst/>
+          </a:prstGeom>
+        </p:spPr>
+        <p:style>
+          <a:lnRef idx="1">
+            <a:schemeClr val="accent1"/>
+          </a:lnRef>
+          <a:fillRef idx="0">
+            <a:schemeClr val="accent1"/>
+          </a:fillRef>
+          <a:effectRef idx="0">
+            <a:schemeClr val="accent1"/>
+          </a:effectRef>
+          <a:fontRef idx="minor">
+            <a:schemeClr val="tx1"/>
+          </a:fontRef>
+        </p:style>
+      </p:cxnSp>
+      <p:pic>
+        <p:nvPicPr>
+          <p:cNvPr id="1026" name="Picture 2" descr="E:\112 CFE ARCHIVE AND DATA II\СЕРВЕР CFE БОЛЕЕ ПОЛНЫЙ\DELTACENTER_SERVER\G20\G20 YEA Summit Argentina 20-22 September 2018\Photos\Day 1\EY_G20_0487.jpg"/>
+          <p:cNvPicPr>
+            <a:picLocks noChangeAspect="1" noChangeArrowheads="1"/>
+          </p:cNvPicPr>
+          <p:nvPr/>
+        </p:nvPicPr>
+        <p:blipFill rotWithShape="1">
+          <a:blip r:embed="rId8" cstate="print">
+            <a:extLst>
+              <a:ext uri="{28A0092B-C50C-407E-A947-70E740481C1C}">
+                <a14:useLocalDpi xmlns:a14="http://schemas.microsoft.com/office/drawing/2010/main" val="0"/>
+              </a:ext>
+            </a:extLst>
+          </a:blip>
+          <a:srcRect l="42594" b="4093"/>
+          <a:stretch/>
+        </p:blipFill>
+        <p:spPr bwMode="auto">
+          <a:xfrm>
+            <a:off x="3831125" y="3414025"/>
+            <a:ext cx="2470877" cy="2752904"/>
+          </a:xfrm>
+          <a:prstGeom prst="rect">
+            <a:avLst/>
+          </a:prstGeom>
+          <a:noFill/>
+          <a:extLst>
+            <a:ext uri="{909E8E84-426E-40DD-AFC4-6F175D3DCCD1}">
+              <a14:hiddenFill xmlns:a14="http://schemas.microsoft.com/office/drawing/2010/main">
+                <a:solidFill>
+                  <a:srgbClr val="FFFFFF"/>
+                </a:solidFill>
+              </a14:hiddenFill>
+            </a:ext>
+          </a:extLst>
+        </p:spPr>
+      </p:pic>
+      <p:sp>
+        <p:nvSpPr>
+          <p:cNvPr id="10" name="Прямоугольник 9"/>
+          <p:cNvSpPr/>
+          <p:nvPr/>
+        </p:nvSpPr>
+        <p:spPr>
+          <a:xfrm>
+            <a:off x="3831125" y="5581318"/>
+            <a:ext cx="2417275" cy="467784"/>
+          </a:xfrm>
+          <a:prstGeom prst="rect">
+            <a:avLst/>
+          </a:prstGeom>
+          <a:solidFill>
+            <a:srgbClr val="5C4033">
+              <a:alpha val="70000"/>
+            </a:srgbClr>
+          </a:solidFill>
+          <a:ln>
+            <a:noFill/>
+          </a:ln>
+        </p:spPr>
+        <p:style>
+          <a:lnRef idx="2">
+            <a:schemeClr val="accent1">
+              <a:shade val="50000"/>
+            </a:schemeClr>
+          </a:lnRef>
+          <a:fillRef idx="1">
+            <a:schemeClr val="accent1"/>
+          </a:fillRef>
+          <a:effectRef idx="0">
+            <a:schemeClr val="accent1"/>
+          </a:effectRef>
+          <a:fontRef idx="minor">
+            <a:schemeClr val="lt1"/>
+          </a:fontRef>
+        </p:style>
+        <p:txBody>
+          <a:bodyPr rtlCol="0" anchor="ctr"/>
+          <a:lstStyle/>
+          <a:p>
+            <a:pPr algn="ctr"/>
+            <a:endParaRPr lang="ru-RU"/>
+          </a:p>
+        </p:txBody>
+      </p:sp>
+      <p:pic>
+        <p:nvPicPr>
+          <p:cNvPr id="6" name="Picture 2" descr="C:\!DISK\116 WEBSITES AND DOMAINS\cfeglobal.org\assets\images\logo\cfe-long.png"/>
+          <p:cNvPicPr>
+            <a:picLocks noChangeAspect="1" noChangeArrowheads="1"/>
+          </p:cNvPicPr>
+          <p:nvPr/>
+        </p:nvPicPr>
+        <p:blipFill>
+          <a:blip r:embed="rId4" cstate="print">
+            <a:extLst>
+              <a:ext uri="{28A0092B-C50C-407E-A947-70E740481C1C}">
+                <a14:useLocalDpi xmlns:a14="http://schemas.microsoft.com/office/drawing/2010/main" val="0"/>
+              </a:ext>
+            </a:extLst>
+          </a:blip>
+          <a:srcRect/>
+          <a:stretch>
+            <a:fillRect/>
+          </a:stretch>
+        </p:blipFill>
+        <p:spPr bwMode="auto">
+          <a:xfrm>
+            <a:off x="3907107" y="5653866"/>
+            <a:ext cx="287381" cy="329184"/>
+          </a:xfrm>
+          <a:prstGeom prst="rect">
+            <a:avLst/>
+          </a:prstGeom>
+          <a:noFill/>
+          <a:extLst>
+            <a:ext uri="{909E8E84-426E-40DD-AFC4-6F175D3DCCD1}">
+              <a14:hiddenFill xmlns:a14="http://schemas.microsoft.com/office/drawing/2010/main">
+                <a:solidFill>
+                  <a:srgbClr val="FFFFFF"/>
+                </a:solidFill>
+              </a14:hiddenFill>
+            </a:ext>
+          </a:extLst>
+        </p:spPr>
+      </p:pic>
+      <p:sp>
+        <p:nvSpPr>
+          <p:cNvPr id="7" name="TextBox 6"/>
+          <p:cNvSpPr txBox="1"/>
+          <p:nvPr/>
+        </p:nvSpPr>
+        <p:spPr>
+          <a:xfrm>
+            <a:off x="4224606" y="5603015"/>
+            <a:ext cx="1047146" cy="430887"/>
+          </a:xfrm>
+          <a:prstGeom prst="rect">
+            <a:avLst/>
+          </a:prstGeom>
+          <a:noFill/>
+        </p:spPr>
+        <p:txBody>
+          <a:bodyPr wrap="none" lIns="0" tIns="0" rIns="0" bIns="0" rtlCol="0">
+            <a:spAutoFit/>
+          </a:bodyPr>
+          <a:lstStyle/>
+          <a:p>
+            <a:r>
+              <a:rPr lang="en-US" sz="1400" dirty="0" smtClean="0">
+                <a:solidFill>
+                  <a:schemeClr val="bg1">
+                    <a:lumMod val="95000"/>
+                  </a:schemeClr>
+                </a:solidFill>
+              </a:rPr>
+              <a:t>EDUCATIONAL</a:t>
+            </a:r>
+            <a:endParaRPr lang="en-US" sz="1400" dirty="0" smtClean="0">
+              <a:solidFill>
+                <a:schemeClr val="bg1">
+                  <a:lumMod val="95000"/>
+                </a:schemeClr>
+              </a:solidFill>
+            </a:endParaRPr>
+          </a:p>
+          <a:p>
+            <a:r>
+              <a:rPr lang="en-US" sz="1400" dirty="0" smtClean="0">
+                <a:solidFill>
+                  <a:schemeClr val="bg1">
+                    <a:lumMod val="95000"/>
+                  </a:schemeClr>
+                </a:solidFill>
+              </a:rPr>
+              <a:t>PROGRAMS</a:t>
+            </a:r>
+          </a:p>
+        </p:txBody>
+      </p:sp>
     </p:spTree>
     <p:extLst>
       <p:ext uri="{BB962C8B-B14F-4D97-AF65-F5344CB8AC3E}">

--- a/a/CFE collages long.pptx
+++ b/a/CFE collages long.pptx
@@ -6,9 +6,14 @@
   </p:sldMasterIdLst>
   <p:sldIdLst>
     <p:sldId id="258" r:id="rId2"/>
-    <p:sldId id="259" r:id="rId3"/>
-    <p:sldId id="256" r:id="rId4"/>
-    <p:sldId id="257" r:id="rId5"/>
+    <p:sldId id="264" r:id="rId3"/>
+    <p:sldId id="263" r:id="rId4"/>
+    <p:sldId id="262" r:id="rId5"/>
+    <p:sldId id="259" r:id="rId6"/>
+    <p:sldId id="261" r:id="rId7"/>
+    <p:sldId id="260" r:id="rId8"/>
+    <p:sldId id="256" r:id="rId9"/>
+    <p:sldId id="257" r:id="rId10"/>
   </p:sldIdLst>
   <p:sldSz cx="27432000" cy="6858000"/>
   <p:notesSz cx="6858000" cy="9144000"/>
@@ -3514,27 +3519,68 @@
       </p:grpSpPr>
       <p:pic>
         <p:nvPicPr>
-          <p:cNvPr id="33" name="Picture 3" descr="E:\112 CFE ARCHIVE AND DATA II\СЕРВЕР CFE БОЛЕЕ ПОЛНЫЙ\DELTACENTER_SERVER\G20\G20 YEA Summit Argentina 20-22 September 2018\Photos\Day 1\EY_G20_0022.jpg"/>
+          <p:cNvPr id="2050" name="Picture 2" descr="C:\!DISK\116 WEBSITES AND DOMAINS\cfeglobal.org\images\mobile-development-0.jpg"/>
           <p:cNvPicPr>
             <a:picLocks noChangeAspect="1" noChangeArrowheads="1"/>
           </p:cNvPicPr>
           <p:nvPr/>
         </p:nvPicPr>
-        <p:blipFill rotWithShape="1">
-          <a:blip r:embed="rId2" cstate="print">
+        <p:blipFill>
+          <a:blip r:embed="rId2">
             <a:extLst>
               <a:ext uri="{28A0092B-C50C-407E-A947-70E740481C1C}">
                 <a14:useLocalDpi xmlns:a14="http://schemas.microsoft.com/office/drawing/2010/main" val="0"/>
               </a:ext>
             </a:extLst>
           </a:blip>
-          <a:srcRect l="27607" t="14624" r="25704" b="5716"/>
+          <a:srcRect/>
+          <a:stretch>
+            <a:fillRect/>
+          </a:stretch>
+        </p:blipFill>
+        <p:spPr bwMode="auto">
+          <a:xfrm>
+            <a:off x="-152401" y="1"/>
+            <a:ext cx="10515601" cy="6476999"/>
+          </a:xfrm>
+          <a:prstGeom prst="rect">
+            <a:avLst/>
+          </a:prstGeom>
+          <a:noFill/>
+          <a:extLst>
+            <a:ext uri="{909E8E84-426E-40DD-AFC4-6F175D3DCCD1}">
+              <a14:hiddenFill xmlns:a14="http://schemas.microsoft.com/office/drawing/2010/main">
+                <a:solidFill>
+                  <a:srgbClr val="FFFFFF"/>
+                </a:solidFill>
+              </a14:hiddenFill>
+            </a:ext>
+          </a:extLst>
+        </p:spPr>
+      </p:pic>
+      <p:pic>
+        <p:nvPicPr>
+          <p:cNvPr id="33" name="Picture 3" descr="E:\112 CFE ARCHIVE AND DATA II\СЕРВЕР CFE БОЛЕЕ ПОЛНЫЙ\DELTACENTER_SERVER\G20\G20 YEA Summit Argentina 20-22 September 2018\Photos\Day 1\EY_G20_0022.jpg"/>
+          <p:cNvPicPr>
+            <a:picLocks noChangeAspect="1" noChangeArrowheads="1"/>
+          </p:cNvPicPr>
+          <p:nvPr/>
+        </p:nvPicPr>
+        <p:blipFill rotWithShape="1">
+          <a:blip r:embed="rId3" cstate="print">
+            <a:extLst>
+              <a:ext uri="{28A0092B-C50C-407E-A947-70E740481C1C}">
+                <a14:useLocalDpi xmlns:a14="http://schemas.microsoft.com/office/drawing/2010/main" val="0"/>
+              </a:ext>
+            </a:extLst>
+          </a:blip>
+          <a:srcRect l="27607" t="16253" r="25704" b="5716"/>
           <a:stretch/>
         </p:blipFill>
         <p:spPr bwMode="auto">
           <a:xfrm>
-            <a:off x="6718530" y="3410817"/>
-            <a:ext cx="2469991" cy="2810374"/>
+            <a:off x="6718087" y="3414025"/>
+            <a:ext cx="2469991" cy="2752904"/>
           </a:xfrm>
           <a:prstGeom prst="rect">
             <a:avLst/>
@@ -3560,7 +3606,7 @@
           <p:nvPr/>
         </p:nvPicPr>
         <p:blipFill rotWithShape="1">
-          <a:blip r:embed="rId3" cstate="print">
+          <a:blip r:embed="rId4" cstate="print">
             <a:extLst>
               <a:ext uri="{28A0092B-C50C-407E-A947-70E740481C1C}">
                 <a14:useLocalDpi xmlns:a14="http://schemas.microsoft.com/office/drawing/2010/main" val="0"/>
@@ -3598,7 +3644,7 @@
         </p:nvSpPr>
         <p:spPr>
           <a:xfrm>
-            <a:off x="6718530" y="5559621"/>
+            <a:off x="6718087" y="5505359"/>
             <a:ext cx="2470434" cy="467784"/>
           </a:xfrm>
           <a:prstGeom prst="rect">
@@ -3647,7 +3693,7 @@
           <p:nvPr/>
         </p:nvPicPr>
         <p:blipFill>
-          <a:blip r:embed="rId4" cstate="print">
+          <a:blip r:embed="rId5" cstate="print">
             <a:extLst>
               <a:ext uri="{28A0092B-C50C-407E-A947-70E740481C1C}">
                 <a14:useLocalDpi xmlns:a14="http://schemas.microsoft.com/office/drawing/2010/main" val="0"/>
@@ -3661,7 +3707,7 @@
         </p:blipFill>
         <p:spPr bwMode="auto">
           <a:xfrm>
-            <a:off x="6794511" y="5632169"/>
+            <a:off x="6794068" y="5577907"/>
             <a:ext cx="287381" cy="329184"/>
           </a:xfrm>
           <a:prstGeom prst="rect">
@@ -3687,7 +3733,7 @@
         </p:nvSpPr>
         <p:spPr>
           <a:xfrm>
-            <a:off x="7112010" y="5581318"/>
+            <a:off x="7111567" y="5527056"/>
             <a:ext cx="876715" cy="430887"/>
           </a:xfrm>
           <a:prstGeom prst="rect">
@@ -3711,13 +3757,6 @@
               </a:rPr>
               <a:t>ECOSYSTEM</a:t>
             </a:r>
-            <a:endParaRPr lang="en-US" sz="1400" dirty="0" smtClean="0">
-              <a:solidFill>
-                <a:schemeClr val="bg1">
-                  <a:lumMod val="95000"/>
-                </a:schemeClr>
-              </a:solidFill>
-            </a:endParaRPr>
           </a:p>
           <a:p>
             <a:r>
@@ -3742,7 +3781,7 @@
           <p:nvPr/>
         </p:nvPicPr>
         <p:blipFill rotWithShape="1">
-          <a:blip r:embed="rId5" cstate="print">
+          <a:blip r:embed="rId6" cstate="print">
             <a:extLst>
               <a:ext uri="{28A0092B-C50C-407E-A947-70E740481C1C}">
                 <a14:useLocalDpi xmlns:a14="http://schemas.microsoft.com/office/drawing/2010/main" val="0"/>
@@ -3781,7 +3820,7 @@
           <p:nvPr/>
         </p:nvPicPr>
         <p:blipFill rotWithShape="1">
-          <a:blip r:embed="rId6" cstate="print">
+          <a:blip r:embed="rId7" cstate="print">
             <a:extLst>
               <a:ext uri="{28A0092B-C50C-407E-A947-70E740481C1C}">
                 <a14:useLocalDpi xmlns:a14="http://schemas.microsoft.com/office/drawing/2010/main" val="0"/>
@@ -3868,7 +3907,7 @@
           <p:nvPr/>
         </p:nvPicPr>
         <p:blipFill rotWithShape="1">
-          <a:blip r:embed="rId7" cstate="print">
+          <a:blip r:embed="rId8" cstate="print">
             <a:extLst>
               <a:ext uri="{28A0092B-C50C-407E-A947-70E740481C1C}">
                 <a14:useLocalDpi xmlns:a14="http://schemas.microsoft.com/office/drawing/2010/main" val="0"/>
@@ -3955,7 +3994,7 @@
           <p:nvPr/>
         </p:nvPicPr>
         <p:blipFill>
-          <a:blip r:embed="rId4" cstate="print">
+          <a:blip r:embed="rId5" cstate="print">
             <a:extLst>
               <a:ext uri="{28A0092B-C50C-407E-A947-70E740481C1C}">
                 <a14:useLocalDpi xmlns:a14="http://schemas.microsoft.com/office/drawing/2010/main" val="0"/>
@@ -4043,7 +4082,7 @@
           <p:nvPr/>
         </p:nvPicPr>
         <p:blipFill>
-          <a:blip r:embed="rId4" cstate="print">
+          <a:blip r:embed="rId5" cstate="print">
             <a:extLst>
               <a:ext uri="{28A0092B-C50C-407E-A947-70E740481C1C}">
                 <a14:useLocalDpi xmlns:a14="http://schemas.microsoft.com/office/drawing/2010/main" val="0"/>
@@ -4179,7 +4218,7 @@
           <p:nvPr/>
         </p:nvPicPr>
         <p:blipFill>
-          <a:blip r:embed="rId4" cstate="print">
+          <a:blip r:embed="rId5" cstate="print">
             <a:extLst>
               <a:ext uri="{28A0092B-C50C-407E-A947-70E740481C1C}">
                 <a14:useLocalDpi xmlns:a14="http://schemas.microsoft.com/office/drawing/2010/main" val="0"/>
@@ -4315,7 +4354,7 @@
           <p:nvPr/>
         </p:nvPicPr>
         <p:blipFill>
-          <a:blip r:embed="rId4" cstate="print">
+          <a:blip r:embed="rId5" cstate="print">
             <a:extLst>
               <a:ext uri="{28A0092B-C50C-407E-A947-70E740481C1C}">
                 <a14:useLocalDpi xmlns:a14="http://schemas.microsoft.com/office/drawing/2010/main" val="0"/>
@@ -4394,66 +4433,6 @@
           </a:p>
         </p:txBody>
       </p:sp>
-      <p:cxnSp>
-        <p:nvCxnSpPr>
-          <p:cNvPr id="5" name="Прямая соединительная линия 4"/>
-          <p:cNvCxnSpPr/>
-          <p:nvPr/>
-        </p:nvCxnSpPr>
-        <p:spPr>
-          <a:xfrm flipV="1">
-            <a:off x="724701" y="5550252"/>
-            <a:ext cx="8915400" cy="57073"/>
-          </a:xfrm>
-          <a:prstGeom prst="line">
-            <a:avLst/>
-          </a:prstGeom>
-        </p:spPr>
-        <p:style>
-          <a:lnRef idx="1">
-            <a:schemeClr val="accent1"/>
-          </a:lnRef>
-          <a:fillRef idx="0">
-            <a:schemeClr val="accent1"/>
-          </a:fillRef>
-          <a:effectRef idx="0">
-            <a:schemeClr val="accent1"/>
-          </a:effectRef>
-          <a:fontRef idx="minor">
-            <a:schemeClr val="tx1"/>
-          </a:fontRef>
-        </p:style>
-      </p:cxnSp>
-      <p:cxnSp>
-        <p:nvCxnSpPr>
-          <p:cNvPr id="32" name="Прямая соединительная линия 31"/>
-          <p:cNvCxnSpPr/>
-          <p:nvPr/>
-        </p:nvCxnSpPr>
-        <p:spPr>
-          <a:xfrm flipV="1">
-            <a:off x="533400" y="2422810"/>
-            <a:ext cx="8915400" cy="57073"/>
-          </a:xfrm>
-          <a:prstGeom prst="line">
-            <a:avLst/>
-          </a:prstGeom>
-        </p:spPr>
-        <p:style>
-          <a:lnRef idx="1">
-            <a:schemeClr val="accent1"/>
-          </a:lnRef>
-          <a:fillRef idx="0">
-            <a:schemeClr val="accent1"/>
-          </a:fillRef>
-          <a:effectRef idx="0">
-            <a:schemeClr val="accent1"/>
-          </a:effectRef>
-          <a:fontRef idx="minor">
-            <a:schemeClr val="tx1"/>
-          </a:fontRef>
-        </p:style>
-      </p:cxnSp>
       <p:pic>
         <p:nvPicPr>
           <p:cNvPr id="1026" name="Picture 2" descr="E:\112 CFE ARCHIVE AND DATA II\СЕРВЕР CFE БОЛЕЕ ПОЛНЫЙ\DELTACENTER_SERVER\G20\G20 YEA Summit Argentina 20-22 September 2018\Photos\Day 1\EY_G20_0487.jpg"/>
@@ -4463,7 +4442,7 @@
           <p:nvPr/>
         </p:nvPicPr>
         <p:blipFill rotWithShape="1">
-          <a:blip r:embed="rId8" cstate="print">
+          <a:blip r:embed="rId9" cstate="print">
             <a:extLst>
               <a:ext uri="{28A0092B-C50C-407E-A947-70E740481C1C}">
                 <a14:useLocalDpi xmlns:a14="http://schemas.microsoft.com/office/drawing/2010/main" val="0"/>
@@ -4550,7 +4529,7 @@
           <p:nvPr/>
         </p:nvPicPr>
         <p:blipFill>
-          <a:blip r:embed="rId4" cstate="print">
+          <a:blip r:embed="rId5" cstate="print">
             <a:extLst>
               <a:ext uri="{28A0092B-C50C-407E-A947-70E740481C1C}">
                 <a14:useLocalDpi xmlns:a14="http://schemas.microsoft.com/office/drawing/2010/main" val="0"/>
@@ -4614,13 +4593,6 @@
               </a:rPr>
               <a:t>EDUCATIONAL</a:t>
             </a:r>
-            <a:endParaRPr lang="en-US" sz="1400" dirty="0" smtClean="0">
-              <a:solidFill>
-                <a:schemeClr val="bg1">
-                  <a:lumMod val="95000"/>
-                </a:schemeClr>
-              </a:solidFill>
-            </a:endParaRPr>
           </a:p>
           <a:p>
             <a:r>
@@ -4639,7 +4611,7 @@
     </p:spTree>
     <p:extLst>
       <p:ext uri="{BB962C8B-B14F-4D97-AF65-F5344CB8AC3E}">
-        <p14:creationId xmlns:p14="http://schemas.microsoft.com/office/powerpoint/2010/main" val="972216801"/>
+        <p14:creationId xmlns:p14="http://schemas.microsoft.com/office/powerpoint/2010/main" val="3851039089"/>
       </p:ext>
     </p:extLst>
   </p:cSld>
@@ -4668,31 +4640,132 @@
       </p:grpSpPr>
       <p:sp>
         <p:nvSpPr>
-          <p:cNvPr id="9" name="Пятиугольник 8"/>
+          <p:cNvPr id="2" name="Заголовок 1"/>
+          <p:cNvSpPr>
+            <a:spLocks noGrp="1"/>
+          </p:cNvSpPr>
+          <p:nvPr>
+            <p:ph type="title"/>
+          </p:nvPr>
+        </p:nvSpPr>
+        <p:spPr/>
+        <p:txBody>
+          <a:bodyPr/>
+          <a:lstStyle/>
+          <a:p>
+            <a:endParaRPr lang="ru-RU"/>
+          </a:p>
+        </p:txBody>
+      </p:sp>
+      <p:sp>
+        <p:nvSpPr>
+          <p:cNvPr id="3" name="Объект 2"/>
+          <p:cNvSpPr>
+            <a:spLocks noGrp="1"/>
+          </p:cNvSpPr>
+          <p:nvPr>
+            <p:ph idx="1"/>
+          </p:nvPr>
+        </p:nvSpPr>
+        <p:spPr/>
+        <p:txBody>
+          <a:bodyPr/>
+          <a:lstStyle/>
+          <a:p>
+            <a:endParaRPr lang="ru-RU"/>
+          </a:p>
+        </p:txBody>
+      </p:sp>
+    </p:spTree>
+    <p:extLst>
+      <p:ext uri="{BB962C8B-B14F-4D97-AF65-F5344CB8AC3E}">
+        <p14:creationId xmlns:p14="http://schemas.microsoft.com/office/powerpoint/2010/main" val="2377688350"/>
+      </p:ext>
+    </p:extLst>
+  </p:cSld>
+  <p:clrMapOvr>
+    <a:masterClrMapping/>
+  </p:clrMapOvr>
+</p:sld>
+</file>
+
+<file path=ppt/slides/slide4.xml><?xml version="1.0" encoding="utf-8"?>
+<p:sld xmlns:a="http://schemas.openxmlformats.org/drawingml/2006/main" xmlns:r="http://schemas.openxmlformats.org/officeDocument/2006/relationships" xmlns:p="http://schemas.openxmlformats.org/presentationml/2006/main">
+  <p:cSld>
+    <p:spTree>
+      <p:nvGrpSpPr>
+        <p:cNvPr id="1" name=""/>
+        <p:cNvGrpSpPr/>
+        <p:nvPr/>
+      </p:nvGrpSpPr>
+      <p:grpSpPr>
+        <a:xfrm>
+          <a:off x="0" y="0"/>
+          <a:ext cx="0" cy="0"/>
+          <a:chOff x="0" y="0"/>
+          <a:chExt cx="0" cy="0"/>
+        </a:xfrm>
+      </p:grpSpPr>
+      <p:pic>
+        <p:nvPicPr>
+          <p:cNvPr id="1027" name="Picture 3" descr="C:\!DISK\116 WEBSITES AND DOMAINS\cfeglobal.org\images\7094814.jpg"/>
+          <p:cNvPicPr>
+            <a:picLocks noChangeAspect="1" noChangeArrowheads="1"/>
+          </p:cNvPicPr>
+          <p:nvPr/>
+        </p:nvPicPr>
+        <p:blipFill>
+          <a:blip r:embed="rId2" cstate="print">
+            <a:extLst>
+              <a:ext uri="{28A0092B-C50C-407E-A947-70E740481C1C}">
+                <a14:useLocalDpi xmlns:a14="http://schemas.microsoft.com/office/drawing/2010/main" val="0"/>
+              </a:ext>
+            </a:extLst>
+          </a:blip>
+          <a:srcRect/>
+          <a:stretch>
+            <a:fillRect/>
+          </a:stretch>
+        </p:blipFill>
+        <p:spPr bwMode="auto">
+          <a:xfrm>
+            <a:off x="1219200" y="344511"/>
+            <a:ext cx="9296400" cy="6197600"/>
+          </a:xfrm>
+          <a:prstGeom prst="rect">
+            <a:avLst/>
+          </a:prstGeom>
+          <a:noFill/>
+          <a:extLst>
+            <a:ext uri="{909E8E84-426E-40DD-AFC4-6F175D3DCCD1}">
+              <a14:hiddenFill xmlns:a14="http://schemas.microsoft.com/office/drawing/2010/main">
+                <a:solidFill>
+                  <a:srgbClr val="FFFFFF"/>
+                </a:solidFill>
+              </a14:hiddenFill>
+            </a:ext>
+          </a:extLst>
+        </p:spPr>
+      </p:pic>
+      <p:sp>
+        <p:nvSpPr>
+          <p:cNvPr id="18" name="Прямоугольник 17"/>
           <p:cNvSpPr/>
           <p:nvPr/>
         </p:nvSpPr>
         <p:spPr>
           <a:xfrm>
-            <a:off x="0" y="0"/>
-            <a:ext cx="19507200" cy="6705600"/>
-          </a:xfrm>
-          <a:prstGeom prst="homePlate">
-            <a:avLst>
-              <a:gd name="adj" fmla="val 0"/>
-            </a:avLst>
-          </a:prstGeom>
-          <a:gradFill>
-            <a:gsLst>
-              <a:gs pos="100000">
-                <a:srgbClr val="C8DFFA"/>
-              </a:gs>
-              <a:gs pos="100000">
-                <a:srgbClr val="2446C8"/>
-              </a:gs>
-            </a:gsLst>
-            <a:lin ang="0" scaled="0"/>
-          </a:gradFill>
+            <a:off x="6075556" y="2858934"/>
+            <a:ext cx="2470436" cy="467784"/>
+          </a:xfrm>
+          <a:prstGeom prst="rect">
+            <a:avLst/>
+          </a:prstGeom>
+          <a:solidFill>
+            <a:srgbClr val="5C4033">
+              <a:alpha val="70000"/>
+            </a:srgbClr>
+          </a:solidFill>
           <a:ln>
             <a:noFill/>
           </a:ln>
@@ -4724,7 +4797,397 @@
       </p:sp>
       <p:pic>
         <p:nvPicPr>
-          <p:cNvPr id="1026" name="Picture 2" descr="E:\112 CFE ARCHIVE AND DATA II\СЕРВЕР CFE БОЛЕЕ ПОЛНЫЙ\DELTACENTER_SERVER\G20\G20 YEA Summit Argentina 20-22 September 2018\Photos\Day 1\EY_G20_0093.jpg"/>
+          <p:cNvPr id="23" name="Picture 2" descr="C:\!DISK\116 WEBSITES AND DOMAINS\cfeglobal.org\assets\images\logo\cfe-long.png"/>
+          <p:cNvPicPr>
+            <a:picLocks noChangeAspect="1" noChangeArrowheads="1"/>
+          </p:cNvPicPr>
+          <p:nvPr/>
+        </p:nvPicPr>
+        <p:blipFill>
+          <a:blip r:embed="rId3" cstate="print">
+            <a:extLst>
+              <a:ext uri="{28A0092B-C50C-407E-A947-70E740481C1C}">
+                <a14:useLocalDpi xmlns:a14="http://schemas.microsoft.com/office/drawing/2010/main" val="0"/>
+              </a:ext>
+            </a:extLst>
+          </a:blip>
+          <a:srcRect/>
+          <a:stretch>
+            <a:fillRect/>
+          </a:stretch>
+        </p:blipFill>
+        <p:spPr bwMode="auto">
+          <a:xfrm>
+            <a:off x="6151537" y="2931482"/>
+            <a:ext cx="287381" cy="329184"/>
+          </a:xfrm>
+          <a:prstGeom prst="rect">
+            <a:avLst/>
+          </a:prstGeom>
+          <a:noFill/>
+          <a:extLst>
+            <a:ext uri="{909E8E84-426E-40DD-AFC4-6F175D3DCCD1}">
+              <a14:hiddenFill xmlns:a14="http://schemas.microsoft.com/office/drawing/2010/main">
+                <a:solidFill>
+                  <a:srgbClr val="FFFFFF"/>
+                </a:solidFill>
+              </a14:hiddenFill>
+            </a:ext>
+          </a:extLst>
+        </p:spPr>
+      </p:pic>
+      <p:sp>
+        <p:nvSpPr>
+          <p:cNvPr id="24" name="TextBox 23"/>
+          <p:cNvSpPr txBox="1"/>
+          <p:nvPr/>
+        </p:nvSpPr>
+        <p:spPr>
+          <a:xfrm>
+            <a:off x="6469036" y="2880631"/>
+            <a:ext cx="1101905" cy="430887"/>
+          </a:xfrm>
+          <a:prstGeom prst="rect">
+            <a:avLst/>
+          </a:prstGeom>
+          <a:noFill/>
+        </p:spPr>
+        <p:txBody>
+          <a:bodyPr wrap="none" lIns="0" tIns="0" rIns="0" bIns="0" rtlCol="0">
+            <a:spAutoFit/>
+          </a:bodyPr>
+          <a:lstStyle/>
+          <a:p>
+            <a:r>
+              <a:rPr lang="en-US" sz="1400" dirty="0" smtClean="0">
+                <a:solidFill>
+                  <a:schemeClr val="bg1">
+                    <a:lumMod val="95000"/>
+                  </a:schemeClr>
+                </a:solidFill>
+              </a:rPr>
+              <a:t>ACCELERATION</a:t>
+            </a:r>
+          </a:p>
+          <a:p>
+            <a:r>
+              <a:rPr lang="en-US" sz="1400" dirty="0" smtClean="0">
+                <a:solidFill>
+                  <a:schemeClr val="bg1">
+                    <a:lumMod val="95000"/>
+                  </a:schemeClr>
+                </a:solidFill>
+              </a:rPr>
+              <a:t>PROGRAMS</a:t>
+            </a:r>
+          </a:p>
+        </p:txBody>
+      </p:sp>
+      <p:sp>
+        <p:nvSpPr>
+          <p:cNvPr id="26" name="Прямоугольник 25"/>
+          <p:cNvSpPr/>
+          <p:nvPr/>
+        </p:nvSpPr>
+        <p:spPr>
+          <a:xfrm>
+            <a:off x="6361496" y="4905441"/>
+            <a:ext cx="2249104" cy="467784"/>
+          </a:xfrm>
+          <a:prstGeom prst="rect">
+            <a:avLst/>
+          </a:prstGeom>
+          <a:solidFill>
+            <a:srgbClr val="5C4033">
+              <a:alpha val="70000"/>
+            </a:srgbClr>
+          </a:solidFill>
+          <a:ln>
+            <a:noFill/>
+          </a:ln>
+        </p:spPr>
+        <p:style>
+          <a:lnRef idx="2">
+            <a:schemeClr val="accent1">
+              <a:shade val="50000"/>
+            </a:schemeClr>
+          </a:lnRef>
+          <a:fillRef idx="1">
+            <a:schemeClr val="accent1"/>
+          </a:fillRef>
+          <a:effectRef idx="0">
+            <a:schemeClr val="accent1"/>
+          </a:effectRef>
+          <a:fontRef idx="minor">
+            <a:schemeClr val="lt1"/>
+          </a:fontRef>
+        </p:style>
+        <p:txBody>
+          <a:bodyPr rtlCol="0" anchor="ctr"/>
+          <a:lstStyle/>
+          <a:p>
+            <a:pPr algn="ctr"/>
+            <a:endParaRPr lang="ru-RU"/>
+          </a:p>
+        </p:txBody>
+      </p:sp>
+      <p:pic>
+        <p:nvPicPr>
+          <p:cNvPr id="27" name="Picture 2" descr="C:\!DISK\116 WEBSITES AND DOMAINS\cfeglobal.org\assets\images\logo\cfe-long.png"/>
+          <p:cNvPicPr>
+            <a:picLocks noChangeAspect="1" noChangeArrowheads="1"/>
+          </p:cNvPicPr>
+          <p:nvPr/>
+        </p:nvPicPr>
+        <p:blipFill>
+          <a:blip r:embed="rId3" cstate="print">
+            <a:extLst>
+              <a:ext uri="{28A0092B-C50C-407E-A947-70E740481C1C}">
+                <a14:useLocalDpi xmlns:a14="http://schemas.microsoft.com/office/drawing/2010/main" val="0"/>
+              </a:ext>
+            </a:extLst>
+          </a:blip>
+          <a:srcRect/>
+          <a:stretch>
+            <a:fillRect/>
+          </a:stretch>
+        </p:blipFill>
+        <p:spPr bwMode="auto">
+          <a:xfrm>
+            <a:off x="6437477" y="4977989"/>
+            <a:ext cx="287381" cy="329184"/>
+          </a:xfrm>
+          <a:prstGeom prst="rect">
+            <a:avLst/>
+          </a:prstGeom>
+          <a:noFill/>
+          <a:extLst>
+            <a:ext uri="{909E8E84-426E-40DD-AFC4-6F175D3DCCD1}">
+              <a14:hiddenFill xmlns:a14="http://schemas.microsoft.com/office/drawing/2010/main">
+                <a:solidFill>
+                  <a:srgbClr val="FFFFFF"/>
+                </a:solidFill>
+              </a14:hiddenFill>
+            </a:ext>
+          </a:extLst>
+        </p:spPr>
+      </p:pic>
+      <p:sp>
+        <p:nvSpPr>
+          <p:cNvPr id="28" name="TextBox 27"/>
+          <p:cNvSpPr txBox="1"/>
+          <p:nvPr/>
+        </p:nvSpPr>
+        <p:spPr>
+          <a:xfrm>
+            <a:off x="6754976" y="4927138"/>
+            <a:ext cx="931089" cy="430887"/>
+          </a:xfrm>
+          <a:prstGeom prst="rect">
+            <a:avLst/>
+          </a:prstGeom>
+          <a:noFill/>
+        </p:spPr>
+        <p:txBody>
+          <a:bodyPr wrap="none" lIns="0" tIns="0" rIns="0" bIns="0" rtlCol="0">
+            <a:spAutoFit/>
+          </a:bodyPr>
+          <a:lstStyle/>
+          <a:p>
+            <a:r>
+              <a:rPr lang="en-US" sz="1400" dirty="0" smtClean="0">
+                <a:solidFill>
+                  <a:schemeClr val="bg1">
+                    <a:lumMod val="95000"/>
+                  </a:schemeClr>
+                </a:solidFill>
+              </a:rPr>
+              <a:t>MENTORING</a:t>
+            </a:r>
+          </a:p>
+          <a:p>
+            <a:r>
+              <a:rPr lang="en-US" sz="1400" dirty="0" smtClean="0">
+                <a:solidFill>
+                  <a:schemeClr val="bg1">
+                    <a:lumMod val="95000"/>
+                  </a:schemeClr>
+                </a:solidFill>
+              </a:rPr>
+              <a:t>PROGRAMS</a:t>
+            </a:r>
+          </a:p>
+        </p:txBody>
+      </p:sp>
+      <p:sp>
+        <p:nvSpPr>
+          <p:cNvPr id="29" name="Прямоугольник 28"/>
+          <p:cNvSpPr/>
+          <p:nvPr/>
+        </p:nvSpPr>
+        <p:spPr>
+          <a:xfrm>
+            <a:off x="3503741" y="4653101"/>
+            <a:ext cx="2470434" cy="467784"/>
+          </a:xfrm>
+          <a:prstGeom prst="rect">
+            <a:avLst/>
+          </a:prstGeom>
+          <a:solidFill>
+            <a:srgbClr val="5C4033">
+              <a:alpha val="70000"/>
+            </a:srgbClr>
+          </a:solidFill>
+          <a:ln>
+            <a:noFill/>
+          </a:ln>
+        </p:spPr>
+        <p:style>
+          <a:lnRef idx="2">
+            <a:schemeClr val="accent1">
+              <a:shade val="50000"/>
+            </a:schemeClr>
+          </a:lnRef>
+          <a:fillRef idx="1">
+            <a:schemeClr val="accent1"/>
+          </a:fillRef>
+          <a:effectRef idx="0">
+            <a:schemeClr val="accent1"/>
+          </a:effectRef>
+          <a:fontRef idx="minor">
+            <a:schemeClr val="lt1"/>
+          </a:fontRef>
+        </p:style>
+        <p:txBody>
+          <a:bodyPr rtlCol="0" anchor="ctr"/>
+          <a:lstStyle/>
+          <a:p>
+            <a:pPr algn="ctr"/>
+            <a:endParaRPr lang="ru-RU"/>
+          </a:p>
+        </p:txBody>
+      </p:sp>
+      <p:pic>
+        <p:nvPicPr>
+          <p:cNvPr id="30" name="Picture 2" descr="C:\!DISK\116 WEBSITES AND DOMAINS\cfeglobal.org\assets\images\logo\cfe-long.png"/>
+          <p:cNvPicPr>
+            <a:picLocks noChangeAspect="1" noChangeArrowheads="1"/>
+          </p:cNvPicPr>
+          <p:nvPr/>
+        </p:nvPicPr>
+        <p:blipFill>
+          <a:blip r:embed="rId3" cstate="print">
+            <a:extLst>
+              <a:ext uri="{28A0092B-C50C-407E-A947-70E740481C1C}">
+                <a14:useLocalDpi xmlns:a14="http://schemas.microsoft.com/office/drawing/2010/main" val="0"/>
+              </a:ext>
+            </a:extLst>
+          </a:blip>
+          <a:srcRect/>
+          <a:stretch>
+            <a:fillRect/>
+          </a:stretch>
+        </p:blipFill>
+        <p:spPr bwMode="auto">
+          <a:xfrm>
+            <a:off x="3579722" y="4740849"/>
+            <a:ext cx="287381" cy="329184"/>
+          </a:xfrm>
+          <a:prstGeom prst="rect">
+            <a:avLst/>
+          </a:prstGeom>
+          <a:noFill/>
+          <a:extLst>
+            <a:ext uri="{909E8E84-426E-40DD-AFC4-6F175D3DCCD1}">
+              <a14:hiddenFill xmlns:a14="http://schemas.microsoft.com/office/drawing/2010/main">
+                <a:solidFill>
+                  <a:srgbClr val="FFFFFF"/>
+                </a:solidFill>
+              </a14:hiddenFill>
+            </a:ext>
+          </a:extLst>
+        </p:spPr>
+      </p:pic>
+      <p:sp>
+        <p:nvSpPr>
+          <p:cNvPr id="31" name="TextBox 30"/>
+          <p:cNvSpPr txBox="1"/>
+          <p:nvPr/>
+        </p:nvSpPr>
+        <p:spPr>
+          <a:xfrm>
+            <a:off x="3897221" y="4689998"/>
+            <a:ext cx="859081" cy="430887"/>
+          </a:xfrm>
+          <a:prstGeom prst="rect">
+            <a:avLst/>
+          </a:prstGeom>
+          <a:noFill/>
+        </p:spPr>
+        <p:txBody>
+          <a:bodyPr wrap="none" lIns="0" tIns="0" rIns="0" bIns="0" rtlCol="0">
+            <a:spAutoFit/>
+          </a:bodyPr>
+          <a:lstStyle/>
+          <a:p>
+            <a:r>
+              <a:rPr lang="en-US" sz="1400" dirty="0" smtClean="0">
+                <a:solidFill>
+                  <a:schemeClr val="bg1">
+                    <a:lumMod val="95000"/>
+                  </a:schemeClr>
+                </a:solidFill>
+              </a:rPr>
+              <a:t>SCALEUP</a:t>
+            </a:r>
+          </a:p>
+          <a:p>
+            <a:r>
+              <a:rPr lang="en-US" sz="1400" dirty="0" smtClean="0">
+                <a:solidFill>
+                  <a:schemeClr val="bg1">
+                    <a:lumMod val="95000"/>
+                  </a:schemeClr>
+                </a:solidFill>
+              </a:rPr>
+              <a:t>PROGRAMS</a:t>
+            </a:r>
+          </a:p>
+        </p:txBody>
+      </p:sp>
+    </p:spTree>
+    <p:extLst>
+      <p:ext uri="{BB962C8B-B14F-4D97-AF65-F5344CB8AC3E}">
+        <p14:creationId xmlns:p14="http://schemas.microsoft.com/office/powerpoint/2010/main" val="1884739940"/>
+      </p:ext>
+    </p:extLst>
+  </p:cSld>
+  <p:clrMapOvr>
+    <a:masterClrMapping/>
+  </p:clrMapOvr>
+</p:sld>
+</file>
+
+<file path=ppt/slides/slide5.xml><?xml version="1.0" encoding="utf-8"?>
+<p:sld xmlns:a="http://schemas.openxmlformats.org/drawingml/2006/main" xmlns:r="http://schemas.openxmlformats.org/officeDocument/2006/relationships" xmlns:p="http://schemas.openxmlformats.org/presentationml/2006/main">
+  <p:cSld>
+    <p:spTree>
+      <p:nvGrpSpPr>
+        <p:cNvPr id="1" name=""/>
+        <p:cNvGrpSpPr/>
+        <p:nvPr/>
+      </p:nvGrpSpPr>
+      <p:grpSpPr>
+        <a:xfrm>
+          <a:off x="0" y="0"/>
+          <a:ext cx="0" cy="0"/>
+          <a:chOff x="0" y="0"/>
+          <a:chExt cx="0" cy="0"/>
+        </a:xfrm>
+      </p:grpSpPr>
+      <p:pic>
+        <p:nvPicPr>
+          <p:cNvPr id="1027" name="Picture 3" descr="C:\!DISK\116 WEBSITES AND DOMAINS\cfeglobal.org\images\7094814.jpg"/>
           <p:cNvPicPr>
             <a:picLocks noChangeAspect="1" noChangeArrowheads="1"/>
           </p:cNvPicPr>
@@ -4745,6 +5208,2878 @@
         </p:blipFill>
         <p:spPr bwMode="auto">
           <a:xfrm>
+            <a:off x="1219200" y="344511"/>
+            <a:ext cx="9296400" cy="6197600"/>
+          </a:xfrm>
+          <a:prstGeom prst="rect">
+            <a:avLst/>
+          </a:prstGeom>
+          <a:noFill/>
+          <a:extLst>
+            <a:ext uri="{909E8E84-426E-40DD-AFC4-6F175D3DCCD1}">
+              <a14:hiddenFill xmlns:a14="http://schemas.microsoft.com/office/drawing/2010/main">
+                <a:solidFill>
+                  <a:srgbClr val="FFFFFF"/>
+                </a:solidFill>
+              </a14:hiddenFill>
+            </a:ext>
+          </a:extLst>
+        </p:spPr>
+      </p:pic>
+      <p:pic>
+        <p:nvPicPr>
+          <p:cNvPr id="25" name="Picture 8" descr="E:\112 CFE ARCHIVE AND DATA II\СЕРВЕР CFE БОЛЕЕ ПОЛНЫЙ\DELTACENTER_SERVER\G20\G20 YEA Summit Argentina 20-22 September 2018\Photos\Day 2\EY_G20_0612.jpg"/>
+          <p:cNvPicPr>
+            <a:picLocks noChangeAspect="1" noChangeArrowheads="1"/>
+          </p:cNvPicPr>
+          <p:nvPr/>
+        </p:nvPicPr>
+        <p:blipFill rotWithShape="1">
+          <a:blip r:embed="rId3" cstate="print">
+            <a:extLst>
+              <a:ext uri="{28A0092B-C50C-407E-A947-70E740481C1C}">
+                <a14:useLocalDpi xmlns:a14="http://schemas.microsoft.com/office/drawing/2010/main" val="0"/>
+              </a:ext>
+            </a:extLst>
+          </a:blip>
+          <a:srcRect l="25228" t="14100" r="15780"/>
+          <a:stretch/>
+        </p:blipFill>
+        <p:spPr bwMode="auto">
+          <a:xfrm>
+            <a:off x="6354300" y="4274698"/>
+            <a:ext cx="2469991" cy="2398490"/>
+          </a:xfrm>
+          <a:prstGeom prst="rect">
+            <a:avLst/>
+          </a:prstGeom>
+          <a:noFill/>
+          <a:extLst>
+            <a:ext uri="{909E8E84-426E-40DD-AFC4-6F175D3DCCD1}">
+              <a14:hiddenFill xmlns:a14="http://schemas.microsoft.com/office/drawing/2010/main">
+                <a:solidFill>
+                  <a:srgbClr val="FFFFFF"/>
+                </a:solidFill>
+              </a14:hiddenFill>
+            </a:ext>
+          </a:extLst>
+        </p:spPr>
+      </p:pic>
+      <p:pic>
+        <p:nvPicPr>
+          <p:cNvPr id="16" name="Picture 5" descr="E:\112 CFE ARCHIVE AND DATA II\СЕРВЕР CFE БОЛЕЕ ПОЛНЫЙ\DELTACENTER_SERVER\G20\G20 YEA Summit Argentina 20-22 September 2018\Photos\Day 1\EY_G20_0288.jpg"/>
+          <p:cNvPicPr>
+            <a:picLocks noChangeAspect="1" noChangeArrowheads="1"/>
+          </p:cNvPicPr>
+          <p:nvPr/>
+        </p:nvPicPr>
+        <p:blipFill rotWithShape="1">
+          <a:blip r:embed="rId4" cstate="print">
+            <a:extLst>
+              <a:ext uri="{28A0092B-C50C-407E-A947-70E740481C1C}">
+                <a14:useLocalDpi xmlns:a14="http://schemas.microsoft.com/office/drawing/2010/main" val="0"/>
+              </a:ext>
+            </a:extLst>
+          </a:blip>
+          <a:srcRect l="23147" r="17894"/>
+          <a:stretch/>
+        </p:blipFill>
+        <p:spPr bwMode="auto">
+          <a:xfrm>
+            <a:off x="3443827" y="2489087"/>
+            <a:ext cx="2470434" cy="2794226"/>
+          </a:xfrm>
+          <a:prstGeom prst="rect">
+            <a:avLst/>
+          </a:prstGeom>
+          <a:noFill/>
+          <a:extLst>
+            <a:ext uri="{909E8E84-426E-40DD-AFC4-6F175D3DCCD1}">
+              <a14:hiddenFill xmlns:a14="http://schemas.microsoft.com/office/drawing/2010/main">
+                <a:solidFill>
+                  <a:srgbClr val="FFFFFF"/>
+                </a:solidFill>
+              </a14:hiddenFill>
+            </a:ext>
+          </a:extLst>
+        </p:spPr>
+      </p:pic>
+      <p:pic>
+        <p:nvPicPr>
+          <p:cNvPr id="17" name="Picture 2" descr="E:\112 CFE ARCHIVE AND DATA II\СЕРВЕР CFE БОЛЕЕ ПОЛНЫЙ\DELTACENTER_SERVER\G20\G20 YEA Summit Argentina 20-22 September 2018\Photos\Day 1\EY_G20_0093.jpg"/>
+          <p:cNvPicPr>
+            <a:picLocks noChangeAspect="1" noChangeArrowheads="1"/>
+          </p:cNvPicPr>
+          <p:nvPr/>
+        </p:nvPicPr>
+        <p:blipFill rotWithShape="1">
+          <a:blip r:embed="rId5" cstate="print">
+            <a:extLst>
+              <a:ext uri="{28A0092B-C50C-407E-A947-70E740481C1C}">
+                <a14:useLocalDpi xmlns:a14="http://schemas.microsoft.com/office/drawing/2010/main" val="0"/>
+              </a:ext>
+            </a:extLst>
+          </a:blip>
+          <a:srcRect l="33931" t="-238" r="12036" b="8848"/>
+          <a:stretch/>
+        </p:blipFill>
+        <p:spPr bwMode="auto">
+          <a:xfrm>
+            <a:off x="6075556" y="698159"/>
+            <a:ext cx="2470435" cy="2786420"/>
+          </a:xfrm>
+          <a:prstGeom prst="rect">
+            <a:avLst/>
+          </a:prstGeom>
+          <a:noFill/>
+          <a:extLst>
+            <a:ext uri="{909E8E84-426E-40DD-AFC4-6F175D3DCCD1}">
+              <a14:hiddenFill xmlns:a14="http://schemas.microsoft.com/office/drawing/2010/main">
+                <a:solidFill>
+                  <a:srgbClr val="FFFFFF"/>
+                </a:solidFill>
+              </a14:hiddenFill>
+            </a:ext>
+          </a:extLst>
+        </p:spPr>
+      </p:pic>
+      <p:sp>
+        <p:nvSpPr>
+          <p:cNvPr id="18" name="Прямоугольник 17"/>
+          <p:cNvSpPr/>
+          <p:nvPr/>
+        </p:nvSpPr>
+        <p:spPr>
+          <a:xfrm>
+            <a:off x="6075556" y="2858934"/>
+            <a:ext cx="2470436" cy="467784"/>
+          </a:xfrm>
+          <a:prstGeom prst="rect">
+            <a:avLst/>
+          </a:prstGeom>
+          <a:solidFill>
+            <a:srgbClr val="5C4033">
+              <a:alpha val="70000"/>
+            </a:srgbClr>
+          </a:solidFill>
+          <a:ln>
+            <a:noFill/>
+          </a:ln>
+        </p:spPr>
+        <p:style>
+          <a:lnRef idx="2">
+            <a:schemeClr val="accent1">
+              <a:shade val="50000"/>
+            </a:schemeClr>
+          </a:lnRef>
+          <a:fillRef idx="1">
+            <a:schemeClr val="accent1"/>
+          </a:fillRef>
+          <a:effectRef idx="0">
+            <a:schemeClr val="accent1"/>
+          </a:effectRef>
+          <a:fontRef idx="minor">
+            <a:schemeClr val="lt1"/>
+          </a:fontRef>
+        </p:style>
+        <p:txBody>
+          <a:bodyPr rtlCol="0" anchor="ctr"/>
+          <a:lstStyle/>
+          <a:p>
+            <a:pPr algn="ctr"/>
+            <a:endParaRPr lang="ru-RU"/>
+          </a:p>
+        </p:txBody>
+      </p:sp>
+      <p:pic>
+        <p:nvPicPr>
+          <p:cNvPr id="23" name="Picture 2" descr="C:\!DISK\116 WEBSITES AND DOMAINS\cfeglobal.org\assets\images\logo\cfe-long.png"/>
+          <p:cNvPicPr>
+            <a:picLocks noChangeAspect="1" noChangeArrowheads="1"/>
+          </p:cNvPicPr>
+          <p:nvPr/>
+        </p:nvPicPr>
+        <p:blipFill>
+          <a:blip r:embed="rId6" cstate="print">
+            <a:extLst>
+              <a:ext uri="{28A0092B-C50C-407E-A947-70E740481C1C}">
+                <a14:useLocalDpi xmlns:a14="http://schemas.microsoft.com/office/drawing/2010/main" val="0"/>
+              </a:ext>
+            </a:extLst>
+          </a:blip>
+          <a:srcRect/>
+          <a:stretch>
+            <a:fillRect/>
+          </a:stretch>
+        </p:blipFill>
+        <p:spPr bwMode="auto">
+          <a:xfrm>
+            <a:off x="6151537" y="2931482"/>
+            <a:ext cx="287381" cy="329184"/>
+          </a:xfrm>
+          <a:prstGeom prst="rect">
+            <a:avLst/>
+          </a:prstGeom>
+          <a:noFill/>
+          <a:extLst>
+            <a:ext uri="{909E8E84-426E-40DD-AFC4-6F175D3DCCD1}">
+              <a14:hiddenFill xmlns:a14="http://schemas.microsoft.com/office/drawing/2010/main">
+                <a:solidFill>
+                  <a:srgbClr val="FFFFFF"/>
+                </a:solidFill>
+              </a14:hiddenFill>
+            </a:ext>
+          </a:extLst>
+        </p:spPr>
+      </p:pic>
+      <p:sp>
+        <p:nvSpPr>
+          <p:cNvPr id="24" name="TextBox 23"/>
+          <p:cNvSpPr txBox="1"/>
+          <p:nvPr/>
+        </p:nvSpPr>
+        <p:spPr>
+          <a:xfrm>
+            <a:off x="6469036" y="2880631"/>
+            <a:ext cx="1101905" cy="430887"/>
+          </a:xfrm>
+          <a:prstGeom prst="rect">
+            <a:avLst/>
+          </a:prstGeom>
+          <a:noFill/>
+        </p:spPr>
+        <p:txBody>
+          <a:bodyPr wrap="none" lIns="0" tIns="0" rIns="0" bIns="0" rtlCol="0">
+            <a:spAutoFit/>
+          </a:bodyPr>
+          <a:lstStyle/>
+          <a:p>
+            <a:r>
+              <a:rPr lang="en-US" sz="1400" dirty="0" smtClean="0">
+                <a:solidFill>
+                  <a:schemeClr val="bg1">
+                    <a:lumMod val="95000"/>
+                  </a:schemeClr>
+                </a:solidFill>
+              </a:rPr>
+              <a:t>ACCELERATION</a:t>
+            </a:r>
+          </a:p>
+          <a:p>
+            <a:r>
+              <a:rPr lang="en-US" sz="1400" dirty="0" smtClean="0">
+                <a:solidFill>
+                  <a:schemeClr val="bg1">
+                    <a:lumMod val="95000"/>
+                  </a:schemeClr>
+                </a:solidFill>
+              </a:rPr>
+              <a:t>PROGRAMS</a:t>
+            </a:r>
+          </a:p>
+        </p:txBody>
+      </p:sp>
+      <p:sp>
+        <p:nvSpPr>
+          <p:cNvPr id="26" name="Прямоугольник 25"/>
+          <p:cNvSpPr/>
+          <p:nvPr/>
+        </p:nvSpPr>
+        <p:spPr>
+          <a:xfrm>
+            <a:off x="6377513" y="6043947"/>
+            <a:ext cx="2418890" cy="467784"/>
+          </a:xfrm>
+          <a:prstGeom prst="rect">
+            <a:avLst/>
+          </a:prstGeom>
+          <a:solidFill>
+            <a:srgbClr val="5C4033">
+              <a:alpha val="70000"/>
+            </a:srgbClr>
+          </a:solidFill>
+          <a:ln>
+            <a:noFill/>
+          </a:ln>
+        </p:spPr>
+        <p:style>
+          <a:lnRef idx="2">
+            <a:schemeClr val="accent1">
+              <a:shade val="50000"/>
+            </a:schemeClr>
+          </a:lnRef>
+          <a:fillRef idx="1">
+            <a:schemeClr val="accent1"/>
+          </a:fillRef>
+          <a:effectRef idx="0">
+            <a:schemeClr val="accent1"/>
+          </a:effectRef>
+          <a:fontRef idx="minor">
+            <a:schemeClr val="lt1"/>
+          </a:fontRef>
+        </p:style>
+        <p:txBody>
+          <a:bodyPr rtlCol="0" anchor="ctr"/>
+          <a:lstStyle/>
+          <a:p>
+            <a:pPr algn="ctr"/>
+            <a:endParaRPr lang="ru-RU"/>
+          </a:p>
+        </p:txBody>
+      </p:sp>
+      <p:pic>
+        <p:nvPicPr>
+          <p:cNvPr id="27" name="Picture 2" descr="C:\!DISK\116 WEBSITES AND DOMAINS\cfeglobal.org\assets\images\logo\cfe-long.png"/>
+          <p:cNvPicPr>
+            <a:picLocks noChangeAspect="1" noChangeArrowheads="1"/>
+          </p:cNvPicPr>
+          <p:nvPr/>
+        </p:nvPicPr>
+        <p:blipFill>
+          <a:blip r:embed="rId6" cstate="print">
+            <a:extLst>
+              <a:ext uri="{28A0092B-C50C-407E-A947-70E740481C1C}">
+                <a14:useLocalDpi xmlns:a14="http://schemas.microsoft.com/office/drawing/2010/main" val="0"/>
+              </a:ext>
+            </a:extLst>
+          </a:blip>
+          <a:srcRect/>
+          <a:stretch>
+            <a:fillRect/>
+          </a:stretch>
+        </p:blipFill>
+        <p:spPr bwMode="auto">
+          <a:xfrm>
+            <a:off x="6453494" y="6116495"/>
+            <a:ext cx="287381" cy="329184"/>
+          </a:xfrm>
+          <a:prstGeom prst="rect">
+            <a:avLst/>
+          </a:prstGeom>
+          <a:noFill/>
+          <a:extLst>
+            <a:ext uri="{909E8E84-426E-40DD-AFC4-6F175D3DCCD1}">
+              <a14:hiddenFill xmlns:a14="http://schemas.microsoft.com/office/drawing/2010/main">
+                <a:solidFill>
+                  <a:srgbClr val="FFFFFF"/>
+                </a:solidFill>
+              </a14:hiddenFill>
+            </a:ext>
+          </a:extLst>
+        </p:spPr>
+      </p:pic>
+      <p:sp>
+        <p:nvSpPr>
+          <p:cNvPr id="28" name="TextBox 27"/>
+          <p:cNvSpPr txBox="1"/>
+          <p:nvPr/>
+        </p:nvSpPr>
+        <p:spPr>
+          <a:xfrm>
+            <a:off x="6770993" y="6065644"/>
+            <a:ext cx="931089" cy="430887"/>
+          </a:xfrm>
+          <a:prstGeom prst="rect">
+            <a:avLst/>
+          </a:prstGeom>
+          <a:noFill/>
+        </p:spPr>
+        <p:txBody>
+          <a:bodyPr wrap="none" lIns="0" tIns="0" rIns="0" bIns="0" rtlCol="0">
+            <a:spAutoFit/>
+          </a:bodyPr>
+          <a:lstStyle/>
+          <a:p>
+            <a:r>
+              <a:rPr lang="en-US" sz="1400" dirty="0" smtClean="0">
+                <a:solidFill>
+                  <a:schemeClr val="bg1">
+                    <a:lumMod val="95000"/>
+                  </a:schemeClr>
+                </a:solidFill>
+              </a:rPr>
+              <a:t>MENTORING</a:t>
+            </a:r>
+          </a:p>
+          <a:p>
+            <a:r>
+              <a:rPr lang="en-US" sz="1400" dirty="0" smtClean="0">
+                <a:solidFill>
+                  <a:schemeClr val="bg1">
+                    <a:lumMod val="95000"/>
+                  </a:schemeClr>
+                </a:solidFill>
+              </a:rPr>
+              <a:t>PROGRAMS</a:t>
+            </a:r>
+          </a:p>
+        </p:txBody>
+      </p:sp>
+      <p:sp>
+        <p:nvSpPr>
+          <p:cNvPr id="29" name="Прямоугольник 28"/>
+          <p:cNvSpPr/>
+          <p:nvPr/>
+        </p:nvSpPr>
+        <p:spPr>
+          <a:xfrm>
+            <a:off x="3503741" y="4653101"/>
+            <a:ext cx="2470434" cy="467784"/>
+          </a:xfrm>
+          <a:prstGeom prst="rect">
+            <a:avLst/>
+          </a:prstGeom>
+          <a:solidFill>
+            <a:srgbClr val="5C4033">
+              <a:alpha val="70000"/>
+            </a:srgbClr>
+          </a:solidFill>
+          <a:ln>
+            <a:noFill/>
+          </a:ln>
+        </p:spPr>
+        <p:style>
+          <a:lnRef idx="2">
+            <a:schemeClr val="accent1">
+              <a:shade val="50000"/>
+            </a:schemeClr>
+          </a:lnRef>
+          <a:fillRef idx="1">
+            <a:schemeClr val="accent1"/>
+          </a:fillRef>
+          <a:effectRef idx="0">
+            <a:schemeClr val="accent1"/>
+          </a:effectRef>
+          <a:fontRef idx="minor">
+            <a:schemeClr val="lt1"/>
+          </a:fontRef>
+        </p:style>
+        <p:txBody>
+          <a:bodyPr rtlCol="0" anchor="ctr"/>
+          <a:lstStyle/>
+          <a:p>
+            <a:pPr algn="ctr"/>
+            <a:endParaRPr lang="ru-RU"/>
+          </a:p>
+        </p:txBody>
+      </p:sp>
+      <p:pic>
+        <p:nvPicPr>
+          <p:cNvPr id="30" name="Picture 2" descr="C:\!DISK\116 WEBSITES AND DOMAINS\cfeglobal.org\assets\images\logo\cfe-long.png"/>
+          <p:cNvPicPr>
+            <a:picLocks noChangeAspect="1" noChangeArrowheads="1"/>
+          </p:cNvPicPr>
+          <p:nvPr/>
+        </p:nvPicPr>
+        <p:blipFill>
+          <a:blip r:embed="rId6" cstate="print">
+            <a:extLst>
+              <a:ext uri="{28A0092B-C50C-407E-A947-70E740481C1C}">
+                <a14:useLocalDpi xmlns:a14="http://schemas.microsoft.com/office/drawing/2010/main" val="0"/>
+              </a:ext>
+            </a:extLst>
+          </a:blip>
+          <a:srcRect/>
+          <a:stretch>
+            <a:fillRect/>
+          </a:stretch>
+        </p:blipFill>
+        <p:spPr bwMode="auto">
+          <a:xfrm>
+            <a:off x="3579722" y="4740849"/>
+            <a:ext cx="287381" cy="329184"/>
+          </a:xfrm>
+          <a:prstGeom prst="rect">
+            <a:avLst/>
+          </a:prstGeom>
+          <a:noFill/>
+          <a:extLst>
+            <a:ext uri="{909E8E84-426E-40DD-AFC4-6F175D3DCCD1}">
+              <a14:hiddenFill xmlns:a14="http://schemas.microsoft.com/office/drawing/2010/main">
+                <a:solidFill>
+                  <a:srgbClr val="FFFFFF"/>
+                </a:solidFill>
+              </a14:hiddenFill>
+            </a:ext>
+          </a:extLst>
+        </p:spPr>
+      </p:pic>
+      <p:sp>
+        <p:nvSpPr>
+          <p:cNvPr id="31" name="TextBox 30"/>
+          <p:cNvSpPr txBox="1"/>
+          <p:nvPr/>
+        </p:nvSpPr>
+        <p:spPr>
+          <a:xfrm>
+            <a:off x="3897221" y="4689998"/>
+            <a:ext cx="859081" cy="430887"/>
+          </a:xfrm>
+          <a:prstGeom prst="rect">
+            <a:avLst/>
+          </a:prstGeom>
+          <a:noFill/>
+        </p:spPr>
+        <p:txBody>
+          <a:bodyPr wrap="none" lIns="0" tIns="0" rIns="0" bIns="0" rtlCol="0">
+            <a:spAutoFit/>
+          </a:bodyPr>
+          <a:lstStyle/>
+          <a:p>
+            <a:r>
+              <a:rPr lang="en-US" sz="1400" dirty="0" smtClean="0">
+                <a:solidFill>
+                  <a:schemeClr val="bg1">
+                    <a:lumMod val="95000"/>
+                  </a:schemeClr>
+                </a:solidFill>
+              </a:rPr>
+              <a:t>SCALEUP</a:t>
+            </a:r>
+          </a:p>
+          <a:p>
+            <a:r>
+              <a:rPr lang="en-US" sz="1400" dirty="0" smtClean="0">
+                <a:solidFill>
+                  <a:schemeClr val="bg1">
+                    <a:lumMod val="95000"/>
+                  </a:schemeClr>
+                </a:solidFill>
+              </a:rPr>
+              <a:t>PROGRAMS</a:t>
+            </a:r>
+          </a:p>
+        </p:txBody>
+      </p:sp>
+    </p:spTree>
+    <p:extLst>
+      <p:ext uri="{BB962C8B-B14F-4D97-AF65-F5344CB8AC3E}">
+        <p14:creationId xmlns:p14="http://schemas.microsoft.com/office/powerpoint/2010/main" val="972216801"/>
+      </p:ext>
+    </p:extLst>
+  </p:cSld>
+  <p:clrMapOvr>
+    <a:masterClrMapping/>
+  </p:clrMapOvr>
+</p:sld>
+</file>
+
+<file path=ppt/slides/slide6.xml><?xml version="1.0" encoding="utf-8"?>
+<p:sld xmlns:a="http://schemas.openxmlformats.org/drawingml/2006/main" xmlns:r="http://schemas.openxmlformats.org/officeDocument/2006/relationships" xmlns:p="http://schemas.openxmlformats.org/presentationml/2006/main">
+  <p:cSld>
+    <p:spTree>
+      <p:nvGrpSpPr>
+        <p:cNvPr id="1" name=""/>
+        <p:cNvGrpSpPr/>
+        <p:nvPr/>
+      </p:nvGrpSpPr>
+      <p:grpSpPr>
+        <a:xfrm>
+          <a:off x="0" y="0"/>
+          <a:ext cx="0" cy="0"/>
+          <a:chOff x="0" y="0"/>
+          <a:chExt cx="0" cy="0"/>
+        </a:xfrm>
+      </p:grpSpPr>
+      <p:pic>
+        <p:nvPicPr>
+          <p:cNvPr id="33" name="Picture 3" descr="E:\112 CFE ARCHIVE AND DATA II\СЕРВЕР CFE БОЛЕЕ ПОЛНЫЙ\DELTACENTER_SERVER\G20\G20 YEA Summit Argentina 20-22 September 2018\Photos\Day 1\EY_G20_0022.jpg"/>
+          <p:cNvPicPr>
+            <a:picLocks noChangeAspect="1" noChangeArrowheads="1"/>
+          </p:cNvPicPr>
+          <p:nvPr/>
+        </p:nvPicPr>
+        <p:blipFill rotWithShape="1">
+          <a:blip r:embed="rId2" cstate="print">
+            <a:extLst>
+              <a:ext uri="{28A0092B-C50C-407E-A947-70E740481C1C}">
+                <a14:useLocalDpi xmlns:a14="http://schemas.microsoft.com/office/drawing/2010/main" val="0"/>
+              </a:ext>
+            </a:extLst>
+          </a:blip>
+          <a:srcRect l="27607" t="14624" r="25704" b="5716"/>
+          <a:stretch/>
+        </p:blipFill>
+        <p:spPr bwMode="auto">
+          <a:xfrm>
+            <a:off x="6718530" y="3410817"/>
+            <a:ext cx="2469991" cy="2810374"/>
+          </a:xfrm>
+          <a:prstGeom prst="rect">
+            <a:avLst/>
+          </a:prstGeom>
+          <a:noFill/>
+          <a:extLst>
+            <a:ext uri="{909E8E84-426E-40DD-AFC4-6F175D3DCCD1}">
+              <a14:hiddenFill xmlns:a14="http://schemas.microsoft.com/office/drawing/2010/main">
+                <a:solidFill>
+                  <a:srgbClr val="FFFFFF"/>
+                </a:solidFill>
+              </a14:hiddenFill>
+            </a:ext>
+          </a:extLst>
+        </p:spPr>
+      </p:pic>
+      <p:pic>
+        <p:nvPicPr>
+          <p:cNvPr id="25" name="Picture 8" descr="E:\112 CFE ARCHIVE AND DATA II\СЕРВЕР CFE БОЛЕЕ ПОЛНЫЙ\DELTACENTER_SERVER\G20\G20 YEA Summit Argentina 20-22 September 2018\Photos\Day 2\EY_G20_0612.jpg"/>
+          <p:cNvPicPr>
+            <a:picLocks noChangeAspect="1" noChangeArrowheads="1"/>
+          </p:cNvPicPr>
+          <p:nvPr/>
+        </p:nvPicPr>
+        <p:blipFill rotWithShape="1">
+          <a:blip r:embed="rId3" cstate="print">
+            <a:extLst>
+              <a:ext uri="{28A0092B-C50C-407E-A947-70E740481C1C}">
+                <a14:useLocalDpi xmlns:a14="http://schemas.microsoft.com/office/drawing/2010/main" val="0"/>
+              </a:ext>
+            </a:extLst>
+          </a:blip>
+          <a:srcRect l="25228" r="15780"/>
+          <a:stretch/>
+        </p:blipFill>
+        <p:spPr bwMode="auto">
+          <a:xfrm>
+            <a:off x="6718530" y="304800"/>
+            <a:ext cx="2469991" cy="2792191"/>
+          </a:xfrm>
+          <a:prstGeom prst="rect">
+            <a:avLst/>
+          </a:prstGeom>
+          <a:noFill/>
+          <a:extLst>
+            <a:ext uri="{909E8E84-426E-40DD-AFC4-6F175D3DCCD1}">
+              <a14:hiddenFill xmlns:a14="http://schemas.microsoft.com/office/drawing/2010/main">
+                <a:solidFill>
+                  <a:srgbClr val="FFFFFF"/>
+                </a:solidFill>
+              </a14:hiddenFill>
+            </a:ext>
+          </a:extLst>
+        </p:spPr>
+      </p:pic>
+      <p:sp>
+        <p:nvSpPr>
+          <p:cNvPr id="13" name="Прямоугольник 12"/>
+          <p:cNvSpPr/>
+          <p:nvPr/>
+        </p:nvSpPr>
+        <p:spPr>
+          <a:xfrm>
+            <a:off x="6718530" y="5559621"/>
+            <a:ext cx="2470434" cy="467784"/>
+          </a:xfrm>
+          <a:prstGeom prst="rect">
+            <a:avLst/>
+          </a:prstGeom>
+          <a:solidFill>
+            <a:srgbClr val="5C4033">
+              <a:alpha val="70000"/>
+            </a:srgbClr>
+          </a:solidFill>
+          <a:ln>
+            <a:noFill/>
+          </a:ln>
+        </p:spPr>
+        <p:style>
+          <a:lnRef idx="2">
+            <a:schemeClr val="accent1">
+              <a:shade val="50000"/>
+            </a:schemeClr>
+          </a:lnRef>
+          <a:fillRef idx="1">
+            <a:schemeClr val="accent1"/>
+          </a:fillRef>
+          <a:effectRef idx="0">
+            <a:schemeClr val="accent1"/>
+          </a:effectRef>
+          <a:fontRef idx="minor">
+            <a:schemeClr val="lt1"/>
+          </a:fontRef>
+        </p:style>
+        <p:txBody>
+          <a:bodyPr rtlCol="0" anchor="ctr"/>
+          <a:lstStyle/>
+          <a:p>
+            <a:pPr algn="ctr"/>
+            <a:endParaRPr lang="ru-RU"/>
+          </a:p>
+        </p:txBody>
+      </p:sp>
+      <p:pic>
+        <p:nvPicPr>
+          <p:cNvPr id="14" name="Picture 2" descr="C:\!DISK\116 WEBSITES AND DOMAINS\cfeglobal.org\assets\images\logo\cfe-long.png"/>
+          <p:cNvPicPr>
+            <a:picLocks noChangeAspect="1" noChangeArrowheads="1"/>
+          </p:cNvPicPr>
+          <p:nvPr/>
+        </p:nvPicPr>
+        <p:blipFill>
+          <a:blip r:embed="rId4" cstate="print">
+            <a:extLst>
+              <a:ext uri="{28A0092B-C50C-407E-A947-70E740481C1C}">
+                <a14:useLocalDpi xmlns:a14="http://schemas.microsoft.com/office/drawing/2010/main" val="0"/>
+              </a:ext>
+            </a:extLst>
+          </a:blip>
+          <a:srcRect/>
+          <a:stretch>
+            <a:fillRect/>
+          </a:stretch>
+        </p:blipFill>
+        <p:spPr bwMode="auto">
+          <a:xfrm>
+            <a:off x="6794511" y="5632169"/>
+            <a:ext cx="287381" cy="329184"/>
+          </a:xfrm>
+          <a:prstGeom prst="rect">
+            <a:avLst/>
+          </a:prstGeom>
+          <a:noFill/>
+          <a:extLst>
+            <a:ext uri="{909E8E84-426E-40DD-AFC4-6F175D3DCCD1}">
+              <a14:hiddenFill xmlns:a14="http://schemas.microsoft.com/office/drawing/2010/main">
+                <a:solidFill>
+                  <a:srgbClr val="FFFFFF"/>
+                </a:solidFill>
+              </a14:hiddenFill>
+            </a:ext>
+          </a:extLst>
+        </p:spPr>
+      </p:pic>
+      <p:sp>
+        <p:nvSpPr>
+          <p:cNvPr id="15" name="TextBox 14"/>
+          <p:cNvSpPr txBox="1"/>
+          <p:nvPr/>
+        </p:nvSpPr>
+        <p:spPr>
+          <a:xfrm>
+            <a:off x="7112010" y="5581318"/>
+            <a:ext cx="876715" cy="430887"/>
+          </a:xfrm>
+          <a:prstGeom prst="rect">
+            <a:avLst/>
+          </a:prstGeom>
+          <a:noFill/>
+        </p:spPr>
+        <p:txBody>
+          <a:bodyPr wrap="none" lIns="0" tIns="0" rIns="0" bIns="0" rtlCol="0">
+            <a:spAutoFit/>
+          </a:bodyPr>
+          <a:lstStyle/>
+          <a:p>
+            <a:r>
+              <a:rPr lang="en-US" sz="1400" dirty="0" smtClean="0">
+                <a:solidFill>
+                  <a:schemeClr val="bg1">
+                    <a:lumMod val="95000"/>
+                  </a:schemeClr>
+                </a:solidFill>
+              </a:rPr>
+              <a:t>ECOSYSTEM</a:t>
+            </a:r>
+          </a:p>
+          <a:p>
+            <a:r>
+              <a:rPr lang="en-US" sz="1400" dirty="0" smtClean="0">
+                <a:solidFill>
+                  <a:schemeClr val="bg1">
+                    <a:lumMod val="95000"/>
+                  </a:schemeClr>
+                </a:solidFill>
+              </a:rPr>
+              <a:t>PROGRAMS</a:t>
+            </a:r>
+          </a:p>
+        </p:txBody>
+      </p:sp>
+      <p:pic>
+        <p:nvPicPr>
+          <p:cNvPr id="16" name="Picture 5" descr="E:\112 CFE ARCHIVE AND DATA II\СЕРВЕР CFE БОЛЕЕ ПОЛНЫЙ\DELTACENTER_SERVER\G20\G20 YEA Summit Argentina 20-22 September 2018\Photos\Day 1\EY_G20_0288.jpg"/>
+          <p:cNvPicPr>
+            <a:picLocks noChangeAspect="1" noChangeArrowheads="1"/>
+          </p:cNvPicPr>
+          <p:nvPr/>
+        </p:nvPicPr>
+        <p:blipFill rotWithShape="1">
+          <a:blip r:embed="rId5" cstate="print">
+            <a:extLst>
+              <a:ext uri="{28A0092B-C50C-407E-A947-70E740481C1C}">
+                <a14:useLocalDpi xmlns:a14="http://schemas.microsoft.com/office/drawing/2010/main" val="0"/>
+              </a:ext>
+            </a:extLst>
+          </a:blip>
+          <a:srcRect l="23147" r="17894"/>
+          <a:stretch/>
+        </p:blipFill>
+        <p:spPr bwMode="auto">
+          <a:xfrm>
+            <a:off x="1001792" y="3443311"/>
+            <a:ext cx="2470434" cy="2794226"/>
+          </a:xfrm>
+          <a:prstGeom prst="rect">
+            <a:avLst/>
+          </a:prstGeom>
+          <a:noFill/>
+          <a:extLst>
+            <a:ext uri="{909E8E84-426E-40DD-AFC4-6F175D3DCCD1}">
+              <a14:hiddenFill xmlns:a14="http://schemas.microsoft.com/office/drawing/2010/main">
+                <a:solidFill>
+                  <a:srgbClr val="FFFFFF"/>
+                </a:solidFill>
+              </a14:hiddenFill>
+            </a:ext>
+          </a:extLst>
+        </p:spPr>
+      </p:pic>
+      <p:pic>
+        <p:nvPicPr>
+          <p:cNvPr id="17" name="Picture 2" descr="E:\112 CFE ARCHIVE AND DATA II\СЕРВЕР CFE БОЛЕЕ ПОЛНЫЙ\DELTACENTER_SERVER\G20\G20 YEA Summit Argentina 20-22 September 2018\Photos\Day 1\EY_G20_0093.jpg"/>
+          <p:cNvPicPr>
+            <a:picLocks noChangeAspect="1" noChangeArrowheads="1"/>
+          </p:cNvPicPr>
+          <p:nvPr/>
+        </p:nvPicPr>
+        <p:blipFill rotWithShape="1">
+          <a:blip r:embed="rId6" cstate="print">
+            <a:extLst>
+              <a:ext uri="{28A0092B-C50C-407E-A947-70E740481C1C}">
+                <a14:useLocalDpi xmlns:a14="http://schemas.microsoft.com/office/drawing/2010/main" val="0"/>
+              </a:ext>
+            </a:extLst>
+          </a:blip>
+          <a:srcRect l="33931" t="-238" r="12036" b="8848"/>
+          <a:stretch/>
+        </p:blipFill>
+        <p:spPr bwMode="auto">
+          <a:xfrm>
+            <a:off x="3831567" y="297541"/>
+            <a:ext cx="2470435" cy="2786420"/>
+          </a:xfrm>
+          <a:prstGeom prst="rect">
+            <a:avLst/>
+          </a:prstGeom>
+          <a:noFill/>
+          <a:extLst>
+            <a:ext uri="{909E8E84-426E-40DD-AFC4-6F175D3DCCD1}">
+              <a14:hiddenFill xmlns:a14="http://schemas.microsoft.com/office/drawing/2010/main">
+                <a:solidFill>
+                  <a:srgbClr val="FFFFFF"/>
+                </a:solidFill>
+              </a14:hiddenFill>
+            </a:ext>
+          </a:extLst>
+        </p:spPr>
+      </p:pic>
+      <p:sp>
+        <p:nvSpPr>
+          <p:cNvPr id="18" name="Прямоугольник 17"/>
+          <p:cNvSpPr/>
+          <p:nvPr/>
+        </p:nvSpPr>
+        <p:spPr>
+          <a:xfrm>
+            <a:off x="3831567" y="2458316"/>
+            <a:ext cx="2470436" cy="467784"/>
+          </a:xfrm>
+          <a:prstGeom prst="rect">
+            <a:avLst/>
+          </a:prstGeom>
+          <a:solidFill>
+            <a:srgbClr val="5C4033">
+              <a:alpha val="70000"/>
+            </a:srgbClr>
+          </a:solidFill>
+          <a:ln>
+            <a:noFill/>
+          </a:ln>
+        </p:spPr>
+        <p:style>
+          <a:lnRef idx="2">
+            <a:schemeClr val="accent1">
+              <a:shade val="50000"/>
+            </a:schemeClr>
+          </a:lnRef>
+          <a:fillRef idx="1">
+            <a:schemeClr val="accent1"/>
+          </a:fillRef>
+          <a:effectRef idx="0">
+            <a:schemeClr val="accent1"/>
+          </a:effectRef>
+          <a:fontRef idx="minor">
+            <a:schemeClr val="lt1"/>
+          </a:fontRef>
+        </p:style>
+        <p:txBody>
+          <a:bodyPr rtlCol="0" anchor="ctr"/>
+          <a:lstStyle/>
+          <a:p>
+            <a:pPr algn="ctr"/>
+            <a:endParaRPr lang="ru-RU"/>
+          </a:p>
+        </p:txBody>
+      </p:sp>
+      <p:pic>
+        <p:nvPicPr>
+          <p:cNvPr id="19" name="Picture 6" descr="E:\112 CFE ARCHIVE AND DATA II\СЕРВЕР CFE БОЛЕЕ ПОЛНЫЙ\DELTACENTER_SERVER\G20\G20 YEA Summit Argentina 20-22 September 2018\Photos\Day 1\EY_G20_0553.jpg"/>
+          <p:cNvPicPr>
+            <a:picLocks noChangeAspect="1" noChangeArrowheads="1"/>
+          </p:cNvPicPr>
+          <p:nvPr/>
+        </p:nvPicPr>
+        <p:blipFill rotWithShape="1">
+          <a:blip r:embed="rId7" cstate="print">
+            <a:extLst>
+              <a:ext uri="{28A0092B-C50C-407E-A947-70E740481C1C}">
+                <a14:useLocalDpi xmlns:a14="http://schemas.microsoft.com/office/drawing/2010/main" val="0"/>
+              </a:ext>
+            </a:extLst>
+          </a:blip>
+          <a:srcRect l="14559" r="26048"/>
+          <a:stretch/>
+        </p:blipFill>
+        <p:spPr bwMode="auto">
+          <a:xfrm>
+            <a:off x="1013095" y="304800"/>
+            <a:ext cx="2475171" cy="2779161"/>
+          </a:xfrm>
+          <a:prstGeom prst="rect">
+            <a:avLst/>
+          </a:prstGeom>
+          <a:noFill/>
+          <a:extLst>
+            <a:ext uri="{909E8E84-426E-40DD-AFC4-6F175D3DCCD1}">
+              <a14:hiddenFill xmlns:a14="http://schemas.microsoft.com/office/drawing/2010/main">
+                <a:solidFill>
+                  <a:srgbClr val="FFFFFF"/>
+                </a:solidFill>
+              </a14:hiddenFill>
+            </a:ext>
+          </a:extLst>
+        </p:spPr>
+      </p:pic>
+      <p:sp>
+        <p:nvSpPr>
+          <p:cNvPr id="20" name="Прямоугольник 19"/>
+          <p:cNvSpPr/>
+          <p:nvPr/>
+        </p:nvSpPr>
+        <p:spPr>
+          <a:xfrm>
+            <a:off x="1013096" y="2460862"/>
+            <a:ext cx="2470434" cy="467784"/>
+          </a:xfrm>
+          <a:prstGeom prst="rect">
+            <a:avLst/>
+          </a:prstGeom>
+          <a:solidFill>
+            <a:srgbClr val="5C4033">
+              <a:alpha val="70000"/>
+            </a:srgbClr>
+          </a:solidFill>
+          <a:ln>
+            <a:noFill/>
+          </a:ln>
+        </p:spPr>
+        <p:style>
+          <a:lnRef idx="2">
+            <a:schemeClr val="accent1">
+              <a:shade val="50000"/>
+            </a:schemeClr>
+          </a:lnRef>
+          <a:fillRef idx="1">
+            <a:schemeClr val="accent1"/>
+          </a:fillRef>
+          <a:effectRef idx="0">
+            <a:schemeClr val="accent1"/>
+          </a:effectRef>
+          <a:fontRef idx="minor">
+            <a:schemeClr val="lt1"/>
+          </a:fontRef>
+        </p:style>
+        <p:txBody>
+          <a:bodyPr rtlCol="0" anchor="ctr"/>
+          <a:lstStyle/>
+          <a:p>
+            <a:pPr algn="ctr"/>
+            <a:endParaRPr lang="ru-RU"/>
+          </a:p>
+        </p:txBody>
+      </p:sp>
+      <p:pic>
+        <p:nvPicPr>
+          <p:cNvPr id="21" name="Picture 2" descr="C:\!DISK\116 WEBSITES AND DOMAINS\cfeglobal.org\assets\images\logo\cfe-long.png"/>
+          <p:cNvPicPr>
+            <a:picLocks noChangeAspect="1" noChangeArrowheads="1"/>
+          </p:cNvPicPr>
+          <p:nvPr/>
+        </p:nvPicPr>
+        <p:blipFill>
+          <a:blip r:embed="rId4" cstate="print">
+            <a:extLst>
+              <a:ext uri="{28A0092B-C50C-407E-A947-70E740481C1C}">
+                <a14:useLocalDpi xmlns:a14="http://schemas.microsoft.com/office/drawing/2010/main" val="0"/>
+              </a:ext>
+            </a:extLst>
+          </a:blip>
+          <a:srcRect/>
+          <a:stretch>
+            <a:fillRect/>
+          </a:stretch>
+        </p:blipFill>
+        <p:spPr bwMode="auto">
+          <a:xfrm>
+            <a:off x="1110644" y="2511713"/>
+            <a:ext cx="287381" cy="329184"/>
+          </a:xfrm>
+          <a:prstGeom prst="rect">
+            <a:avLst/>
+          </a:prstGeom>
+          <a:noFill/>
+          <a:extLst>
+            <a:ext uri="{909E8E84-426E-40DD-AFC4-6F175D3DCCD1}">
+              <a14:hiddenFill xmlns:a14="http://schemas.microsoft.com/office/drawing/2010/main">
+                <a:solidFill>
+                  <a:srgbClr val="FFFFFF"/>
+                </a:solidFill>
+              </a14:hiddenFill>
+            </a:ext>
+          </a:extLst>
+        </p:spPr>
+      </p:pic>
+      <p:sp>
+        <p:nvSpPr>
+          <p:cNvPr id="22" name="TextBox 21"/>
+          <p:cNvSpPr txBox="1"/>
+          <p:nvPr/>
+        </p:nvSpPr>
+        <p:spPr>
+          <a:xfrm>
+            <a:off x="1428143" y="2460862"/>
+            <a:ext cx="859081" cy="430887"/>
+          </a:xfrm>
+          <a:prstGeom prst="rect">
+            <a:avLst/>
+          </a:prstGeom>
+          <a:noFill/>
+        </p:spPr>
+        <p:txBody>
+          <a:bodyPr wrap="none" lIns="0" tIns="0" rIns="0" bIns="0" rtlCol="0">
+            <a:spAutoFit/>
+          </a:bodyPr>
+          <a:lstStyle/>
+          <a:p>
+            <a:r>
+              <a:rPr lang="en-US" sz="1400" dirty="0" smtClean="0">
+                <a:solidFill>
+                  <a:schemeClr val="bg1">
+                    <a:lumMod val="95000"/>
+                  </a:schemeClr>
+                </a:solidFill>
+              </a:rPr>
+              <a:t>STARTUP</a:t>
+            </a:r>
+          </a:p>
+          <a:p>
+            <a:r>
+              <a:rPr lang="en-US" sz="1400" dirty="0" smtClean="0">
+                <a:solidFill>
+                  <a:schemeClr val="bg1">
+                    <a:lumMod val="95000"/>
+                  </a:schemeClr>
+                </a:solidFill>
+              </a:rPr>
+              <a:t>PROGRAMS</a:t>
+            </a:r>
+          </a:p>
+        </p:txBody>
+      </p:sp>
+      <p:pic>
+        <p:nvPicPr>
+          <p:cNvPr id="23" name="Picture 2" descr="C:\!DISK\116 WEBSITES AND DOMAINS\cfeglobal.org\assets\images\logo\cfe-long.png"/>
+          <p:cNvPicPr>
+            <a:picLocks noChangeAspect="1" noChangeArrowheads="1"/>
+          </p:cNvPicPr>
+          <p:nvPr/>
+        </p:nvPicPr>
+        <p:blipFill>
+          <a:blip r:embed="rId4" cstate="print">
+            <a:extLst>
+              <a:ext uri="{28A0092B-C50C-407E-A947-70E740481C1C}">
+                <a14:useLocalDpi xmlns:a14="http://schemas.microsoft.com/office/drawing/2010/main" val="0"/>
+              </a:ext>
+            </a:extLst>
+          </a:blip>
+          <a:srcRect/>
+          <a:stretch>
+            <a:fillRect/>
+          </a:stretch>
+        </p:blipFill>
+        <p:spPr bwMode="auto">
+          <a:xfrm>
+            <a:off x="3907548" y="2530864"/>
+            <a:ext cx="287381" cy="329184"/>
+          </a:xfrm>
+          <a:prstGeom prst="rect">
+            <a:avLst/>
+          </a:prstGeom>
+          <a:noFill/>
+          <a:extLst>
+            <a:ext uri="{909E8E84-426E-40DD-AFC4-6F175D3DCCD1}">
+              <a14:hiddenFill xmlns:a14="http://schemas.microsoft.com/office/drawing/2010/main">
+                <a:solidFill>
+                  <a:srgbClr val="FFFFFF"/>
+                </a:solidFill>
+              </a14:hiddenFill>
+            </a:ext>
+          </a:extLst>
+        </p:spPr>
+      </p:pic>
+      <p:sp>
+        <p:nvSpPr>
+          <p:cNvPr id="24" name="TextBox 23"/>
+          <p:cNvSpPr txBox="1"/>
+          <p:nvPr/>
+        </p:nvSpPr>
+        <p:spPr>
+          <a:xfrm>
+            <a:off x="4225047" y="2480013"/>
+            <a:ext cx="1101905" cy="430887"/>
+          </a:xfrm>
+          <a:prstGeom prst="rect">
+            <a:avLst/>
+          </a:prstGeom>
+          <a:noFill/>
+        </p:spPr>
+        <p:txBody>
+          <a:bodyPr wrap="none" lIns="0" tIns="0" rIns="0" bIns="0" rtlCol="0">
+            <a:spAutoFit/>
+          </a:bodyPr>
+          <a:lstStyle/>
+          <a:p>
+            <a:r>
+              <a:rPr lang="en-US" sz="1400" dirty="0" smtClean="0">
+                <a:solidFill>
+                  <a:schemeClr val="bg1">
+                    <a:lumMod val="95000"/>
+                  </a:schemeClr>
+                </a:solidFill>
+              </a:rPr>
+              <a:t>ACCELERATION</a:t>
+            </a:r>
+          </a:p>
+          <a:p>
+            <a:r>
+              <a:rPr lang="en-US" sz="1400" dirty="0" smtClean="0">
+                <a:solidFill>
+                  <a:schemeClr val="bg1">
+                    <a:lumMod val="95000"/>
+                  </a:schemeClr>
+                </a:solidFill>
+              </a:rPr>
+              <a:t>PROGRAMS</a:t>
+            </a:r>
+          </a:p>
+        </p:txBody>
+      </p:sp>
+      <p:sp>
+        <p:nvSpPr>
+          <p:cNvPr id="26" name="Прямоугольник 25"/>
+          <p:cNvSpPr/>
+          <p:nvPr/>
+        </p:nvSpPr>
+        <p:spPr>
+          <a:xfrm>
+            <a:off x="6718087" y="2429650"/>
+            <a:ext cx="2470434" cy="467784"/>
+          </a:xfrm>
+          <a:prstGeom prst="rect">
+            <a:avLst/>
+          </a:prstGeom>
+          <a:solidFill>
+            <a:srgbClr val="5C4033">
+              <a:alpha val="70000"/>
+            </a:srgbClr>
+          </a:solidFill>
+          <a:ln>
+            <a:noFill/>
+          </a:ln>
+        </p:spPr>
+        <p:style>
+          <a:lnRef idx="2">
+            <a:schemeClr val="accent1">
+              <a:shade val="50000"/>
+            </a:schemeClr>
+          </a:lnRef>
+          <a:fillRef idx="1">
+            <a:schemeClr val="accent1"/>
+          </a:fillRef>
+          <a:effectRef idx="0">
+            <a:schemeClr val="accent1"/>
+          </a:effectRef>
+          <a:fontRef idx="minor">
+            <a:schemeClr val="lt1"/>
+          </a:fontRef>
+        </p:style>
+        <p:txBody>
+          <a:bodyPr rtlCol="0" anchor="ctr"/>
+          <a:lstStyle/>
+          <a:p>
+            <a:pPr algn="ctr"/>
+            <a:endParaRPr lang="ru-RU"/>
+          </a:p>
+        </p:txBody>
+      </p:sp>
+      <p:pic>
+        <p:nvPicPr>
+          <p:cNvPr id="27" name="Picture 2" descr="C:\!DISK\116 WEBSITES AND DOMAINS\cfeglobal.org\assets\images\logo\cfe-long.png"/>
+          <p:cNvPicPr>
+            <a:picLocks noChangeAspect="1" noChangeArrowheads="1"/>
+          </p:cNvPicPr>
+          <p:nvPr/>
+        </p:nvPicPr>
+        <p:blipFill>
+          <a:blip r:embed="rId4" cstate="print">
+            <a:extLst>
+              <a:ext uri="{28A0092B-C50C-407E-A947-70E740481C1C}">
+                <a14:useLocalDpi xmlns:a14="http://schemas.microsoft.com/office/drawing/2010/main" val="0"/>
+              </a:ext>
+            </a:extLst>
+          </a:blip>
+          <a:srcRect/>
+          <a:stretch>
+            <a:fillRect/>
+          </a:stretch>
+        </p:blipFill>
+        <p:spPr bwMode="auto">
+          <a:xfrm>
+            <a:off x="6794068" y="2502198"/>
+            <a:ext cx="287381" cy="329184"/>
+          </a:xfrm>
+          <a:prstGeom prst="rect">
+            <a:avLst/>
+          </a:prstGeom>
+          <a:noFill/>
+          <a:extLst>
+            <a:ext uri="{909E8E84-426E-40DD-AFC4-6F175D3DCCD1}">
+              <a14:hiddenFill xmlns:a14="http://schemas.microsoft.com/office/drawing/2010/main">
+                <a:solidFill>
+                  <a:srgbClr val="FFFFFF"/>
+                </a:solidFill>
+              </a14:hiddenFill>
+            </a:ext>
+          </a:extLst>
+        </p:spPr>
+      </p:pic>
+      <p:sp>
+        <p:nvSpPr>
+          <p:cNvPr id="28" name="TextBox 27"/>
+          <p:cNvSpPr txBox="1"/>
+          <p:nvPr/>
+        </p:nvSpPr>
+        <p:spPr>
+          <a:xfrm>
+            <a:off x="7111567" y="2451347"/>
+            <a:ext cx="931089" cy="430887"/>
+          </a:xfrm>
+          <a:prstGeom prst="rect">
+            <a:avLst/>
+          </a:prstGeom>
+          <a:noFill/>
+        </p:spPr>
+        <p:txBody>
+          <a:bodyPr wrap="none" lIns="0" tIns="0" rIns="0" bIns="0" rtlCol="0">
+            <a:spAutoFit/>
+          </a:bodyPr>
+          <a:lstStyle/>
+          <a:p>
+            <a:r>
+              <a:rPr lang="en-US" sz="1400" dirty="0" smtClean="0">
+                <a:solidFill>
+                  <a:schemeClr val="bg1">
+                    <a:lumMod val="95000"/>
+                  </a:schemeClr>
+                </a:solidFill>
+              </a:rPr>
+              <a:t>MENTORING</a:t>
+            </a:r>
+          </a:p>
+          <a:p>
+            <a:r>
+              <a:rPr lang="en-US" sz="1400" dirty="0" smtClean="0">
+                <a:solidFill>
+                  <a:schemeClr val="bg1">
+                    <a:lumMod val="95000"/>
+                  </a:schemeClr>
+                </a:solidFill>
+              </a:rPr>
+              <a:t>PROGRAMS</a:t>
+            </a:r>
+          </a:p>
+        </p:txBody>
+      </p:sp>
+      <p:sp>
+        <p:nvSpPr>
+          <p:cNvPr id="29" name="Прямоугольник 28"/>
+          <p:cNvSpPr/>
+          <p:nvPr/>
+        </p:nvSpPr>
+        <p:spPr>
+          <a:xfrm>
+            <a:off x="1001792" y="5607325"/>
+            <a:ext cx="2470434" cy="467784"/>
+          </a:xfrm>
+          <a:prstGeom prst="rect">
+            <a:avLst/>
+          </a:prstGeom>
+          <a:solidFill>
+            <a:srgbClr val="5C4033">
+              <a:alpha val="70000"/>
+            </a:srgbClr>
+          </a:solidFill>
+          <a:ln>
+            <a:noFill/>
+          </a:ln>
+        </p:spPr>
+        <p:style>
+          <a:lnRef idx="2">
+            <a:schemeClr val="accent1">
+              <a:shade val="50000"/>
+            </a:schemeClr>
+          </a:lnRef>
+          <a:fillRef idx="1">
+            <a:schemeClr val="accent1"/>
+          </a:fillRef>
+          <a:effectRef idx="0">
+            <a:schemeClr val="accent1"/>
+          </a:effectRef>
+          <a:fontRef idx="minor">
+            <a:schemeClr val="lt1"/>
+          </a:fontRef>
+        </p:style>
+        <p:txBody>
+          <a:bodyPr rtlCol="0" anchor="ctr"/>
+          <a:lstStyle/>
+          <a:p>
+            <a:pPr algn="ctr"/>
+            <a:endParaRPr lang="ru-RU"/>
+          </a:p>
+        </p:txBody>
+      </p:sp>
+      <p:pic>
+        <p:nvPicPr>
+          <p:cNvPr id="30" name="Picture 2" descr="C:\!DISK\116 WEBSITES AND DOMAINS\cfeglobal.org\assets\images\logo\cfe-long.png"/>
+          <p:cNvPicPr>
+            <a:picLocks noChangeAspect="1" noChangeArrowheads="1"/>
+          </p:cNvPicPr>
+          <p:nvPr/>
+        </p:nvPicPr>
+        <p:blipFill>
+          <a:blip r:embed="rId4" cstate="print">
+            <a:extLst>
+              <a:ext uri="{28A0092B-C50C-407E-A947-70E740481C1C}">
+                <a14:useLocalDpi xmlns:a14="http://schemas.microsoft.com/office/drawing/2010/main" val="0"/>
+              </a:ext>
+            </a:extLst>
+          </a:blip>
+          <a:srcRect/>
+          <a:stretch>
+            <a:fillRect/>
+          </a:stretch>
+        </p:blipFill>
+        <p:spPr bwMode="auto">
+          <a:xfrm>
+            <a:off x="1077773" y="5695073"/>
+            <a:ext cx="287381" cy="329184"/>
+          </a:xfrm>
+          <a:prstGeom prst="rect">
+            <a:avLst/>
+          </a:prstGeom>
+          <a:noFill/>
+          <a:extLst>
+            <a:ext uri="{909E8E84-426E-40DD-AFC4-6F175D3DCCD1}">
+              <a14:hiddenFill xmlns:a14="http://schemas.microsoft.com/office/drawing/2010/main">
+                <a:solidFill>
+                  <a:srgbClr val="FFFFFF"/>
+                </a:solidFill>
+              </a14:hiddenFill>
+            </a:ext>
+          </a:extLst>
+        </p:spPr>
+      </p:pic>
+      <p:sp>
+        <p:nvSpPr>
+          <p:cNvPr id="31" name="TextBox 30"/>
+          <p:cNvSpPr txBox="1"/>
+          <p:nvPr/>
+        </p:nvSpPr>
+        <p:spPr>
+          <a:xfrm>
+            <a:off x="1395272" y="5644222"/>
+            <a:ext cx="859081" cy="430887"/>
+          </a:xfrm>
+          <a:prstGeom prst="rect">
+            <a:avLst/>
+          </a:prstGeom>
+          <a:noFill/>
+        </p:spPr>
+        <p:txBody>
+          <a:bodyPr wrap="none" lIns="0" tIns="0" rIns="0" bIns="0" rtlCol="0">
+            <a:spAutoFit/>
+          </a:bodyPr>
+          <a:lstStyle/>
+          <a:p>
+            <a:r>
+              <a:rPr lang="en-US" sz="1400" dirty="0" smtClean="0">
+                <a:solidFill>
+                  <a:schemeClr val="bg1">
+                    <a:lumMod val="95000"/>
+                  </a:schemeClr>
+                </a:solidFill>
+              </a:rPr>
+              <a:t>SCALEUP</a:t>
+            </a:r>
+          </a:p>
+          <a:p>
+            <a:r>
+              <a:rPr lang="en-US" sz="1400" dirty="0" smtClean="0">
+                <a:solidFill>
+                  <a:schemeClr val="bg1">
+                    <a:lumMod val="95000"/>
+                  </a:schemeClr>
+                </a:solidFill>
+              </a:rPr>
+              <a:t>PROGRAMS</a:t>
+            </a:r>
+          </a:p>
+        </p:txBody>
+      </p:sp>
+      <p:cxnSp>
+        <p:nvCxnSpPr>
+          <p:cNvPr id="5" name="Прямая соединительная линия 4"/>
+          <p:cNvCxnSpPr/>
+          <p:nvPr/>
+        </p:nvCxnSpPr>
+        <p:spPr>
+          <a:xfrm flipV="1">
+            <a:off x="724701" y="5550252"/>
+            <a:ext cx="8915400" cy="57073"/>
+          </a:xfrm>
+          <a:prstGeom prst="line">
+            <a:avLst/>
+          </a:prstGeom>
+        </p:spPr>
+        <p:style>
+          <a:lnRef idx="1">
+            <a:schemeClr val="accent1"/>
+          </a:lnRef>
+          <a:fillRef idx="0">
+            <a:schemeClr val="accent1"/>
+          </a:fillRef>
+          <a:effectRef idx="0">
+            <a:schemeClr val="accent1"/>
+          </a:effectRef>
+          <a:fontRef idx="minor">
+            <a:schemeClr val="tx1"/>
+          </a:fontRef>
+        </p:style>
+      </p:cxnSp>
+      <p:pic>
+        <p:nvPicPr>
+          <p:cNvPr id="1026" name="Picture 2" descr="E:\112 CFE ARCHIVE AND DATA II\СЕРВЕР CFE БОЛЕЕ ПОЛНЫЙ\DELTACENTER_SERVER\G20\G20 YEA Summit Argentina 20-22 September 2018\Photos\Day 1\EY_G20_0487.jpg"/>
+          <p:cNvPicPr>
+            <a:picLocks noChangeAspect="1" noChangeArrowheads="1"/>
+          </p:cNvPicPr>
+          <p:nvPr/>
+        </p:nvPicPr>
+        <p:blipFill rotWithShape="1">
+          <a:blip r:embed="rId8" cstate="print">
+            <a:extLst>
+              <a:ext uri="{28A0092B-C50C-407E-A947-70E740481C1C}">
+                <a14:useLocalDpi xmlns:a14="http://schemas.microsoft.com/office/drawing/2010/main" val="0"/>
+              </a:ext>
+            </a:extLst>
+          </a:blip>
+          <a:srcRect l="42594" b="4093"/>
+          <a:stretch/>
+        </p:blipFill>
+        <p:spPr bwMode="auto">
+          <a:xfrm>
+            <a:off x="3831125" y="3414025"/>
+            <a:ext cx="2470877" cy="2752904"/>
+          </a:xfrm>
+          <a:prstGeom prst="rect">
+            <a:avLst/>
+          </a:prstGeom>
+          <a:noFill/>
+          <a:extLst>
+            <a:ext uri="{909E8E84-426E-40DD-AFC4-6F175D3DCCD1}">
+              <a14:hiddenFill xmlns:a14="http://schemas.microsoft.com/office/drawing/2010/main">
+                <a:solidFill>
+                  <a:srgbClr val="FFFFFF"/>
+                </a:solidFill>
+              </a14:hiddenFill>
+            </a:ext>
+          </a:extLst>
+        </p:spPr>
+      </p:pic>
+      <p:sp>
+        <p:nvSpPr>
+          <p:cNvPr id="10" name="Прямоугольник 9"/>
+          <p:cNvSpPr/>
+          <p:nvPr/>
+        </p:nvSpPr>
+        <p:spPr>
+          <a:xfrm>
+            <a:off x="3831125" y="5581318"/>
+            <a:ext cx="2417275" cy="467784"/>
+          </a:xfrm>
+          <a:prstGeom prst="rect">
+            <a:avLst/>
+          </a:prstGeom>
+          <a:solidFill>
+            <a:srgbClr val="5C4033">
+              <a:alpha val="70000"/>
+            </a:srgbClr>
+          </a:solidFill>
+          <a:ln>
+            <a:noFill/>
+          </a:ln>
+        </p:spPr>
+        <p:style>
+          <a:lnRef idx="2">
+            <a:schemeClr val="accent1">
+              <a:shade val="50000"/>
+            </a:schemeClr>
+          </a:lnRef>
+          <a:fillRef idx="1">
+            <a:schemeClr val="accent1"/>
+          </a:fillRef>
+          <a:effectRef idx="0">
+            <a:schemeClr val="accent1"/>
+          </a:effectRef>
+          <a:fontRef idx="minor">
+            <a:schemeClr val="lt1"/>
+          </a:fontRef>
+        </p:style>
+        <p:txBody>
+          <a:bodyPr rtlCol="0" anchor="ctr"/>
+          <a:lstStyle/>
+          <a:p>
+            <a:pPr algn="ctr"/>
+            <a:endParaRPr lang="ru-RU"/>
+          </a:p>
+        </p:txBody>
+      </p:sp>
+      <p:pic>
+        <p:nvPicPr>
+          <p:cNvPr id="6" name="Picture 2" descr="C:\!DISK\116 WEBSITES AND DOMAINS\cfeglobal.org\assets\images\logo\cfe-long.png"/>
+          <p:cNvPicPr>
+            <a:picLocks noChangeAspect="1" noChangeArrowheads="1"/>
+          </p:cNvPicPr>
+          <p:nvPr/>
+        </p:nvPicPr>
+        <p:blipFill>
+          <a:blip r:embed="rId4" cstate="print">
+            <a:extLst>
+              <a:ext uri="{28A0092B-C50C-407E-A947-70E740481C1C}">
+                <a14:useLocalDpi xmlns:a14="http://schemas.microsoft.com/office/drawing/2010/main" val="0"/>
+              </a:ext>
+            </a:extLst>
+          </a:blip>
+          <a:srcRect/>
+          <a:stretch>
+            <a:fillRect/>
+          </a:stretch>
+        </p:blipFill>
+        <p:spPr bwMode="auto">
+          <a:xfrm>
+            <a:off x="3907107" y="5653866"/>
+            <a:ext cx="287381" cy="329184"/>
+          </a:xfrm>
+          <a:prstGeom prst="rect">
+            <a:avLst/>
+          </a:prstGeom>
+          <a:noFill/>
+          <a:extLst>
+            <a:ext uri="{909E8E84-426E-40DD-AFC4-6F175D3DCCD1}">
+              <a14:hiddenFill xmlns:a14="http://schemas.microsoft.com/office/drawing/2010/main">
+                <a:solidFill>
+                  <a:srgbClr val="FFFFFF"/>
+                </a:solidFill>
+              </a14:hiddenFill>
+            </a:ext>
+          </a:extLst>
+        </p:spPr>
+      </p:pic>
+      <p:sp>
+        <p:nvSpPr>
+          <p:cNvPr id="7" name="TextBox 6"/>
+          <p:cNvSpPr txBox="1"/>
+          <p:nvPr/>
+        </p:nvSpPr>
+        <p:spPr>
+          <a:xfrm>
+            <a:off x="4224606" y="5603015"/>
+            <a:ext cx="1047146" cy="430887"/>
+          </a:xfrm>
+          <a:prstGeom prst="rect">
+            <a:avLst/>
+          </a:prstGeom>
+          <a:noFill/>
+        </p:spPr>
+        <p:txBody>
+          <a:bodyPr wrap="none" lIns="0" tIns="0" rIns="0" bIns="0" rtlCol="0">
+            <a:spAutoFit/>
+          </a:bodyPr>
+          <a:lstStyle/>
+          <a:p>
+            <a:r>
+              <a:rPr lang="en-US" sz="1400" dirty="0" smtClean="0">
+                <a:solidFill>
+                  <a:schemeClr val="bg1">
+                    <a:lumMod val="95000"/>
+                  </a:schemeClr>
+                </a:solidFill>
+              </a:rPr>
+              <a:t>EDUCATIONAL</a:t>
+            </a:r>
+          </a:p>
+          <a:p>
+            <a:r>
+              <a:rPr lang="en-US" sz="1400" dirty="0" smtClean="0">
+                <a:solidFill>
+                  <a:schemeClr val="bg1">
+                    <a:lumMod val="95000"/>
+                  </a:schemeClr>
+                </a:solidFill>
+              </a:rPr>
+              <a:t>PROGRAMS</a:t>
+            </a:r>
+          </a:p>
+        </p:txBody>
+      </p:sp>
+    </p:spTree>
+    <p:extLst>
+      <p:ext uri="{BB962C8B-B14F-4D97-AF65-F5344CB8AC3E}">
+        <p14:creationId xmlns:p14="http://schemas.microsoft.com/office/powerpoint/2010/main" val="3253501619"/>
+      </p:ext>
+    </p:extLst>
+  </p:cSld>
+  <p:clrMapOvr>
+    <a:masterClrMapping/>
+  </p:clrMapOvr>
+</p:sld>
+</file>
+
+<file path=ppt/slides/slide7.xml><?xml version="1.0" encoding="utf-8"?>
+<p:sld xmlns:a="http://schemas.openxmlformats.org/drawingml/2006/main" xmlns:r="http://schemas.openxmlformats.org/officeDocument/2006/relationships" xmlns:p="http://schemas.openxmlformats.org/presentationml/2006/main">
+  <p:cSld>
+    <p:spTree>
+      <p:nvGrpSpPr>
+        <p:cNvPr id="1" name=""/>
+        <p:cNvGrpSpPr/>
+        <p:nvPr/>
+      </p:nvGrpSpPr>
+      <p:grpSpPr>
+        <a:xfrm>
+          <a:off x="0" y="0"/>
+          <a:ext cx="0" cy="0"/>
+          <a:chOff x="0" y="0"/>
+          <a:chExt cx="0" cy="0"/>
+        </a:xfrm>
+      </p:grpSpPr>
+      <p:pic>
+        <p:nvPicPr>
+          <p:cNvPr id="33" name="Picture 3" descr="E:\112 CFE ARCHIVE AND DATA II\СЕРВЕР CFE БОЛЕЕ ПОЛНЫЙ\DELTACENTER_SERVER\G20\G20 YEA Summit Argentina 20-22 September 2018\Photos\Day 1\EY_G20_0022.jpg"/>
+          <p:cNvPicPr>
+            <a:picLocks noChangeAspect="1" noChangeArrowheads="1"/>
+          </p:cNvPicPr>
+          <p:nvPr/>
+        </p:nvPicPr>
+        <p:blipFill rotWithShape="1">
+          <a:blip r:embed="rId2" cstate="print">
+            <a:extLst>
+              <a:ext uri="{28A0092B-C50C-407E-A947-70E740481C1C}">
+                <a14:useLocalDpi xmlns:a14="http://schemas.microsoft.com/office/drawing/2010/main" val="0"/>
+              </a:ext>
+            </a:extLst>
+          </a:blip>
+          <a:srcRect l="27607" t="14624" r="25704" b="5716"/>
+          <a:stretch/>
+        </p:blipFill>
+        <p:spPr bwMode="auto">
+          <a:xfrm>
+            <a:off x="6718530" y="3410817"/>
+            <a:ext cx="2469991" cy="2810374"/>
+          </a:xfrm>
+          <a:prstGeom prst="rect">
+            <a:avLst/>
+          </a:prstGeom>
+          <a:noFill/>
+          <a:extLst>
+            <a:ext uri="{909E8E84-426E-40DD-AFC4-6F175D3DCCD1}">
+              <a14:hiddenFill xmlns:a14="http://schemas.microsoft.com/office/drawing/2010/main">
+                <a:solidFill>
+                  <a:srgbClr val="FFFFFF"/>
+                </a:solidFill>
+              </a14:hiddenFill>
+            </a:ext>
+          </a:extLst>
+        </p:spPr>
+      </p:pic>
+      <p:pic>
+        <p:nvPicPr>
+          <p:cNvPr id="25" name="Picture 8" descr="E:\112 CFE ARCHIVE AND DATA II\СЕРВЕР CFE БОЛЕЕ ПОЛНЫЙ\DELTACENTER_SERVER\G20\G20 YEA Summit Argentina 20-22 September 2018\Photos\Day 2\EY_G20_0612.jpg"/>
+          <p:cNvPicPr>
+            <a:picLocks noChangeAspect="1" noChangeArrowheads="1"/>
+          </p:cNvPicPr>
+          <p:nvPr/>
+        </p:nvPicPr>
+        <p:blipFill rotWithShape="1">
+          <a:blip r:embed="rId3" cstate="print">
+            <a:extLst>
+              <a:ext uri="{28A0092B-C50C-407E-A947-70E740481C1C}">
+                <a14:useLocalDpi xmlns:a14="http://schemas.microsoft.com/office/drawing/2010/main" val="0"/>
+              </a:ext>
+            </a:extLst>
+          </a:blip>
+          <a:srcRect l="25228" r="15780"/>
+          <a:stretch/>
+        </p:blipFill>
+        <p:spPr bwMode="auto">
+          <a:xfrm>
+            <a:off x="6718530" y="304800"/>
+            <a:ext cx="2469991" cy="2792191"/>
+          </a:xfrm>
+          <a:prstGeom prst="rect">
+            <a:avLst/>
+          </a:prstGeom>
+          <a:noFill/>
+          <a:extLst>
+            <a:ext uri="{909E8E84-426E-40DD-AFC4-6F175D3DCCD1}">
+              <a14:hiddenFill xmlns:a14="http://schemas.microsoft.com/office/drawing/2010/main">
+                <a:solidFill>
+                  <a:srgbClr val="FFFFFF"/>
+                </a:solidFill>
+              </a14:hiddenFill>
+            </a:ext>
+          </a:extLst>
+        </p:spPr>
+      </p:pic>
+      <p:sp>
+        <p:nvSpPr>
+          <p:cNvPr id="13" name="Прямоугольник 12"/>
+          <p:cNvSpPr/>
+          <p:nvPr/>
+        </p:nvSpPr>
+        <p:spPr>
+          <a:xfrm>
+            <a:off x="6718530" y="5559621"/>
+            <a:ext cx="2470434" cy="467784"/>
+          </a:xfrm>
+          <a:prstGeom prst="rect">
+            <a:avLst/>
+          </a:prstGeom>
+          <a:solidFill>
+            <a:srgbClr val="5C4033">
+              <a:alpha val="70000"/>
+            </a:srgbClr>
+          </a:solidFill>
+          <a:ln>
+            <a:noFill/>
+          </a:ln>
+        </p:spPr>
+        <p:style>
+          <a:lnRef idx="2">
+            <a:schemeClr val="accent1">
+              <a:shade val="50000"/>
+            </a:schemeClr>
+          </a:lnRef>
+          <a:fillRef idx="1">
+            <a:schemeClr val="accent1"/>
+          </a:fillRef>
+          <a:effectRef idx="0">
+            <a:schemeClr val="accent1"/>
+          </a:effectRef>
+          <a:fontRef idx="minor">
+            <a:schemeClr val="lt1"/>
+          </a:fontRef>
+        </p:style>
+        <p:txBody>
+          <a:bodyPr rtlCol="0" anchor="ctr"/>
+          <a:lstStyle/>
+          <a:p>
+            <a:pPr algn="ctr"/>
+            <a:endParaRPr lang="ru-RU"/>
+          </a:p>
+        </p:txBody>
+      </p:sp>
+      <p:pic>
+        <p:nvPicPr>
+          <p:cNvPr id="14" name="Picture 2" descr="C:\!DISK\116 WEBSITES AND DOMAINS\cfeglobal.org\assets\images\logo\cfe-long.png"/>
+          <p:cNvPicPr>
+            <a:picLocks noChangeAspect="1" noChangeArrowheads="1"/>
+          </p:cNvPicPr>
+          <p:nvPr/>
+        </p:nvPicPr>
+        <p:blipFill>
+          <a:blip r:embed="rId4" cstate="print">
+            <a:extLst>
+              <a:ext uri="{28A0092B-C50C-407E-A947-70E740481C1C}">
+                <a14:useLocalDpi xmlns:a14="http://schemas.microsoft.com/office/drawing/2010/main" val="0"/>
+              </a:ext>
+            </a:extLst>
+          </a:blip>
+          <a:srcRect/>
+          <a:stretch>
+            <a:fillRect/>
+          </a:stretch>
+        </p:blipFill>
+        <p:spPr bwMode="auto">
+          <a:xfrm>
+            <a:off x="6794511" y="5632169"/>
+            <a:ext cx="287381" cy="329184"/>
+          </a:xfrm>
+          <a:prstGeom prst="rect">
+            <a:avLst/>
+          </a:prstGeom>
+          <a:noFill/>
+          <a:extLst>
+            <a:ext uri="{909E8E84-426E-40DD-AFC4-6F175D3DCCD1}">
+              <a14:hiddenFill xmlns:a14="http://schemas.microsoft.com/office/drawing/2010/main">
+                <a:solidFill>
+                  <a:srgbClr val="FFFFFF"/>
+                </a:solidFill>
+              </a14:hiddenFill>
+            </a:ext>
+          </a:extLst>
+        </p:spPr>
+      </p:pic>
+      <p:sp>
+        <p:nvSpPr>
+          <p:cNvPr id="15" name="TextBox 14"/>
+          <p:cNvSpPr txBox="1"/>
+          <p:nvPr/>
+        </p:nvSpPr>
+        <p:spPr>
+          <a:xfrm>
+            <a:off x="7112010" y="5581318"/>
+            <a:ext cx="876715" cy="430887"/>
+          </a:xfrm>
+          <a:prstGeom prst="rect">
+            <a:avLst/>
+          </a:prstGeom>
+          <a:noFill/>
+        </p:spPr>
+        <p:txBody>
+          <a:bodyPr wrap="none" lIns="0" tIns="0" rIns="0" bIns="0" rtlCol="0">
+            <a:spAutoFit/>
+          </a:bodyPr>
+          <a:lstStyle/>
+          <a:p>
+            <a:r>
+              <a:rPr lang="en-US" sz="1400" dirty="0" smtClean="0">
+                <a:solidFill>
+                  <a:schemeClr val="bg1">
+                    <a:lumMod val="95000"/>
+                  </a:schemeClr>
+                </a:solidFill>
+              </a:rPr>
+              <a:t>ECOSYSTEM</a:t>
+            </a:r>
+          </a:p>
+          <a:p>
+            <a:r>
+              <a:rPr lang="en-US" sz="1400" dirty="0" smtClean="0">
+                <a:solidFill>
+                  <a:schemeClr val="bg1">
+                    <a:lumMod val="95000"/>
+                  </a:schemeClr>
+                </a:solidFill>
+              </a:rPr>
+              <a:t>PROGRAMS</a:t>
+            </a:r>
+          </a:p>
+        </p:txBody>
+      </p:sp>
+      <p:pic>
+        <p:nvPicPr>
+          <p:cNvPr id="16" name="Picture 5" descr="E:\112 CFE ARCHIVE AND DATA II\СЕРВЕР CFE БОЛЕЕ ПОЛНЫЙ\DELTACENTER_SERVER\G20\G20 YEA Summit Argentina 20-22 September 2018\Photos\Day 1\EY_G20_0288.jpg"/>
+          <p:cNvPicPr>
+            <a:picLocks noChangeAspect="1" noChangeArrowheads="1"/>
+          </p:cNvPicPr>
+          <p:nvPr/>
+        </p:nvPicPr>
+        <p:blipFill rotWithShape="1">
+          <a:blip r:embed="rId5" cstate="print">
+            <a:extLst>
+              <a:ext uri="{28A0092B-C50C-407E-A947-70E740481C1C}">
+                <a14:useLocalDpi xmlns:a14="http://schemas.microsoft.com/office/drawing/2010/main" val="0"/>
+              </a:ext>
+            </a:extLst>
+          </a:blip>
+          <a:srcRect l="23147" r="17894"/>
+          <a:stretch/>
+        </p:blipFill>
+        <p:spPr bwMode="auto">
+          <a:xfrm>
+            <a:off x="1001792" y="3443311"/>
+            <a:ext cx="2470434" cy="2794226"/>
+          </a:xfrm>
+          <a:prstGeom prst="rect">
+            <a:avLst/>
+          </a:prstGeom>
+          <a:noFill/>
+          <a:extLst>
+            <a:ext uri="{909E8E84-426E-40DD-AFC4-6F175D3DCCD1}">
+              <a14:hiddenFill xmlns:a14="http://schemas.microsoft.com/office/drawing/2010/main">
+                <a:solidFill>
+                  <a:srgbClr val="FFFFFF"/>
+                </a:solidFill>
+              </a14:hiddenFill>
+            </a:ext>
+          </a:extLst>
+        </p:spPr>
+      </p:pic>
+      <p:pic>
+        <p:nvPicPr>
+          <p:cNvPr id="17" name="Picture 2" descr="E:\112 CFE ARCHIVE AND DATA II\СЕРВЕР CFE БОЛЕЕ ПОЛНЫЙ\DELTACENTER_SERVER\G20\G20 YEA Summit Argentina 20-22 September 2018\Photos\Day 1\EY_G20_0093.jpg"/>
+          <p:cNvPicPr>
+            <a:picLocks noChangeAspect="1" noChangeArrowheads="1"/>
+          </p:cNvPicPr>
+          <p:nvPr/>
+        </p:nvPicPr>
+        <p:blipFill rotWithShape="1">
+          <a:blip r:embed="rId6" cstate="print">
+            <a:extLst>
+              <a:ext uri="{28A0092B-C50C-407E-A947-70E740481C1C}">
+                <a14:useLocalDpi xmlns:a14="http://schemas.microsoft.com/office/drawing/2010/main" val="0"/>
+              </a:ext>
+            </a:extLst>
+          </a:blip>
+          <a:srcRect l="33931" t="-238" r="12036" b="8848"/>
+          <a:stretch/>
+        </p:blipFill>
+        <p:spPr bwMode="auto">
+          <a:xfrm>
+            <a:off x="3831567" y="297541"/>
+            <a:ext cx="2470435" cy="2786420"/>
+          </a:xfrm>
+          <a:prstGeom prst="rect">
+            <a:avLst/>
+          </a:prstGeom>
+          <a:noFill/>
+          <a:extLst>
+            <a:ext uri="{909E8E84-426E-40DD-AFC4-6F175D3DCCD1}">
+              <a14:hiddenFill xmlns:a14="http://schemas.microsoft.com/office/drawing/2010/main">
+                <a:solidFill>
+                  <a:srgbClr val="FFFFFF"/>
+                </a:solidFill>
+              </a14:hiddenFill>
+            </a:ext>
+          </a:extLst>
+        </p:spPr>
+      </p:pic>
+      <p:sp>
+        <p:nvSpPr>
+          <p:cNvPr id="18" name="Прямоугольник 17"/>
+          <p:cNvSpPr/>
+          <p:nvPr/>
+        </p:nvSpPr>
+        <p:spPr>
+          <a:xfrm>
+            <a:off x="3831567" y="2458316"/>
+            <a:ext cx="2470436" cy="467784"/>
+          </a:xfrm>
+          <a:prstGeom prst="rect">
+            <a:avLst/>
+          </a:prstGeom>
+          <a:solidFill>
+            <a:srgbClr val="5C4033">
+              <a:alpha val="70000"/>
+            </a:srgbClr>
+          </a:solidFill>
+          <a:ln>
+            <a:noFill/>
+          </a:ln>
+        </p:spPr>
+        <p:style>
+          <a:lnRef idx="2">
+            <a:schemeClr val="accent1">
+              <a:shade val="50000"/>
+            </a:schemeClr>
+          </a:lnRef>
+          <a:fillRef idx="1">
+            <a:schemeClr val="accent1"/>
+          </a:fillRef>
+          <a:effectRef idx="0">
+            <a:schemeClr val="accent1"/>
+          </a:effectRef>
+          <a:fontRef idx="minor">
+            <a:schemeClr val="lt1"/>
+          </a:fontRef>
+        </p:style>
+        <p:txBody>
+          <a:bodyPr rtlCol="0" anchor="ctr"/>
+          <a:lstStyle/>
+          <a:p>
+            <a:pPr algn="ctr"/>
+            <a:endParaRPr lang="ru-RU"/>
+          </a:p>
+        </p:txBody>
+      </p:sp>
+      <p:pic>
+        <p:nvPicPr>
+          <p:cNvPr id="19" name="Picture 6" descr="E:\112 CFE ARCHIVE AND DATA II\СЕРВЕР CFE БОЛЕЕ ПОЛНЫЙ\DELTACENTER_SERVER\G20\G20 YEA Summit Argentina 20-22 September 2018\Photos\Day 1\EY_G20_0553.jpg"/>
+          <p:cNvPicPr>
+            <a:picLocks noChangeAspect="1" noChangeArrowheads="1"/>
+          </p:cNvPicPr>
+          <p:nvPr/>
+        </p:nvPicPr>
+        <p:blipFill rotWithShape="1">
+          <a:blip r:embed="rId7" cstate="print">
+            <a:extLst>
+              <a:ext uri="{28A0092B-C50C-407E-A947-70E740481C1C}">
+                <a14:useLocalDpi xmlns:a14="http://schemas.microsoft.com/office/drawing/2010/main" val="0"/>
+              </a:ext>
+            </a:extLst>
+          </a:blip>
+          <a:srcRect l="14559" r="26048"/>
+          <a:stretch/>
+        </p:blipFill>
+        <p:spPr bwMode="auto">
+          <a:xfrm>
+            <a:off x="1013095" y="304800"/>
+            <a:ext cx="2475171" cy="2779161"/>
+          </a:xfrm>
+          <a:prstGeom prst="rect">
+            <a:avLst/>
+          </a:prstGeom>
+          <a:noFill/>
+          <a:extLst>
+            <a:ext uri="{909E8E84-426E-40DD-AFC4-6F175D3DCCD1}">
+              <a14:hiddenFill xmlns:a14="http://schemas.microsoft.com/office/drawing/2010/main">
+                <a:solidFill>
+                  <a:srgbClr val="FFFFFF"/>
+                </a:solidFill>
+              </a14:hiddenFill>
+            </a:ext>
+          </a:extLst>
+        </p:spPr>
+      </p:pic>
+      <p:sp>
+        <p:nvSpPr>
+          <p:cNvPr id="20" name="Прямоугольник 19"/>
+          <p:cNvSpPr/>
+          <p:nvPr/>
+        </p:nvSpPr>
+        <p:spPr>
+          <a:xfrm>
+            <a:off x="1013096" y="2460862"/>
+            <a:ext cx="2470434" cy="467784"/>
+          </a:xfrm>
+          <a:prstGeom prst="rect">
+            <a:avLst/>
+          </a:prstGeom>
+          <a:solidFill>
+            <a:srgbClr val="5C4033">
+              <a:alpha val="70000"/>
+            </a:srgbClr>
+          </a:solidFill>
+          <a:ln>
+            <a:noFill/>
+          </a:ln>
+        </p:spPr>
+        <p:style>
+          <a:lnRef idx="2">
+            <a:schemeClr val="accent1">
+              <a:shade val="50000"/>
+            </a:schemeClr>
+          </a:lnRef>
+          <a:fillRef idx="1">
+            <a:schemeClr val="accent1"/>
+          </a:fillRef>
+          <a:effectRef idx="0">
+            <a:schemeClr val="accent1"/>
+          </a:effectRef>
+          <a:fontRef idx="minor">
+            <a:schemeClr val="lt1"/>
+          </a:fontRef>
+        </p:style>
+        <p:txBody>
+          <a:bodyPr rtlCol="0" anchor="ctr"/>
+          <a:lstStyle/>
+          <a:p>
+            <a:pPr algn="ctr"/>
+            <a:endParaRPr lang="ru-RU"/>
+          </a:p>
+        </p:txBody>
+      </p:sp>
+      <p:pic>
+        <p:nvPicPr>
+          <p:cNvPr id="21" name="Picture 2" descr="C:\!DISK\116 WEBSITES AND DOMAINS\cfeglobal.org\assets\images\logo\cfe-long.png"/>
+          <p:cNvPicPr>
+            <a:picLocks noChangeAspect="1" noChangeArrowheads="1"/>
+          </p:cNvPicPr>
+          <p:nvPr/>
+        </p:nvPicPr>
+        <p:blipFill>
+          <a:blip r:embed="rId4" cstate="print">
+            <a:extLst>
+              <a:ext uri="{28A0092B-C50C-407E-A947-70E740481C1C}">
+                <a14:useLocalDpi xmlns:a14="http://schemas.microsoft.com/office/drawing/2010/main" val="0"/>
+              </a:ext>
+            </a:extLst>
+          </a:blip>
+          <a:srcRect/>
+          <a:stretch>
+            <a:fillRect/>
+          </a:stretch>
+        </p:blipFill>
+        <p:spPr bwMode="auto">
+          <a:xfrm>
+            <a:off x="1110644" y="2511713"/>
+            <a:ext cx="287381" cy="329184"/>
+          </a:xfrm>
+          <a:prstGeom prst="rect">
+            <a:avLst/>
+          </a:prstGeom>
+          <a:noFill/>
+          <a:extLst>
+            <a:ext uri="{909E8E84-426E-40DD-AFC4-6F175D3DCCD1}">
+              <a14:hiddenFill xmlns:a14="http://schemas.microsoft.com/office/drawing/2010/main">
+                <a:solidFill>
+                  <a:srgbClr val="FFFFFF"/>
+                </a:solidFill>
+              </a14:hiddenFill>
+            </a:ext>
+          </a:extLst>
+        </p:spPr>
+      </p:pic>
+      <p:sp>
+        <p:nvSpPr>
+          <p:cNvPr id="22" name="TextBox 21"/>
+          <p:cNvSpPr txBox="1"/>
+          <p:nvPr/>
+        </p:nvSpPr>
+        <p:spPr>
+          <a:xfrm>
+            <a:off x="1428143" y="2460862"/>
+            <a:ext cx="859081" cy="430887"/>
+          </a:xfrm>
+          <a:prstGeom prst="rect">
+            <a:avLst/>
+          </a:prstGeom>
+          <a:noFill/>
+        </p:spPr>
+        <p:txBody>
+          <a:bodyPr wrap="none" lIns="0" tIns="0" rIns="0" bIns="0" rtlCol="0">
+            <a:spAutoFit/>
+          </a:bodyPr>
+          <a:lstStyle/>
+          <a:p>
+            <a:r>
+              <a:rPr lang="en-US" sz="1400" dirty="0" smtClean="0">
+                <a:solidFill>
+                  <a:schemeClr val="bg1">
+                    <a:lumMod val="95000"/>
+                  </a:schemeClr>
+                </a:solidFill>
+              </a:rPr>
+              <a:t>STARTUP</a:t>
+            </a:r>
+          </a:p>
+          <a:p>
+            <a:r>
+              <a:rPr lang="en-US" sz="1400" dirty="0" smtClean="0">
+                <a:solidFill>
+                  <a:schemeClr val="bg1">
+                    <a:lumMod val="95000"/>
+                  </a:schemeClr>
+                </a:solidFill>
+              </a:rPr>
+              <a:t>PROGRAMS</a:t>
+            </a:r>
+          </a:p>
+        </p:txBody>
+      </p:sp>
+      <p:pic>
+        <p:nvPicPr>
+          <p:cNvPr id="23" name="Picture 2" descr="C:\!DISK\116 WEBSITES AND DOMAINS\cfeglobal.org\assets\images\logo\cfe-long.png"/>
+          <p:cNvPicPr>
+            <a:picLocks noChangeAspect="1" noChangeArrowheads="1"/>
+          </p:cNvPicPr>
+          <p:nvPr/>
+        </p:nvPicPr>
+        <p:blipFill>
+          <a:blip r:embed="rId4" cstate="print">
+            <a:extLst>
+              <a:ext uri="{28A0092B-C50C-407E-A947-70E740481C1C}">
+                <a14:useLocalDpi xmlns:a14="http://schemas.microsoft.com/office/drawing/2010/main" val="0"/>
+              </a:ext>
+            </a:extLst>
+          </a:blip>
+          <a:srcRect/>
+          <a:stretch>
+            <a:fillRect/>
+          </a:stretch>
+        </p:blipFill>
+        <p:spPr bwMode="auto">
+          <a:xfrm>
+            <a:off x="3907548" y="2530864"/>
+            <a:ext cx="287381" cy="329184"/>
+          </a:xfrm>
+          <a:prstGeom prst="rect">
+            <a:avLst/>
+          </a:prstGeom>
+          <a:noFill/>
+          <a:extLst>
+            <a:ext uri="{909E8E84-426E-40DD-AFC4-6F175D3DCCD1}">
+              <a14:hiddenFill xmlns:a14="http://schemas.microsoft.com/office/drawing/2010/main">
+                <a:solidFill>
+                  <a:srgbClr val="FFFFFF"/>
+                </a:solidFill>
+              </a14:hiddenFill>
+            </a:ext>
+          </a:extLst>
+        </p:spPr>
+      </p:pic>
+      <p:sp>
+        <p:nvSpPr>
+          <p:cNvPr id="24" name="TextBox 23"/>
+          <p:cNvSpPr txBox="1"/>
+          <p:nvPr/>
+        </p:nvSpPr>
+        <p:spPr>
+          <a:xfrm>
+            <a:off x="4225047" y="2480013"/>
+            <a:ext cx="1101905" cy="430887"/>
+          </a:xfrm>
+          <a:prstGeom prst="rect">
+            <a:avLst/>
+          </a:prstGeom>
+          <a:noFill/>
+        </p:spPr>
+        <p:txBody>
+          <a:bodyPr wrap="none" lIns="0" tIns="0" rIns="0" bIns="0" rtlCol="0">
+            <a:spAutoFit/>
+          </a:bodyPr>
+          <a:lstStyle/>
+          <a:p>
+            <a:r>
+              <a:rPr lang="en-US" sz="1400" dirty="0" smtClean="0">
+                <a:solidFill>
+                  <a:schemeClr val="bg1">
+                    <a:lumMod val="95000"/>
+                  </a:schemeClr>
+                </a:solidFill>
+              </a:rPr>
+              <a:t>ACCELERATION</a:t>
+            </a:r>
+          </a:p>
+          <a:p>
+            <a:r>
+              <a:rPr lang="en-US" sz="1400" dirty="0" smtClean="0">
+                <a:solidFill>
+                  <a:schemeClr val="bg1">
+                    <a:lumMod val="95000"/>
+                  </a:schemeClr>
+                </a:solidFill>
+              </a:rPr>
+              <a:t>PROGRAMS</a:t>
+            </a:r>
+          </a:p>
+        </p:txBody>
+      </p:sp>
+      <p:sp>
+        <p:nvSpPr>
+          <p:cNvPr id="26" name="Прямоугольник 25"/>
+          <p:cNvSpPr/>
+          <p:nvPr/>
+        </p:nvSpPr>
+        <p:spPr>
+          <a:xfrm>
+            <a:off x="6718087" y="2429650"/>
+            <a:ext cx="2470434" cy="467784"/>
+          </a:xfrm>
+          <a:prstGeom prst="rect">
+            <a:avLst/>
+          </a:prstGeom>
+          <a:solidFill>
+            <a:srgbClr val="5C4033">
+              <a:alpha val="70000"/>
+            </a:srgbClr>
+          </a:solidFill>
+          <a:ln>
+            <a:noFill/>
+          </a:ln>
+        </p:spPr>
+        <p:style>
+          <a:lnRef idx="2">
+            <a:schemeClr val="accent1">
+              <a:shade val="50000"/>
+            </a:schemeClr>
+          </a:lnRef>
+          <a:fillRef idx="1">
+            <a:schemeClr val="accent1"/>
+          </a:fillRef>
+          <a:effectRef idx="0">
+            <a:schemeClr val="accent1"/>
+          </a:effectRef>
+          <a:fontRef idx="minor">
+            <a:schemeClr val="lt1"/>
+          </a:fontRef>
+        </p:style>
+        <p:txBody>
+          <a:bodyPr rtlCol="0" anchor="ctr"/>
+          <a:lstStyle/>
+          <a:p>
+            <a:pPr algn="ctr"/>
+            <a:endParaRPr lang="ru-RU"/>
+          </a:p>
+        </p:txBody>
+      </p:sp>
+      <p:pic>
+        <p:nvPicPr>
+          <p:cNvPr id="27" name="Picture 2" descr="C:\!DISK\116 WEBSITES AND DOMAINS\cfeglobal.org\assets\images\logo\cfe-long.png"/>
+          <p:cNvPicPr>
+            <a:picLocks noChangeAspect="1" noChangeArrowheads="1"/>
+          </p:cNvPicPr>
+          <p:nvPr/>
+        </p:nvPicPr>
+        <p:blipFill>
+          <a:blip r:embed="rId4" cstate="print">
+            <a:extLst>
+              <a:ext uri="{28A0092B-C50C-407E-A947-70E740481C1C}">
+                <a14:useLocalDpi xmlns:a14="http://schemas.microsoft.com/office/drawing/2010/main" val="0"/>
+              </a:ext>
+            </a:extLst>
+          </a:blip>
+          <a:srcRect/>
+          <a:stretch>
+            <a:fillRect/>
+          </a:stretch>
+        </p:blipFill>
+        <p:spPr bwMode="auto">
+          <a:xfrm>
+            <a:off x="6794068" y="2502198"/>
+            <a:ext cx="287381" cy="329184"/>
+          </a:xfrm>
+          <a:prstGeom prst="rect">
+            <a:avLst/>
+          </a:prstGeom>
+          <a:noFill/>
+          <a:extLst>
+            <a:ext uri="{909E8E84-426E-40DD-AFC4-6F175D3DCCD1}">
+              <a14:hiddenFill xmlns:a14="http://schemas.microsoft.com/office/drawing/2010/main">
+                <a:solidFill>
+                  <a:srgbClr val="FFFFFF"/>
+                </a:solidFill>
+              </a14:hiddenFill>
+            </a:ext>
+          </a:extLst>
+        </p:spPr>
+      </p:pic>
+      <p:sp>
+        <p:nvSpPr>
+          <p:cNvPr id="28" name="TextBox 27"/>
+          <p:cNvSpPr txBox="1"/>
+          <p:nvPr/>
+        </p:nvSpPr>
+        <p:spPr>
+          <a:xfrm>
+            <a:off x="7111567" y="2451347"/>
+            <a:ext cx="931089" cy="430887"/>
+          </a:xfrm>
+          <a:prstGeom prst="rect">
+            <a:avLst/>
+          </a:prstGeom>
+          <a:noFill/>
+        </p:spPr>
+        <p:txBody>
+          <a:bodyPr wrap="none" lIns="0" tIns="0" rIns="0" bIns="0" rtlCol="0">
+            <a:spAutoFit/>
+          </a:bodyPr>
+          <a:lstStyle/>
+          <a:p>
+            <a:r>
+              <a:rPr lang="en-US" sz="1400" dirty="0" smtClean="0">
+                <a:solidFill>
+                  <a:schemeClr val="bg1">
+                    <a:lumMod val="95000"/>
+                  </a:schemeClr>
+                </a:solidFill>
+              </a:rPr>
+              <a:t>MENTORING</a:t>
+            </a:r>
+          </a:p>
+          <a:p>
+            <a:r>
+              <a:rPr lang="en-US" sz="1400" dirty="0" smtClean="0">
+                <a:solidFill>
+                  <a:schemeClr val="bg1">
+                    <a:lumMod val="95000"/>
+                  </a:schemeClr>
+                </a:solidFill>
+              </a:rPr>
+              <a:t>PROGRAMS</a:t>
+            </a:r>
+          </a:p>
+        </p:txBody>
+      </p:sp>
+      <p:sp>
+        <p:nvSpPr>
+          <p:cNvPr id="29" name="Прямоугольник 28"/>
+          <p:cNvSpPr/>
+          <p:nvPr/>
+        </p:nvSpPr>
+        <p:spPr>
+          <a:xfrm>
+            <a:off x="1001792" y="5607325"/>
+            <a:ext cx="2470434" cy="467784"/>
+          </a:xfrm>
+          <a:prstGeom prst="rect">
+            <a:avLst/>
+          </a:prstGeom>
+          <a:solidFill>
+            <a:srgbClr val="5C4033">
+              <a:alpha val="70000"/>
+            </a:srgbClr>
+          </a:solidFill>
+          <a:ln>
+            <a:noFill/>
+          </a:ln>
+        </p:spPr>
+        <p:style>
+          <a:lnRef idx="2">
+            <a:schemeClr val="accent1">
+              <a:shade val="50000"/>
+            </a:schemeClr>
+          </a:lnRef>
+          <a:fillRef idx="1">
+            <a:schemeClr val="accent1"/>
+          </a:fillRef>
+          <a:effectRef idx="0">
+            <a:schemeClr val="accent1"/>
+          </a:effectRef>
+          <a:fontRef idx="minor">
+            <a:schemeClr val="lt1"/>
+          </a:fontRef>
+        </p:style>
+        <p:txBody>
+          <a:bodyPr rtlCol="0" anchor="ctr"/>
+          <a:lstStyle/>
+          <a:p>
+            <a:pPr algn="ctr"/>
+            <a:endParaRPr lang="ru-RU"/>
+          </a:p>
+        </p:txBody>
+      </p:sp>
+      <p:pic>
+        <p:nvPicPr>
+          <p:cNvPr id="30" name="Picture 2" descr="C:\!DISK\116 WEBSITES AND DOMAINS\cfeglobal.org\assets\images\logo\cfe-long.png"/>
+          <p:cNvPicPr>
+            <a:picLocks noChangeAspect="1" noChangeArrowheads="1"/>
+          </p:cNvPicPr>
+          <p:nvPr/>
+        </p:nvPicPr>
+        <p:blipFill>
+          <a:blip r:embed="rId4" cstate="print">
+            <a:extLst>
+              <a:ext uri="{28A0092B-C50C-407E-A947-70E740481C1C}">
+                <a14:useLocalDpi xmlns:a14="http://schemas.microsoft.com/office/drawing/2010/main" val="0"/>
+              </a:ext>
+            </a:extLst>
+          </a:blip>
+          <a:srcRect/>
+          <a:stretch>
+            <a:fillRect/>
+          </a:stretch>
+        </p:blipFill>
+        <p:spPr bwMode="auto">
+          <a:xfrm>
+            <a:off x="1077773" y="5695073"/>
+            <a:ext cx="287381" cy="329184"/>
+          </a:xfrm>
+          <a:prstGeom prst="rect">
+            <a:avLst/>
+          </a:prstGeom>
+          <a:noFill/>
+          <a:extLst>
+            <a:ext uri="{909E8E84-426E-40DD-AFC4-6F175D3DCCD1}">
+              <a14:hiddenFill xmlns:a14="http://schemas.microsoft.com/office/drawing/2010/main">
+                <a:solidFill>
+                  <a:srgbClr val="FFFFFF"/>
+                </a:solidFill>
+              </a14:hiddenFill>
+            </a:ext>
+          </a:extLst>
+        </p:spPr>
+      </p:pic>
+      <p:sp>
+        <p:nvSpPr>
+          <p:cNvPr id="31" name="TextBox 30"/>
+          <p:cNvSpPr txBox="1"/>
+          <p:nvPr/>
+        </p:nvSpPr>
+        <p:spPr>
+          <a:xfrm>
+            <a:off x="1395272" y="5644222"/>
+            <a:ext cx="859081" cy="430887"/>
+          </a:xfrm>
+          <a:prstGeom prst="rect">
+            <a:avLst/>
+          </a:prstGeom>
+          <a:noFill/>
+        </p:spPr>
+        <p:txBody>
+          <a:bodyPr wrap="none" lIns="0" tIns="0" rIns="0" bIns="0" rtlCol="0">
+            <a:spAutoFit/>
+          </a:bodyPr>
+          <a:lstStyle/>
+          <a:p>
+            <a:r>
+              <a:rPr lang="en-US" sz="1400" dirty="0" smtClean="0">
+                <a:solidFill>
+                  <a:schemeClr val="bg1">
+                    <a:lumMod val="95000"/>
+                  </a:schemeClr>
+                </a:solidFill>
+              </a:rPr>
+              <a:t>SCALEUP</a:t>
+            </a:r>
+          </a:p>
+          <a:p>
+            <a:r>
+              <a:rPr lang="en-US" sz="1400" dirty="0" smtClean="0">
+                <a:solidFill>
+                  <a:schemeClr val="bg1">
+                    <a:lumMod val="95000"/>
+                  </a:schemeClr>
+                </a:solidFill>
+              </a:rPr>
+              <a:t>PROGRAMS</a:t>
+            </a:r>
+          </a:p>
+        </p:txBody>
+      </p:sp>
+      <p:cxnSp>
+        <p:nvCxnSpPr>
+          <p:cNvPr id="5" name="Прямая соединительная линия 4"/>
+          <p:cNvCxnSpPr/>
+          <p:nvPr/>
+        </p:nvCxnSpPr>
+        <p:spPr>
+          <a:xfrm flipV="1">
+            <a:off x="724701" y="5550252"/>
+            <a:ext cx="8915400" cy="57073"/>
+          </a:xfrm>
+          <a:prstGeom prst="line">
+            <a:avLst/>
+          </a:prstGeom>
+        </p:spPr>
+        <p:style>
+          <a:lnRef idx="1">
+            <a:schemeClr val="accent1"/>
+          </a:lnRef>
+          <a:fillRef idx="0">
+            <a:schemeClr val="accent1"/>
+          </a:fillRef>
+          <a:effectRef idx="0">
+            <a:schemeClr val="accent1"/>
+          </a:effectRef>
+          <a:fontRef idx="minor">
+            <a:schemeClr val="tx1"/>
+          </a:fontRef>
+        </p:style>
+      </p:cxnSp>
+      <p:pic>
+        <p:nvPicPr>
+          <p:cNvPr id="1026" name="Picture 2" descr="E:\112 CFE ARCHIVE AND DATA II\СЕРВЕР CFE БОЛЕЕ ПОЛНЫЙ\DELTACENTER_SERVER\G20\G20 YEA Summit Argentina 20-22 September 2018\Photos\Day 1\EY_G20_0487.jpg"/>
+          <p:cNvPicPr>
+            <a:picLocks noChangeAspect="1" noChangeArrowheads="1"/>
+          </p:cNvPicPr>
+          <p:nvPr/>
+        </p:nvPicPr>
+        <p:blipFill rotWithShape="1">
+          <a:blip r:embed="rId8" cstate="print">
+            <a:extLst>
+              <a:ext uri="{28A0092B-C50C-407E-A947-70E740481C1C}">
+                <a14:useLocalDpi xmlns:a14="http://schemas.microsoft.com/office/drawing/2010/main" val="0"/>
+              </a:ext>
+            </a:extLst>
+          </a:blip>
+          <a:srcRect l="42594" b="4093"/>
+          <a:stretch/>
+        </p:blipFill>
+        <p:spPr bwMode="auto">
+          <a:xfrm>
+            <a:off x="3831125" y="3414025"/>
+            <a:ext cx="2470877" cy="2752904"/>
+          </a:xfrm>
+          <a:prstGeom prst="rect">
+            <a:avLst/>
+          </a:prstGeom>
+          <a:noFill/>
+          <a:extLst>
+            <a:ext uri="{909E8E84-426E-40DD-AFC4-6F175D3DCCD1}">
+              <a14:hiddenFill xmlns:a14="http://schemas.microsoft.com/office/drawing/2010/main">
+                <a:solidFill>
+                  <a:srgbClr val="FFFFFF"/>
+                </a:solidFill>
+              </a14:hiddenFill>
+            </a:ext>
+          </a:extLst>
+        </p:spPr>
+      </p:pic>
+      <p:sp>
+        <p:nvSpPr>
+          <p:cNvPr id="10" name="Прямоугольник 9"/>
+          <p:cNvSpPr/>
+          <p:nvPr/>
+        </p:nvSpPr>
+        <p:spPr>
+          <a:xfrm>
+            <a:off x="3831125" y="5581318"/>
+            <a:ext cx="2417275" cy="467784"/>
+          </a:xfrm>
+          <a:prstGeom prst="rect">
+            <a:avLst/>
+          </a:prstGeom>
+          <a:solidFill>
+            <a:srgbClr val="5C4033">
+              <a:alpha val="70000"/>
+            </a:srgbClr>
+          </a:solidFill>
+          <a:ln>
+            <a:noFill/>
+          </a:ln>
+        </p:spPr>
+        <p:style>
+          <a:lnRef idx="2">
+            <a:schemeClr val="accent1">
+              <a:shade val="50000"/>
+            </a:schemeClr>
+          </a:lnRef>
+          <a:fillRef idx="1">
+            <a:schemeClr val="accent1"/>
+          </a:fillRef>
+          <a:effectRef idx="0">
+            <a:schemeClr val="accent1"/>
+          </a:effectRef>
+          <a:fontRef idx="minor">
+            <a:schemeClr val="lt1"/>
+          </a:fontRef>
+        </p:style>
+        <p:txBody>
+          <a:bodyPr rtlCol="0" anchor="ctr"/>
+          <a:lstStyle/>
+          <a:p>
+            <a:pPr algn="ctr"/>
+            <a:endParaRPr lang="ru-RU"/>
+          </a:p>
+        </p:txBody>
+      </p:sp>
+      <p:pic>
+        <p:nvPicPr>
+          <p:cNvPr id="6" name="Picture 2" descr="C:\!DISK\116 WEBSITES AND DOMAINS\cfeglobal.org\assets\images\logo\cfe-long.png"/>
+          <p:cNvPicPr>
+            <a:picLocks noChangeAspect="1" noChangeArrowheads="1"/>
+          </p:cNvPicPr>
+          <p:nvPr/>
+        </p:nvPicPr>
+        <p:blipFill>
+          <a:blip r:embed="rId4" cstate="print">
+            <a:extLst>
+              <a:ext uri="{28A0092B-C50C-407E-A947-70E740481C1C}">
+                <a14:useLocalDpi xmlns:a14="http://schemas.microsoft.com/office/drawing/2010/main" val="0"/>
+              </a:ext>
+            </a:extLst>
+          </a:blip>
+          <a:srcRect/>
+          <a:stretch>
+            <a:fillRect/>
+          </a:stretch>
+        </p:blipFill>
+        <p:spPr bwMode="auto">
+          <a:xfrm>
+            <a:off x="3907107" y="5653866"/>
+            <a:ext cx="287381" cy="329184"/>
+          </a:xfrm>
+          <a:prstGeom prst="rect">
+            <a:avLst/>
+          </a:prstGeom>
+          <a:noFill/>
+          <a:extLst>
+            <a:ext uri="{909E8E84-426E-40DD-AFC4-6F175D3DCCD1}">
+              <a14:hiddenFill xmlns:a14="http://schemas.microsoft.com/office/drawing/2010/main">
+                <a:solidFill>
+                  <a:srgbClr val="FFFFFF"/>
+                </a:solidFill>
+              </a14:hiddenFill>
+            </a:ext>
+          </a:extLst>
+        </p:spPr>
+      </p:pic>
+      <p:sp>
+        <p:nvSpPr>
+          <p:cNvPr id="7" name="TextBox 6"/>
+          <p:cNvSpPr txBox="1"/>
+          <p:nvPr/>
+        </p:nvSpPr>
+        <p:spPr>
+          <a:xfrm>
+            <a:off x="4224606" y="5603015"/>
+            <a:ext cx="1047146" cy="430887"/>
+          </a:xfrm>
+          <a:prstGeom prst="rect">
+            <a:avLst/>
+          </a:prstGeom>
+          <a:noFill/>
+        </p:spPr>
+        <p:txBody>
+          <a:bodyPr wrap="none" lIns="0" tIns="0" rIns="0" bIns="0" rtlCol="0">
+            <a:spAutoFit/>
+          </a:bodyPr>
+          <a:lstStyle/>
+          <a:p>
+            <a:r>
+              <a:rPr lang="en-US" sz="1400" dirty="0" smtClean="0">
+                <a:solidFill>
+                  <a:schemeClr val="bg1">
+                    <a:lumMod val="95000"/>
+                  </a:schemeClr>
+                </a:solidFill>
+              </a:rPr>
+              <a:t>EDUCATIONAL</a:t>
+            </a:r>
+          </a:p>
+          <a:p>
+            <a:r>
+              <a:rPr lang="en-US" sz="1400" dirty="0" smtClean="0">
+                <a:solidFill>
+                  <a:schemeClr val="bg1">
+                    <a:lumMod val="95000"/>
+                  </a:schemeClr>
+                </a:solidFill>
+              </a:rPr>
+              <a:t>PROGRAMS</a:t>
+            </a:r>
+          </a:p>
+        </p:txBody>
+      </p:sp>
+    </p:spTree>
+    <p:extLst>
+      <p:ext uri="{BB962C8B-B14F-4D97-AF65-F5344CB8AC3E}">
+        <p14:creationId xmlns:p14="http://schemas.microsoft.com/office/powerpoint/2010/main" val="2553549298"/>
+      </p:ext>
+    </p:extLst>
+  </p:cSld>
+  <p:clrMapOvr>
+    <a:masterClrMapping/>
+  </p:clrMapOvr>
+</p:sld>
+</file>
+
+<file path=ppt/slides/slide8.xml><?xml version="1.0" encoding="utf-8"?>
+<p:sld xmlns:a="http://schemas.openxmlformats.org/drawingml/2006/main" xmlns:r="http://schemas.openxmlformats.org/officeDocument/2006/relationships" xmlns:p="http://schemas.openxmlformats.org/presentationml/2006/main">
+  <p:cSld>
+    <p:spTree>
+      <p:nvGrpSpPr>
+        <p:cNvPr id="1" name=""/>
+        <p:cNvGrpSpPr/>
+        <p:nvPr/>
+      </p:nvGrpSpPr>
+      <p:grpSpPr>
+        <a:xfrm>
+          <a:off x="0" y="0"/>
+          <a:ext cx="0" cy="0"/>
+          <a:chOff x="0" y="0"/>
+          <a:chExt cx="0" cy="0"/>
+        </a:xfrm>
+      </p:grpSpPr>
+      <p:sp>
+        <p:nvSpPr>
+          <p:cNvPr id="9" name="Пятиугольник 8"/>
+          <p:cNvSpPr/>
+          <p:nvPr/>
+        </p:nvSpPr>
+        <p:spPr>
+          <a:xfrm>
+            <a:off x="0" y="0"/>
+            <a:ext cx="19507200" cy="6705600"/>
+          </a:xfrm>
+          <a:prstGeom prst="homePlate">
+            <a:avLst>
+              <a:gd name="adj" fmla="val 0"/>
+            </a:avLst>
+          </a:prstGeom>
+          <a:gradFill>
+            <a:gsLst>
+              <a:gs pos="100000">
+                <a:srgbClr val="C8DFFA"/>
+              </a:gs>
+              <a:gs pos="100000">
+                <a:srgbClr val="2446C8"/>
+              </a:gs>
+            </a:gsLst>
+            <a:lin ang="0" scaled="0"/>
+          </a:gradFill>
+          <a:ln>
+            <a:noFill/>
+          </a:ln>
+        </p:spPr>
+        <p:style>
+          <a:lnRef idx="2">
+            <a:schemeClr val="accent1">
+              <a:shade val="50000"/>
+            </a:schemeClr>
+          </a:lnRef>
+          <a:fillRef idx="1">
+            <a:schemeClr val="accent1"/>
+          </a:fillRef>
+          <a:effectRef idx="0">
+            <a:schemeClr val="accent1"/>
+          </a:effectRef>
+          <a:fontRef idx="minor">
+            <a:schemeClr val="lt1"/>
+          </a:fontRef>
+        </p:style>
+        <p:txBody>
+          <a:bodyPr rtlCol="0" anchor="ctr"/>
+          <a:lstStyle/>
+          <a:p>
+            <a:pPr algn="ctr"/>
+            <a:endParaRPr lang="ru-RU"/>
+          </a:p>
+        </p:txBody>
+      </p:sp>
+      <p:pic>
+        <p:nvPicPr>
+          <p:cNvPr id="1026" name="Picture 2" descr="E:\112 CFE ARCHIVE AND DATA II\СЕРВЕР CFE БОЛЕЕ ПОЛНЫЙ\DELTACENTER_SERVER\G20\G20 YEA Summit Argentina 20-22 September 2018\Photos\Day 1\EY_G20_0093.jpg"/>
+          <p:cNvPicPr>
+            <a:picLocks noChangeAspect="1" noChangeArrowheads="1"/>
+          </p:cNvPicPr>
+          <p:nvPr/>
+        </p:nvPicPr>
+        <p:blipFill>
+          <a:blip r:embed="rId2" cstate="print">
+            <a:extLst>
+              <a:ext uri="{28A0092B-C50C-407E-A947-70E740481C1C}">
+                <a14:useLocalDpi xmlns:a14="http://schemas.microsoft.com/office/drawing/2010/main" val="0"/>
+              </a:ext>
+            </a:extLst>
+          </a:blip>
+          <a:srcRect/>
+          <a:stretch>
+            <a:fillRect/>
+          </a:stretch>
+        </p:blipFill>
+        <p:spPr bwMode="auto">
+          <a:xfrm>
             <a:off x="152400" y="183099"/>
             <a:ext cx="4572000" cy="3048952"/>
           </a:xfrm>
@@ -5063,7 +8398,7 @@
 </p:sld>
 </file>
 
-<file path=ppt/slides/slide4.xml><?xml version="1.0" encoding="utf-8"?>
+<file path=ppt/slides/slide9.xml><?xml version="1.0" encoding="utf-8"?>
 <p:sld xmlns:a="http://schemas.openxmlformats.org/drawingml/2006/main" xmlns:r="http://schemas.openxmlformats.org/officeDocument/2006/relationships" xmlns:p="http://schemas.openxmlformats.org/presentationml/2006/main">
   <p:cSld>
     <p:spTree>
